--- a/docs/intro-v4.pptx
+++ b/docs/intro-v4.pptx
@@ -20705,7 +20705,7 @@
                 <a:cs typeface="Noto Sans SC"/>
                 <a:sym typeface="Noto Sans SC"/>
               </a:rPr>
-              <a:t>企业级智能体功能补强 · 落地进展与剩余接线</a:t>
+              <a:t>企业级智能体功能补强 · 按 SDD 全流程落地进展</a:t>
             </a:r>
             <a:endParaRPr lang="en-US" sz="1100"/>
           </a:p>
@@ -20811,7 +20811,7 @@
                 <a:cs typeface="Noto Sans SC"/>
                 <a:sym typeface="Noto Sans SC"/>
               </a:rPr>
-              <a:t>2026-09</a:t>
+              <a:t>2026-09 · 更新至 019 收尾</a:t>
             </a:r>
             <a:endParaRPr lang="en-US" sz="1100"/>
           </a:p>
@@ -20981,7 +20981,7 @@
                 <a:cs typeface="Noto Sans SC"/>
                 <a:sym typeface="Noto Sans SC"/>
               </a:rPr>
-              <a:t>SDD 落地进展：P0/P1/P2 库代码 + 单测全部全绿，剩余为生产接线</a:t>
+              <a:t>SDD 落地进展：P0/P1/P2 共 15 项全部按 SDD 落地，库代码 + 单测全绿，生产接线与 UI 触点已闭合</a:t>
             </a:r>
             <a:endParaRPr lang="en-US" sz="1100"/>
           </a:p>
@@ -21540,7 +21540,7 @@
                 <a:cs typeface="Noto Sans SC"/>
                 <a:sym typeface="Noto Sans SC"/>
               </a:rPr>
-              <a:t>✅ 已落地（库+单测）：合规入场券 · 生产可用性 · 可观测</a:t>
+              <a:t>✅ 已落地（库+单测+生产接线）：合规入场券 · 生产可用性 · 可观测</a:t>
             </a:r>
             <a:endParaRPr lang="en-US" sz="1100"/>
           </a:p>
@@ -22067,7 +22067,7 @@
                 <a:cs typeface="Noto Sans SC"/>
                 <a:sym typeface="Noto Sans SC"/>
               </a:rPr>
-              <a:t>✅ 已落地（库+单测）：多步骤可靠 · 合规扩展 · 工作可交接</a:t>
+              <a:t>✅ 已落地（库+单测+生产接线）：多步骤可靠 · 合规扩展 · 工作可交接</a:t>
             </a:r>
             <a:endParaRPr lang="en-US" sz="1100"/>
           </a:p>
@@ -22594,7 +22594,7 @@
                 <a:cs typeface="Noto Sans SC"/>
                 <a:sym typeface="Noto Sans SC"/>
               </a:rPr>
-              <a:t>✅ 已落地（库+单测）：组织级「数字组织」· 越用越聪明</a:t>
+              <a:t>✅ 已落地（库+单测+生产接线）：组织级「数字组织」· 越用越聪明</a:t>
             </a:r>
             <a:endParaRPr lang="en-US" sz="1100"/>
           </a:p>
@@ -22860,7 +22860,7 @@
                 <a:cs typeface="Noto Sans SC"/>
                 <a:sym typeface="Noto Sans SC"/>
               </a:rPr>
-              <a:t>08 · 落地进展与剩余接线项</a:t>
+              <a:t>08 · 落地进展与接线闭合</a:t>
             </a:r>
             <a:endParaRPr lang="en-US" sz="1100"/>
           </a:p>
@@ -22909,7 +22909,7 @@
                 <a:cs typeface="Noto Sans SC"/>
                 <a:sym typeface="Noto Sans SC"/>
               </a:rPr>
-              <a:t>15 项已按 SDD 落地为库代码 + 单测（全绿），剩余 5 项生产接线</a:t>
+              <a:t>15 项已按 SDD 全部落地：库代码 + 单测全绿，生产接线与 UI 触点已闭合</a:t>
             </a:r>
             <a:endParaRPr lang="en-US" sz="1100"/>
           </a:p>
@@ -23459,7 +23459,7 @@
                 <a:cs typeface="Noto Sans SC"/>
                 <a:sym typeface="Noto Sans SC"/>
               </a:rPr>
-              <a:t>剩余 · 生产接线</a:t>
+              <a:t>已闭合 · 生产接线</a:t>
             </a:r>
             <a:endParaRPr lang="en-US" sz="1100"/>
           </a:p>
@@ -23508,7 +23508,7 @@
                 <a:cs typeface="Noto Sans SC"/>
                 <a:sym typeface="Noto Sans SC"/>
               </a:rPr>
-              <a:t>007 网关韧性 / 009 钩子挂载 + 规则页 / 002 会话版本化端点 + UI：库能力已绿，运行时挂载为后续。</a:t>
+              <a:t>007 网关韧性（ResilientLLMClient 已挂生产调用）/ 009 钩子挂载 + 规则页 / 002 会话版本化端点 + UI：运行时挂载已落地，与库能力同步全绿。</a:t>
             </a:r>
             <a:endParaRPr lang="en-US" sz="1100"/>
           </a:p>
@@ -23648,7 +23648,7 @@
                 <a:cs typeface="Noto Sans SC"/>
                 <a:sym typeface="Noto Sans SC"/>
               </a:rPr>
-              <a:t>剩余 · 审计与门禁</a:t>
+              <a:t>已闭合 · 审计与门禁</a:t>
             </a:r>
             <a:endParaRPr lang="en-US" sz="1100"/>
           </a:p>
@@ -23697,7 +23697,7 @@
                 <a:cs typeface="Noto Sans SC"/>
                 <a:sym typeface="Noto Sans SC"/>
               </a:rPr>
-              <a:t>T999 横切审计业务模块未接线；001 六层门禁 chat-api 运行时侧未接线（gate_adapter 已预留开关）。</a:t>
+              <a:t>T999 横切审计已接入 012/014/015/016/017/018 业务模块；001 六层门禁已通过 run_gate_plan 挂入 chat-api 运行时（gate_adapter 已启用开关）。</a:t>
             </a:r>
             <a:endParaRPr lang="en-US" sz="1100"/>
           </a:p>
@@ -31403,7 +31403,7 @@
                 <a:cs typeface="Noto Sans SC"/>
                 <a:sym typeface="Noto Sans SC"/>
               </a:rPr>
-              <a:t>库代码 + 单测全部落地（15 项全绿），剩余生产接线，从能力走进生产</a:t>
+              <a:t>库代码 + 单测全绿，生产接线与 UI 触点全部闭合（15 项落地的 SDD 全流程），从能力走进生产</a:t>
             </a:r>
             <a:endParaRPr lang="en-US" sz="1100"/>
           </a:p>
@@ -31454,7 +31454,7 @@
                 <a:cs typeface="Noto Sans SC"/>
                 <a:sym typeface="Noto Sans SC"/>
               </a:rPr>
-              <a:t>下一步：007/009/002 生产接线 + T999 审计接入 + 001 运行时切换——库能力已就绪，接线即生产可用。</a:t>
+              <a:t>下一步：以 019 弹性 Harness 收尾的 SDD 全流程已就绪，可进入 PR 评审与版本发布——库能力、生产接线与治理资产齐备。</a:t>
             </a:r>
             <a:endParaRPr lang="en-US" sz="1100"/>
           </a:p>
@@ -37312,7 +37312,7 @@
                 <a:cs typeface="Noto Sans SC"/>
                 <a:sym typeface="Noto Sans SC"/>
               </a:rPr>
-              <a:t>现状：P0/P1/P2 共 15 项已按 SDD 落地为库代码 + 单测（全绿），剩余为生产接线与 UI（详见后页）。</a:t>
+              <a:t>最新进展：P0/P1/P2 共 15 项已按 SDD 全流程落地——库代码 + 单测全绿、生产接线（007/009/002/T999/001）与 UI 触点全部闭合，19 份 spec/plan 资产归档（详见后页）。</a:t>
             </a:r>
             <a:endParaRPr lang="en-US" sz="1100"/>
           </a:p>

--- a/docs/intro-v4.pptx
+++ b/docs/intro-v4.pptx
@@ -20600,12 +20600,12 @@
                 <a:solidFill>
                   <a:srgbClr val="10B9A9"/>
                 </a:solidFill>
-                <a:latin typeface="Noto Sans SC"/>
-                <a:ea typeface="Noto Sans SC"/>
-                <a:cs typeface="Noto Sans SC"/>
-                <a:sym typeface="Noto Sans SC"/>
+                <a:latin typeface="Hiragino Sans GB"/>
+                <a:ea typeface="Hiragino Sans GB"/>
+                <a:cs typeface="Hiragino Sans GB"/>
+                <a:sym typeface="Hiragino Sans GB"/>
               </a:rPr>
-              <a:t>Mogong 基于DSH的企业级智能体平台</a:t>
+              <a:t>墨攻基于DSH的企业级智能体平台</a:t>
             </a:r>
             <a:endParaRPr lang="en-US" sz="1100"/>
           </a:p>
@@ -20649,10 +20649,10 @@
                 <a:solidFill>
                   <a:srgbClr val="FFFFFF"/>
                 </a:solidFill>
-                <a:latin typeface="Noto Sans SC"/>
-                <a:ea typeface="Noto Sans SC"/>
-                <a:cs typeface="Noto Sans SC"/>
-                <a:sym typeface="Noto Sans SC"/>
+                <a:latin typeface="Hiragino Sans GB"/>
+                <a:ea typeface="Hiragino Sans GB"/>
+                <a:cs typeface="Hiragino Sans GB"/>
+                <a:sym typeface="Hiragino Sans GB"/>
               </a:rPr>
               <a:t>从能力底座到生产就绪</a:t>
             </a:r>
@@ -20700,10 +20700,10 @@
                     <a:alpha val="70196"/>
                   </a:srgbClr>
                 </a:solidFill>
-                <a:latin typeface="Noto Sans SC"/>
-                <a:ea typeface="Noto Sans SC"/>
-                <a:cs typeface="Noto Sans SC"/>
-                <a:sym typeface="Noto Sans SC"/>
+                <a:latin typeface="Hiragino Sans GB"/>
+                <a:ea typeface="Hiragino Sans GB"/>
+                <a:cs typeface="Hiragino Sans GB"/>
+                <a:sym typeface="Hiragino Sans GB"/>
               </a:rPr>
               <a:t>企业级智能体功能补强 · 按 SDD 全流程落地进展</a:t>
             </a:r>
@@ -20806,12 +20806,12 @@
                     <a:alpha val="45098"/>
                   </a:srgbClr>
                 </a:solidFill>
-                <a:latin typeface="Noto Sans SC"/>
-                <a:ea typeface="Noto Sans SC"/>
-                <a:cs typeface="Noto Sans SC"/>
-                <a:sym typeface="Noto Sans SC"/>
+                <a:latin typeface="Hiragino Sans GB"/>
+                <a:ea typeface="Hiragino Sans GB"/>
+                <a:cs typeface="Hiragino Sans GB"/>
+                <a:sym typeface="Hiragino Sans GB"/>
               </a:rPr>
-              <a:t>2026-09 · 更新至 019 收尾</a:t>
+              <a:t>2026-10 · 至 020</a:t>
             </a:r>
             <a:endParaRPr lang="en-US" sz="1100"/>
           </a:p>
@@ -20927,10 +20927,10 @@
                 <a:solidFill>
                   <a:srgbClr val="0D9488"/>
                 </a:solidFill>
-                <a:latin typeface="Noto Sans SC"/>
-                <a:ea typeface="Noto Sans SC"/>
-                <a:cs typeface="Noto Sans SC"/>
-                <a:sym typeface="Noto Sans SC"/>
+                <a:latin typeface="Hiragino Sans GB"/>
+                <a:ea typeface="Hiragino Sans GB"/>
+                <a:cs typeface="Hiragino Sans GB"/>
+                <a:sym typeface="Hiragino Sans GB"/>
               </a:rPr>
               <a:t>07 · 实施路线图</a:t>
             </a:r>
@@ -20976,12 +20976,12 @@
                 <a:solidFill>
                   <a:srgbClr val="0F172A"/>
                 </a:solidFill>
-                <a:latin typeface="Noto Sans SC"/>
-                <a:ea typeface="Noto Sans SC"/>
-                <a:cs typeface="Noto Sans SC"/>
-                <a:sym typeface="Noto Sans SC"/>
+                <a:latin typeface="Hiragino Sans GB"/>
+                <a:ea typeface="Hiragino Sans GB"/>
+                <a:cs typeface="Hiragino Sans GB"/>
+                <a:sym typeface="Hiragino Sans GB"/>
               </a:rPr>
-              <a:t>SDD 落地进展：P0/P1/P2 共 15 项全部按 SDD 落地，库代码 + 单测全绿，生产接线与 UI 触点已闭合</a:t>
+              <a:t>15 项 + 020 已按 SDD 落地，库代码 + 单测全绿</a:t>
             </a:r>
             <a:endParaRPr lang="en-US" sz="1100"/>
           </a:p>
@@ -21095,10 +21095,10 @@
                 <a:solidFill>
                   <a:srgbClr val="FFFFFF"/>
                 </a:solidFill>
-                <a:latin typeface="Noto Sans SC"/>
-                <a:ea typeface="Noto Sans SC"/>
-                <a:cs typeface="Noto Sans SC"/>
-                <a:sym typeface="Noto Sans SC"/>
+                <a:latin typeface="Hiragino Sans GB"/>
+                <a:ea typeface="Hiragino Sans GB"/>
+                <a:cs typeface="Hiragino Sans GB"/>
+                <a:sym typeface="Hiragino Sans GB"/>
               </a:rPr>
               <a:t>P0</a:t>
             </a:r>
@@ -21144,10 +21144,10 @@
                 <a:solidFill>
                   <a:srgbClr val="FFFFFF"/>
                 </a:solidFill>
-                <a:latin typeface="Noto Sans SC"/>
-                <a:ea typeface="Noto Sans SC"/>
-                <a:cs typeface="Noto Sans SC"/>
-                <a:sym typeface="Noto Sans SC"/>
+                <a:latin typeface="Hiragino Sans GB"/>
+                <a:ea typeface="Hiragino Sans GB"/>
+                <a:cs typeface="Hiragino Sans GB"/>
+                <a:sym typeface="Hiragino Sans GB"/>
               </a:rPr>
               <a:t>生产底座</a:t>
             </a:r>
@@ -21229,10 +21229,10 @@
                 <a:solidFill>
                   <a:srgbClr val="334155"/>
                 </a:solidFill>
-                <a:latin typeface="Noto Sans SC"/>
-                <a:ea typeface="Noto Sans SC"/>
-                <a:cs typeface="Noto Sans SC"/>
-                <a:sym typeface="Noto Sans SC"/>
+                <a:latin typeface="Hiragino Sans GB"/>
+                <a:ea typeface="Hiragino Sans GB"/>
+                <a:cs typeface="Hiragino Sans GB"/>
+                <a:sym typeface="Hiragino Sans GB"/>
               </a:rPr>
               <a:t>风控引擎：Gatekeeper · R0–R4 · RBAC 码 · PII 脱敏</a:t>
             </a:r>
@@ -21314,12 +21314,12 @@
                 <a:solidFill>
                   <a:srgbClr val="334155"/>
                 </a:solidFill>
-                <a:latin typeface="Noto Sans SC"/>
-                <a:ea typeface="Noto Sans SC"/>
-                <a:cs typeface="Noto Sans SC"/>
-                <a:sym typeface="Noto Sans SC"/>
+                <a:latin typeface="Hiragino Sans GB"/>
+                <a:ea typeface="Hiragino Sans GB"/>
+                <a:cs typeface="Hiragino Sans GB"/>
+                <a:sym typeface="Hiragino Sans GB"/>
               </a:rPr>
-              <a:t>LLM 网关韧性：failover · 降级链 · 退避重试</a:t>
+              <a:t>LLM 网关韧性：failover · 降级 · 退避</a:t>
             </a:r>
             <a:endParaRPr lang="en-US" sz="1100"/>
           </a:p>
@@ -21399,10 +21399,10 @@
                 <a:solidFill>
                   <a:srgbClr val="334155"/>
                 </a:solidFill>
-                <a:latin typeface="Noto Sans SC"/>
-                <a:ea typeface="Noto Sans SC"/>
-                <a:cs typeface="Noto Sans SC"/>
-                <a:sym typeface="Noto Sans SC"/>
+                <a:latin typeface="Hiragino Sans GB"/>
+                <a:ea typeface="Hiragino Sans GB"/>
+                <a:cs typeface="Hiragino Sans GB"/>
+                <a:sym typeface="Hiragino Sans GB"/>
               </a:rPr>
               <a:t>运营驾驶舱：成本 / 使用 / 质量 / 趋势</a:t>
             </a:r>
@@ -21486,10 +21486,10 @@
                 <a:solidFill>
                   <a:srgbClr val="0D9488"/>
                 </a:solidFill>
-                <a:latin typeface="Noto Sans SC"/>
-                <a:ea typeface="Noto Sans SC"/>
-                <a:cs typeface="Noto Sans SC"/>
-                <a:sym typeface="Noto Sans SC"/>
+                <a:latin typeface="Hiragino Sans GB"/>
+                <a:ea typeface="Hiragino Sans GB"/>
+                <a:cs typeface="Hiragino Sans GB"/>
+                <a:sym typeface="Hiragino Sans GB"/>
               </a:rPr>
               <a:t>交付</a:t>
             </a:r>
@@ -21535,10 +21535,10 @@
                 <a:solidFill>
                   <a:srgbClr val="0F172A"/>
                 </a:solidFill>
-                <a:latin typeface="Noto Sans SC"/>
-                <a:ea typeface="Noto Sans SC"/>
-                <a:cs typeface="Noto Sans SC"/>
-                <a:sym typeface="Noto Sans SC"/>
+                <a:latin typeface="Hiragino Sans GB"/>
+                <a:ea typeface="Hiragino Sans GB"/>
+                <a:cs typeface="Hiragino Sans GB"/>
+                <a:sym typeface="Hiragino Sans GB"/>
               </a:rPr>
               <a:t>✅ 已落地（库+单测+生产接线）：合规入场券 · 生产可用性 · 可观测</a:t>
             </a:r>
@@ -21622,10 +21622,10 @@
                 <a:solidFill>
                   <a:srgbClr val="FFFFFF"/>
                 </a:solidFill>
-                <a:latin typeface="Noto Sans SC"/>
-                <a:ea typeface="Noto Sans SC"/>
-                <a:cs typeface="Noto Sans SC"/>
-                <a:sym typeface="Noto Sans SC"/>
+                <a:latin typeface="Hiragino Sans GB"/>
+                <a:ea typeface="Hiragino Sans GB"/>
+                <a:cs typeface="Hiragino Sans GB"/>
+                <a:sym typeface="Hiragino Sans GB"/>
               </a:rPr>
               <a:t>P1</a:t>
             </a:r>
@@ -21671,10 +21671,10 @@
                 <a:solidFill>
                   <a:srgbClr val="FFFFFF"/>
                 </a:solidFill>
-                <a:latin typeface="Noto Sans SC"/>
-                <a:ea typeface="Noto Sans SC"/>
-                <a:cs typeface="Noto Sans SC"/>
-                <a:sym typeface="Noto Sans SC"/>
+                <a:latin typeface="Hiragino Sans GB"/>
+                <a:ea typeface="Hiragino Sans GB"/>
+                <a:cs typeface="Hiragino Sans GB"/>
+                <a:sym typeface="Hiragino Sans GB"/>
               </a:rPr>
               <a:t>可靠性与协作</a:t>
             </a:r>
@@ -21756,10 +21756,10 @@
                 <a:solidFill>
                   <a:srgbClr val="334155"/>
                 </a:solidFill>
-                <a:latin typeface="Noto Sans SC"/>
-                <a:ea typeface="Noto Sans SC"/>
-                <a:cs typeface="Noto Sans SC"/>
-                <a:sym typeface="Noto Sans SC"/>
+                <a:latin typeface="Hiragino Sans GB"/>
+                <a:ea typeface="Hiragino Sans GB"/>
+                <a:cs typeface="Hiragino Sans GB"/>
+                <a:sym typeface="Hiragino Sans GB"/>
               </a:rPr>
               <a:t>Hooks 拦截：五事件 + 会话生命周期</a:t>
             </a:r>
@@ -21841,10 +21841,10 @@
                 <a:solidFill>
                   <a:srgbClr val="334155"/>
                 </a:solidFill>
-                <a:latin typeface="Noto Sans SC"/>
-                <a:ea typeface="Noto Sans SC"/>
-                <a:cs typeface="Noto Sans SC"/>
-                <a:sym typeface="Noto Sans SC"/>
+                <a:latin typeface="Hiragino Sans GB"/>
+                <a:ea typeface="Hiragino Sans GB"/>
+                <a:cs typeface="Hiragino Sans GB"/>
+                <a:sym typeface="Hiragino Sans GB"/>
               </a:rPr>
               <a:t>DAG 编排：四模式 · 拓扑 · 环检测 · 条件跳过</a:t>
             </a:r>
@@ -21926,10 +21926,10 @@
                 <a:solidFill>
                   <a:srgbClr val="334155"/>
                 </a:solidFill>
-                <a:latin typeface="Noto Sans SC"/>
-                <a:ea typeface="Noto Sans SC"/>
-                <a:cs typeface="Noto Sans SC"/>
-                <a:sym typeface="Noto Sans SC"/>
+                <a:latin typeface="Hiragino Sans GB"/>
+                <a:ea typeface="Hiragino Sans GB"/>
+                <a:cs typeface="Hiragino Sans GB"/>
+                <a:sym typeface="Hiragino Sans GB"/>
               </a:rPr>
               <a:t>双版本化：版本 / 交接 / 多人协同</a:t>
             </a:r>
@@ -22013,10 +22013,10 @@
                 <a:solidFill>
                   <a:srgbClr val="64748B"/>
                 </a:solidFill>
-                <a:latin typeface="Noto Sans SC"/>
-                <a:ea typeface="Noto Sans SC"/>
-                <a:cs typeface="Noto Sans SC"/>
-                <a:sym typeface="Noto Sans SC"/>
+                <a:latin typeface="Hiragino Sans GB"/>
+                <a:ea typeface="Hiragino Sans GB"/>
+                <a:cs typeface="Hiragino Sans GB"/>
+                <a:sym typeface="Hiragino Sans GB"/>
               </a:rPr>
               <a:t>交付</a:t>
             </a:r>
@@ -22062,10 +22062,10 @@
                 <a:solidFill>
                   <a:srgbClr val="0F172A"/>
                 </a:solidFill>
-                <a:latin typeface="Noto Sans SC"/>
-                <a:ea typeface="Noto Sans SC"/>
-                <a:cs typeface="Noto Sans SC"/>
-                <a:sym typeface="Noto Sans SC"/>
+                <a:latin typeface="Hiragino Sans GB"/>
+                <a:ea typeface="Hiragino Sans GB"/>
+                <a:cs typeface="Hiragino Sans GB"/>
+                <a:sym typeface="Hiragino Sans GB"/>
               </a:rPr>
               <a:t>✅ 已落地（库+单测+生产接线）：多步骤可靠 · 合规扩展 · 工作可交接</a:t>
             </a:r>
@@ -22149,10 +22149,10 @@
                 <a:solidFill>
                   <a:srgbClr val="FFFFFF"/>
                 </a:solidFill>
-                <a:latin typeface="Noto Sans SC"/>
-                <a:ea typeface="Noto Sans SC"/>
-                <a:cs typeface="Noto Sans SC"/>
-                <a:sym typeface="Noto Sans SC"/>
+                <a:latin typeface="Hiragino Sans GB"/>
+                <a:ea typeface="Hiragino Sans GB"/>
+                <a:cs typeface="Hiragino Sans GB"/>
+                <a:sym typeface="Hiragino Sans GB"/>
               </a:rPr>
               <a:t>P2</a:t>
             </a:r>
@@ -22198,10 +22198,10 @@
                 <a:solidFill>
                   <a:srgbClr val="FFFFFF"/>
                 </a:solidFill>
-                <a:latin typeface="Noto Sans SC"/>
-                <a:ea typeface="Noto Sans SC"/>
-                <a:cs typeface="Noto Sans SC"/>
-                <a:sym typeface="Noto Sans SC"/>
+                <a:latin typeface="Hiragino Sans GB"/>
+                <a:ea typeface="Hiragino Sans GB"/>
+                <a:cs typeface="Hiragino Sans GB"/>
+                <a:sym typeface="Hiragino Sans GB"/>
               </a:rPr>
               <a:t>自进化与生态</a:t>
             </a:r>
@@ -22283,10 +22283,10 @@
                 <a:solidFill>
                   <a:srgbClr val="334155"/>
                 </a:solidFill>
-                <a:latin typeface="Noto Sans SC"/>
-                <a:ea typeface="Noto Sans SC"/>
-                <a:cs typeface="Noto Sans SC"/>
-                <a:sym typeface="Noto Sans SC"/>
+                <a:latin typeface="Hiragino Sans GB"/>
+                <a:ea typeface="Hiragino Sans GB"/>
+                <a:cs typeface="Hiragino Sans GB"/>
+                <a:sym typeface="Hiragino Sans GB"/>
               </a:rPr>
               <a:t>Dream 自进化 · 会话→经验→Skill 闭环</a:t>
             </a:r>
@@ -22368,10 +22368,10 @@
                 <a:solidFill>
                   <a:srgbClr val="334155"/>
                 </a:solidFill>
-                <a:latin typeface="Noto Sans SC"/>
-                <a:ea typeface="Noto Sans SC"/>
-                <a:cs typeface="Noto Sans SC"/>
-                <a:sym typeface="Noto Sans SC"/>
+                <a:latin typeface="Hiragino Sans GB"/>
+                <a:ea typeface="Hiragino Sans GB"/>
+                <a:cs typeface="Hiragino Sans GB"/>
+                <a:sym typeface="Hiragino Sans GB"/>
               </a:rPr>
               <a:t>A2A · 多 IM · 业务索引 · 知识图谱</a:t>
             </a:r>
@@ -22453,10 +22453,10 @@
                 <a:solidFill>
                   <a:srgbClr val="334155"/>
                 </a:solidFill>
-                <a:latin typeface="Noto Sans SC"/>
-                <a:ea typeface="Noto Sans SC"/>
-                <a:cs typeface="Noto Sans SC"/>
-                <a:sym typeface="Noto Sans SC"/>
+                <a:latin typeface="Hiragino Sans GB"/>
+                <a:ea typeface="Hiragino Sans GB"/>
+                <a:cs typeface="Hiragino Sans GB"/>
+                <a:sym typeface="Hiragino Sans GB"/>
               </a:rPr>
               <a:t>Skill 市场 · 三范围 Memory · 资产化 / Harness</a:t>
             </a:r>
@@ -22540,10 +22540,10 @@
                 <a:solidFill>
                   <a:srgbClr val="1E293B"/>
                 </a:solidFill>
-                <a:latin typeface="Noto Sans SC"/>
-                <a:ea typeface="Noto Sans SC"/>
-                <a:cs typeface="Noto Sans SC"/>
-                <a:sym typeface="Noto Sans SC"/>
+                <a:latin typeface="Hiragino Sans GB"/>
+                <a:ea typeface="Hiragino Sans GB"/>
+                <a:cs typeface="Hiragino Sans GB"/>
+                <a:sym typeface="Hiragino Sans GB"/>
               </a:rPr>
               <a:t>交付</a:t>
             </a:r>
@@ -22589,10 +22589,10 @@
                 <a:solidFill>
                   <a:srgbClr val="0F172A"/>
                 </a:solidFill>
-                <a:latin typeface="Noto Sans SC"/>
-                <a:ea typeface="Noto Sans SC"/>
-                <a:cs typeface="Noto Sans SC"/>
-                <a:sym typeface="Noto Sans SC"/>
+                <a:latin typeface="Hiragino Sans GB"/>
+                <a:ea typeface="Hiragino Sans GB"/>
+                <a:cs typeface="Hiragino Sans GB"/>
+                <a:sym typeface="Hiragino Sans GB"/>
               </a:rPr>
               <a:t>✅ 已落地（库+单测+生产接线）：组织级「数字组织」· 越用越聪明</a:t>
             </a:r>
@@ -22638,10 +22638,10 @@
                 <a:solidFill>
                   <a:srgbClr val="64748B"/>
                 </a:solidFill>
-                <a:latin typeface="Noto Sans SC"/>
-                <a:ea typeface="Noto Sans SC"/>
-                <a:cs typeface="Noto Sans SC"/>
-                <a:sym typeface="Noto Sans SC"/>
+                <a:latin typeface="Hiragino Sans GB"/>
+                <a:ea typeface="Hiragino Sans GB"/>
+                <a:cs typeface="Hiragino Sans GB"/>
+                <a:sym typeface="Hiragino Sans GB"/>
               </a:rPr>
               <a:t>贯穿原则：复用 DSH Runtime / RBAC / MCP / 自托管与审批·配额·审计挂载点，不重复造底座；守住既有优势边界。</a:t>
             </a:r>
@@ -22687,12 +22687,12 @@
                 <a:solidFill>
                   <a:srgbClr val="94A3B8"/>
                 </a:solidFill>
-                <a:latin typeface="Noto Sans SC"/>
-                <a:ea typeface="Noto Sans SC"/>
-                <a:cs typeface="Noto Sans SC"/>
-                <a:sym typeface="Noto Sans SC"/>
+                <a:latin typeface="Hiragino Sans GB"/>
+                <a:ea typeface="Hiragino Sans GB"/>
+                <a:cs typeface="Hiragino Sans GB"/>
+                <a:sym typeface="Hiragino Sans GB"/>
               </a:rPr>
-              <a:t>MOGONG · 企业级智能体平台</a:t>
+              <a:t>墨攻 · 企业级智能体平台</a:t>
             </a:r>
             <a:endParaRPr lang="en-US" sz="1100"/>
           </a:p>
@@ -22734,10 +22734,10 @@
                 <a:solidFill>
                   <a:srgbClr val="94A3B8"/>
                 </a:solidFill>
-                <a:latin typeface="Noto Sans SC"/>
-                <a:ea typeface="Noto Sans SC"/>
-                <a:cs typeface="Noto Sans SC"/>
-                <a:sym typeface="Noto Sans SC"/>
+                <a:latin typeface="Hiragino Sans GB"/>
+                <a:ea typeface="Hiragino Sans GB"/>
+                <a:cs typeface="Hiragino Sans GB"/>
+                <a:sym typeface="Hiragino Sans GB"/>
               </a:rPr>
               <a:t>'10 / 16'</a:t>
             </a:r>
@@ -22855,10 +22855,10 @@
                 <a:solidFill>
                   <a:srgbClr val="0D9488"/>
                 </a:solidFill>
-                <a:latin typeface="Noto Sans SC"/>
-                <a:ea typeface="Noto Sans SC"/>
-                <a:cs typeface="Noto Sans SC"/>
-                <a:sym typeface="Noto Sans SC"/>
+                <a:latin typeface="Hiragino Sans GB"/>
+                <a:ea typeface="Hiragino Sans GB"/>
+                <a:cs typeface="Hiragino Sans GB"/>
+                <a:sym typeface="Hiragino Sans GB"/>
               </a:rPr>
               <a:t>08 · 落地进展与接线闭合</a:t>
             </a:r>
@@ -22904,12 +22904,12 @@
                 <a:solidFill>
                   <a:srgbClr val="0F172A"/>
                 </a:solidFill>
-                <a:latin typeface="Noto Sans SC"/>
-                <a:ea typeface="Noto Sans SC"/>
-                <a:cs typeface="Noto Sans SC"/>
-                <a:sym typeface="Noto Sans SC"/>
+                <a:latin typeface="Hiragino Sans GB"/>
+                <a:ea typeface="Hiragino Sans GB"/>
+                <a:cs typeface="Hiragino Sans GB"/>
+                <a:sym typeface="Hiragino Sans GB"/>
               </a:rPr>
-              <a:t>15 项已按 SDD 全部落地：库代码 + 单测全绿，生产接线与 UI 触点已闭合</a:t>
+              <a:t>15 项 + 020 已按 SDD 落地，库代码 + 单测全绿</a:t>
             </a:r>
             <a:endParaRPr lang="en-US" sz="1100"/>
           </a:p>
@@ -23027,10 +23027,10 @@
                 <a:solidFill>
                   <a:srgbClr val="10B9A9"/>
                 </a:solidFill>
-                <a:latin typeface="Noto Sans SC"/>
-                <a:ea typeface="Noto Sans SC"/>
-                <a:cs typeface="Noto Sans SC"/>
-                <a:sym typeface="Noto Sans SC"/>
+                <a:latin typeface="Hiragino Sans GB"/>
+                <a:ea typeface="Hiragino Sans GB"/>
+                <a:cs typeface="Hiragino Sans GB"/>
+                <a:sym typeface="Hiragino Sans GB"/>
               </a:rPr>
               <a:t>1</a:t>
             </a:r>
@@ -23076,12 +23076,12 @@
                 <a:solidFill>
                   <a:srgbClr val="0F172A"/>
                 </a:solidFill>
-                <a:latin typeface="Noto Sans SC"/>
-                <a:ea typeface="Noto Sans SC"/>
-                <a:cs typeface="Noto Sans SC"/>
-                <a:sym typeface="Noto Sans SC"/>
+                <a:latin typeface="Hiragino Sans GB"/>
+                <a:ea typeface="Hiragino Sans GB"/>
+                <a:cs typeface="Hiragino Sans GB"/>
+                <a:sym typeface="Hiragino Sans GB"/>
               </a:rPr>
-              <a:t>已完成 · 15 项全绿</a:t>
+              <a:t>已完成 · 16 项全绿</a:t>
             </a:r>
             <a:endParaRPr lang="en-US" sz="1100"/>
           </a:p>
@@ -23125,12 +23125,12 @@
                 <a:solidFill>
                   <a:srgbClr val="64748B"/>
                 </a:solidFill>
-                <a:latin typeface="Noto Sans SC"/>
-                <a:ea typeface="Noto Sans SC"/>
-                <a:cs typeface="Noto Sans SC"/>
-                <a:sym typeface="Noto Sans SC"/>
+                <a:latin typeface="Hiragino Sans GB"/>
+                <a:ea typeface="Hiragino Sans GB"/>
+                <a:cs typeface="Hiragino Sans GB"/>
+                <a:sym typeface="Hiragino Sans GB"/>
               </a:rPr>
-              <a:t>P0/P1/P2 共 15 项已按 SDD 落地为库代码 + 单测，全部通过（chat-api 1562 / admin-api 236 项）。</a:t>
+              <a:t>P0/P1/P2 共 15 项 + 清单外 020，已按 SDD 落地为库代码 + 单测，全部通过（chat-api 1562 / admin-api 236，2026-09 基线）。</a:t>
             </a:r>
             <a:endParaRPr lang="en-US" sz="1100"/>
           </a:p>
@@ -23216,10 +23216,10 @@
                 <a:solidFill>
                   <a:srgbClr val="10B9A9"/>
                 </a:solidFill>
-                <a:latin typeface="Noto Sans SC"/>
-                <a:ea typeface="Noto Sans SC"/>
-                <a:cs typeface="Noto Sans SC"/>
-                <a:sym typeface="Noto Sans SC"/>
+                <a:latin typeface="Hiragino Sans GB"/>
+                <a:ea typeface="Hiragino Sans GB"/>
+                <a:cs typeface="Hiragino Sans GB"/>
+                <a:sym typeface="Hiragino Sans GB"/>
               </a:rPr>
               <a:t>2</a:t>
             </a:r>
@@ -23265,10 +23265,10 @@
                 <a:solidFill>
                   <a:srgbClr val="0F172A"/>
                 </a:solidFill>
-                <a:latin typeface="Noto Sans SC"/>
-                <a:ea typeface="Noto Sans SC"/>
-                <a:cs typeface="Noto Sans SC"/>
-                <a:sym typeface="Noto Sans SC"/>
+                <a:latin typeface="Hiragino Sans GB"/>
+                <a:ea typeface="Hiragino Sans GB"/>
+                <a:cs typeface="Hiragino Sans GB"/>
+                <a:sym typeface="Hiragino Sans GB"/>
               </a:rPr>
               <a:t>已完成 · 2 案例可运行</a:t>
             </a:r>
@@ -23314,10 +23314,10 @@
                 <a:solidFill>
                   <a:srgbClr val="64748B"/>
                 </a:solidFill>
-                <a:latin typeface="Noto Sans SC"/>
-                <a:ea typeface="Noto Sans SC"/>
-                <a:cs typeface="Noto Sans SC"/>
-                <a:sym typeface="Noto Sans SC"/>
+                <a:latin typeface="Hiragino Sans GB"/>
+                <a:ea typeface="Hiragino Sans GB"/>
+                <a:cs typeface="Hiragino Sans GB"/>
+                <a:sym typeface="Hiragino Sans GB"/>
               </a:rPr>
               <a:t>客户反馈分诊 + 竞品深度调研，共 40 项离线端到端测试通过，无需外部 LLM / 网络。</a:t>
             </a:r>
@@ -23405,10 +23405,10 @@
                 <a:solidFill>
                   <a:srgbClr val="10B9A9"/>
                 </a:solidFill>
-                <a:latin typeface="Noto Sans SC"/>
-                <a:ea typeface="Noto Sans SC"/>
-                <a:cs typeface="Noto Sans SC"/>
-                <a:sym typeface="Noto Sans SC"/>
+                <a:latin typeface="Hiragino Sans GB"/>
+                <a:ea typeface="Hiragino Sans GB"/>
+                <a:cs typeface="Hiragino Sans GB"/>
+                <a:sym typeface="Hiragino Sans GB"/>
               </a:rPr>
               <a:t>3</a:t>
             </a:r>
@@ -23454,10 +23454,10 @@
                 <a:solidFill>
                   <a:srgbClr val="0F172A"/>
                 </a:solidFill>
-                <a:latin typeface="Noto Sans SC"/>
-                <a:ea typeface="Noto Sans SC"/>
-                <a:cs typeface="Noto Sans SC"/>
-                <a:sym typeface="Noto Sans SC"/>
+                <a:latin typeface="Hiragino Sans GB"/>
+                <a:ea typeface="Hiragino Sans GB"/>
+                <a:cs typeface="Hiragino Sans GB"/>
+                <a:sym typeface="Hiragino Sans GB"/>
               </a:rPr>
               <a:t>已闭合 · 生产接线</a:t>
             </a:r>
@@ -23503,12 +23503,12 @@
                 <a:solidFill>
                   <a:srgbClr val="64748B"/>
                 </a:solidFill>
-                <a:latin typeface="Noto Sans SC"/>
-                <a:ea typeface="Noto Sans SC"/>
-                <a:cs typeface="Noto Sans SC"/>
-                <a:sym typeface="Noto Sans SC"/>
+                <a:latin typeface="Hiragino Sans GB"/>
+                <a:ea typeface="Hiragino Sans GB"/>
+                <a:cs typeface="Hiragino Sans GB"/>
+                <a:sym typeface="Hiragino Sans GB"/>
               </a:rPr>
-              <a:t>007 网关韧性（ResilientLLMClient 已挂生产调用）/ 009 钩子挂载 + 规则页 / 002 会话版本化端点 + UI：运行时挂载已落地，与库能力同步全绿。</a:t>
+              <a:t>007 网关韧性（ResilientLLMClient 已挂生产调用）/ 009 钩子挂载 + 规则页 / 002 会话版本化端点 + UI</a:t>
             </a:r>
             <a:endParaRPr lang="en-US" sz="1100"/>
           </a:p>
@@ -23594,10 +23594,10 @@
                 <a:solidFill>
                   <a:srgbClr val="10B9A9"/>
                 </a:solidFill>
-                <a:latin typeface="Noto Sans SC"/>
-                <a:ea typeface="Noto Sans SC"/>
-                <a:cs typeface="Noto Sans SC"/>
-                <a:sym typeface="Noto Sans SC"/>
+                <a:latin typeface="Hiragino Sans GB"/>
+                <a:ea typeface="Hiragino Sans GB"/>
+                <a:cs typeface="Hiragino Sans GB"/>
+                <a:sym typeface="Hiragino Sans GB"/>
               </a:rPr>
               <a:t>4</a:t>
             </a:r>
@@ -23643,10 +23643,10 @@
                 <a:solidFill>
                   <a:srgbClr val="0F172A"/>
                 </a:solidFill>
-                <a:latin typeface="Noto Sans SC"/>
-                <a:ea typeface="Noto Sans SC"/>
-                <a:cs typeface="Noto Sans SC"/>
-                <a:sym typeface="Noto Sans SC"/>
+                <a:latin typeface="Hiragino Sans GB"/>
+                <a:ea typeface="Hiragino Sans GB"/>
+                <a:cs typeface="Hiragino Sans GB"/>
+                <a:sym typeface="Hiragino Sans GB"/>
               </a:rPr>
               <a:t>已闭合 · 审计与门禁</a:t>
             </a:r>
@@ -23692,12 +23692,12 @@
                 <a:solidFill>
                   <a:srgbClr val="64748B"/>
                 </a:solidFill>
-                <a:latin typeface="Noto Sans SC"/>
-                <a:ea typeface="Noto Sans SC"/>
-                <a:cs typeface="Noto Sans SC"/>
-                <a:sym typeface="Noto Sans SC"/>
+                <a:latin typeface="Hiragino Sans GB"/>
+                <a:ea typeface="Hiragino Sans GB"/>
+                <a:cs typeface="Hiragino Sans GB"/>
+                <a:sym typeface="Hiragino Sans GB"/>
               </a:rPr>
-              <a:t>T999 横切审计已接入 012/014/015/016/017/018 业务模块；001 六层门禁已通过 run_gate_plan 挂入 chat-api 运行时（gate_adapter 已启用开关）。</a:t>
+              <a:t>T999 横切审计已接入 012/014/015/016/017/018 业务模块；001 六层门禁已通过 run_gate_plan 挂入运行时。</a:t>
             </a:r>
             <a:endParaRPr lang="en-US" sz="1100"/>
           </a:p>
@@ -23783,10 +23783,10 @@
                 <a:solidFill>
                   <a:srgbClr val="10B9A9"/>
                 </a:solidFill>
-                <a:latin typeface="Noto Sans SC"/>
-                <a:ea typeface="Noto Sans SC"/>
-                <a:cs typeface="Noto Sans SC"/>
-                <a:sym typeface="Noto Sans SC"/>
+                <a:latin typeface="Hiragino Sans GB"/>
+                <a:ea typeface="Hiragino Sans GB"/>
+                <a:cs typeface="Hiragino Sans GB"/>
+                <a:sym typeface="Hiragino Sans GB"/>
               </a:rPr>
               <a:t>5</a:t>
             </a:r>
@@ -23832,10 +23832,10 @@
                 <a:solidFill>
                   <a:srgbClr val="0F172A"/>
                 </a:solidFill>
-                <a:latin typeface="Noto Sans SC"/>
-                <a:ea typeface="Noto Sans SC"/>
-                <a:cs typeface="Noto Sans SC"/>
-                <a:sym typeface="Noto Sans SC"/>
+                <a:latin typeface="Hiragino Sans GB"/>
+                <a:ea typeface="Hiragino Sans GB"/>
+                <a:cs typeface="Hiragino Sans GB"/>
+                <a:sym typeface="Hiragino Sans GB"/>
               </a:rPr>
               <a:t>不变 · 既有优势</a:t>
             </a:r>
@@ -23881,10 +23881,10 @@
                 <a:solidFill>
                   <a:srgbClr val="64748B"/>
                 </a:solidFill>
-                <a:latin typeface="Noto Sans SC"/>
-                <a:ea typeface="Noto Sans SC"/>
-                <a:cs typeface="Noto Sans SC"/>
-                <a:sym typeface="Noto Sans SC"/>
+                <a:latin typeface="Hiragino Sans GB"/>
+                <a:ea typeface="Hiragino Sans GB"/>
+                <a:cs typeface="Hiragino Sans GB"/>
+                <a:sym typeface="Hiragino Sans GB"/>
               </a:rPr>
               <a:t>坚持模型与数据自主管控，生产环境自行加固，不可裸用（既有优势边界不变）。</a:t>
             </a:r>
@@ -23930,12 +23930,12 @@
                 <a:solidFill>
                   <a:srgbClr val="94A3B8"/>
                 </a:solidFill>
-                <a:latin typeface="Noto Sans SC"/>
-                <a:ea typeface="Noto Sans SC"/>
-                <a:cs typeface="Noto Sans SC"/>
-                <a:sym typeface="Noto Sans SC"/>
+                <a:latin typeface="Hiragino Sans GB"/>
+                <a:ea typeface="Hiragino Sans GB"/>
+                <a:cs typeface="Hiragino Sans GB"/>
+                <a:sym typeface="Hiragino Sans GB"/>
               </a:rPr>
-              <a:t>MOGONG · 企业级智能体平台</a:t>
+              <a:t>墨攻 · 企业级智能体平台</a:t>
             </a:r>
             <a:endParaRPr lang="en-US" sz="1100"/>
           </a:p>
@@ -23977,10 +23977,10 @@
                 <a:solidFill>
                   <a:srgbClr val="94A3B8"/>
                 </a:solidFill>
-                <a:latin typeface="Noto Sans SC"/>
-                <a:ea typeface="Noto Sans SC"/>
-                <a:cs typeface="Noto Sans SC"/>
-                <a:sym typeface="Noto Sans SC"/>
+                <a:latin typeface="Hiragino Sans GB"/>
+                <a:ea typeface="Hiragino Sans GB"/>
+                <a:cs typeface="Hiragino Sans GB"/>
+                <a:sym typeface="Hiragino Sans GB"/>
               </a:rPr>
               <a:t>'11 / 16'</a:t>
             </a:r>
@@ -24096,10 +24096,10 @@
                 <a:solidFill>
                   <a:srgbClr val="109488"/>
                 </a:solidFill>
-                <a:latin typeface="Noto Sans SC"/>
-                <a:ea typeface="Noto Sans SC"/>
-                <a:cs typeface="Noto Sans SC"/>
-                <a:sym typeface="Noto Sans SC"/>
+                <a:latin typeface="Hiragino Sans GB"/>
+                <a:ea typeface="Hiragino Sans GB"/>
+                <a:cs typeface="Hiragino Sans GB"/>
+                <a:sym typeface="Hiragino Sans GB"/>
               </a:rPr>
               <a:t>09 · 标杆场景验证</a:t>
             </a:r>
@@ -24143,10 +24143,10 @@
                 <a:solidFill>
                   <a:srgbClr val="0F172A"/>
                 </a:solidFill>
-                <a:latin typeface="Noto Sans SC"/>
-                <a:ea typeface="Noto Sans SC"/>
-                <a:cs typeface="Noto Sans SC"/>
-                <a:sym typeface="Noto Sans SC"/>
+                <a:latin typeface="Hiragino Sans GB"/>
+                <a:ea typeface="Hiragino Sans GB"/>
+                <a:cs typeface="Hiragino Sans GB"/>
+                <a:sym typeface="Hiragino Sans GB"/>
               </a:rPr>
               <a:t>两个标杆场景，验证从单 Agent 到多 Agent 的完整能力</a:t>
             </a:r>
@@ -24264,10 +24264,10 @@
                 <a:solidFill>
                   <a:srgbClr val="109488"/>
                 </a:solidFill>
-                <a:latin typeface="Noto Sans SC"/>
-                <a:ea typeface="Noto Sans SC"/>
-                <a:cs typeface="Noto Sans SC"/>
-                <a:sym typeface="Noto Sans SC"/>
+                <a:latin typeface="Hiragino Sans GB"/>
+                <a:ea typeface="Hiragino Sans GB"/>
+                <a:cs typeface="Hiragino Sans GB"/>
+                <a:sym typeface="Hiragino Sans GB"/>
               </a:rPr>
               <a:t>案例一 · 单 Skill / 单会话 / 单智能体</a:t>
             </a:r>
@@ -24311,10 +24311,10 @@
                 <a:solidFill>
                   <a:srgbClr val="0F172A"/>
                 </a:solidFill>
-                <a:latin typeface="Noto Sans SC"/>
-                <a:ea typeface="Noto Sans SC"/>
-                <a:cs typeface="Noto Sans SC"/>
-                <a:sym typeface="Noto Sans SC"/>
+                <a:latin typeface="Hiragino Sans GB"/>
+                <a:ea typeface="Hiragino Sans GB"/>
+                <a:cs typeface="Hiragino Sans GB"/>
+                <a:sym typeface="Hiragino Sans GB"/>
               </a:rPr>
               <a:t>客户反馈智能分诊</a:t>
             </a:r>
@@ -24358,10 +24358,10 @@
                 <a:solidFill>
                   <a:srgbClr val="475569"/>
                 </a:solidFill>
-                <a:latin typeface="Noto Sans SC"/>
-                <a:ea typeface="Noto Sans SC"/>
-                <a:cs typeface="Noto Sans SC"/>
-                <a:sym typeface="Noto Sans SC"/>
+                <a:latin typeface="Hiragino Sans GB"/>
+                <a:ea typeface="Hiragino Sans GB"/>
+                <a:cs typeface="Hiragino Sans GB"/>
+                <a:sym typeface="Hiragino Sans GB"/>
               </a:rPr>
               <a:t>每天 200–500 条反馈一次交互完成分级聚类、P0 识别与审批触发，输出结构化分诊报告。</a:t>
             </a:r>
@@ -24437,10 +24437,10 @@
                 <a:solidFill>
                   <a:srgbClr val="109488"/>
                 </a:solidFill>
-                <a:latin typeface="Noto Sans SC"/>
-                <a:ea typeface="Noto Sans SC"/>
-                <a:cs typeface="Noto Sans SC"/>
-                <a:sym typeface="Noto Sans SC"/>
+                <a:latin typeface="Hiragino Sans GB"/>
+                <a:ea typeface="Hiragino Sans GB"/>
+                <a:cs typeface="Hiragino Sans GB"/>
+                <a:sym typeface="Hiragino Sans GB"/>
               </a:rPr>
               <a:t>≤3 分钟</a:t>
             </a:r>
@@ -24484,10 +24484,10 @@
                 <a:solidFill>
                   <a:srgbClr val="64748B"/>
                 </a:solidFill>
-                <a:latin typeface="Noto Sans SC"/>
-                <a:ea typeface="Noto Sans SC"/>
-                <a:cs typeface="Noto Sans SC"/>
-                <a:sym typeface="Noto Sans SC"/>
+                <a:latin typeface="Hiragino Sans GB"/>
+                <a:ea typeface="Hiragino Sans GB"/>
+                <a:cs typeface="Hiragino Sans GB"/>
+                <a:sym typeface="Hiragino Sans GB"/>
               </a:rPr>
               <a:t>500 条端到端</a:t>
             </a:r>
@@ -24531,10 +24531,10 @@
                 <a:solidFill>
                   <a:srgbClr val="109488"/>
                 </a:solidFill>
-                <a:latin typeface="Noto Sans SC"/>
-                <a:ea typeface="Noto Sans SC"/>
-                <a:cs typeface="Noto Sans SC"/>
-                <a:sym typeface="Noto Sans SC"/>
+                <a:latin typeface="Hiragino Sans GB"/>
+                <a:ea typeface="Hiragino Sans GB"/>
+                <a:cs typeface="Hiragino Sans GB"/>
+                <a:sym typeface="Hiragino Sans GB"/>
               </a:rPr>
               <a:t>≥95%</a:t>
             </a:r>
@@ -24578,10 +24578,10 @@
                 <a:solidFill>
                   <a:srgbClr val="64748B"/>
                 </a:solidFill>
-                <a:latin typeface="Noto Sans SC"/>
-                <a:ea typeface="Noto Sans SC"/>
-                <a:cs typeface="Noto Sans SC"/>
-                <a:sym typeface="Noto Sans SC"/>
+                <a:latin typeface="Hiragino Sans GB"/>
+                <a:ea typeface="Hiragino Sans GB"/>
+                <a:cs typeface="Hiragino Sans GB"/>
+                <a:sym typeface="Hiragino Sans GB"/>
               </a:rPr>
               <a:t>P0 识别召回率</a:t>
             </a:r>
@@ -24625,10 +24625,10 @@
                 <a:solidFill>
                   <a:srgbClr val="109488"/>
                 </a:solidFill>
-                <a:latin typeface="Noto Sans SC"/>
-                <a:ea typeface="Noto Sans SC"/>
-                <a:cs typeface="Noto Sans SC"/>
-                <a:sym typeface="Noto Sans SC"/>
+                <a:latin typeface="Hiragino Sans GB"/>
+                <a:ea typeface="Hiragino Sans GB"/>
+                <a:cs typeface="Hiragino Sans GB"/>
+                <a:sym typeface="Hiragino Sans GB"/>
               </a:rPr>
               <a:t>0</a:t>
             </a:r>
@@ -24672,10 +24672,10 @@
                 <a:solidFill>
                   <a:srgbClr val="64748B"/>
                 </a:solidFill>
-                <a:latin typeface="Noto Sans SC"/>
-                <a:ea typeface="Noto Sans SC"/>
-                <a:cs typeface="Noto Sans SC"/>
-                <a:sym typeface="Noto Sans SC"/>
+                <a:latin typeface="Hiragino Sans GB"/>
+                <a:ea typeface="Hiragino Sans GB"/>
+                <a:cs typeface="Hiragino Sans GB"/>
+                <a:sym typeface="Hiragino Sans GB"/>
               </a:rPr>
               <a:t>PII 泄漏率</a:t>
             </a:r>
@@ -24719,10 +24719,10 @@
                 <a:solidFill>
                   <a:srgbClr val="64748B"/>
                 </a:solidFill>
-                <a:latin typeface="Noto Sans SC"/>
-                <a:ea typeface="Noto Sans SC"/>
-                <a:cs typeface="Noto Sans SC"/>
-                <a:sym typeface="Noto Sans SC"/>
+                <a:latin typeface="Hiragino Sans GB"/>
+                <a:ea typeface="Hiragino Sans GB"/>
+                <a:cs typeface="Hiragino Sans GB"/>
+                <a:sym typeface="Hiragino Sans GB"/>
               </a:rPr>
               <a:t>验证能力：文档解析 · Spreadsheet · RAG · PII 脱敏 · RBAC 审批 · 审计 · 成本驾驶舱</a:t>
             </a:r>
@@ -24808,10 +24808,10 @@
                 <a:solidFill>
                   <a:srgbClr val="109488"/>
                 </a:solidFill>
-                <a:latin typeface="Noto Sans SC"/>
-                <a:ea typeface="Noto Sans SC"/>
-                <a:cs typeface="Noto Sans SC"/>
-                <a:sym typeface="Noto Sans SC"/>
+                <a:latin typeface="Hiragino Sans GB"/>
+                <a:ea typeface="Hiragino Sans GB"/>
+                <a:cs typeface="Hiragino Sans GB"/>
+                <a:sym typeface="Hiragino Sans GB"/>
               </a:rPr>
               <a:t>案例二 · 多 Skill / 多智能体 / DAG graph</a:t>
             </a:r>
@@ -24855,10 +24855,10 @@
                 <a:solidFill>
                   <a:srgbClr val="0F172A"/>
                 </a:solidFill>
-                <a:latin typeface="Noto Sans SC"/>
-                <a:ea typeface="Noto Sans SC"/>
-                <a:cs typeface="Noto Sans SC"/>
-                <a:sym typeface="Noto Sans SC"/>
+                <a:latin typeface="Hiragino Sans GB"/>
+                <a:ea typeface="Hiragino Sans GB"/>
+                <a:cs typeface="Hiragino Sans GB"/>
+                <a:sym typeface="Hiragino Sans GB"/>
               </a:rPr>
               <a:t>竞品深度调研</a:t>
             </a:r>
@@ -24902,10 +24902,10 @@
                 <a:solidFill>
                   <a:srgbClr val="475569"/>
                 </a:solidFill>
-                <a:latin typeface="Noto Sans SC"/>
-                <a:ea typeface="Noto Sans SC"/>
-                <a:cs typeface="Noto Sans SC"/>
-                <a:sym typeface="Noto Sans SC"/>
+                <a:latin typeface="Hiragino Sans GB"/>
+                <a:ea typeface="Hiragino Sans GB"/>
+                <a:cs typeface="Hiragino Sans GB"/>
+                <a:sym typeface="Hiragino Sans GB"/>
               </a:rPr>
               <a:t>输入一个竞品名，4 个分析子 Agent 并行产出市场/产品/财务/舆情四章，再合成可追溯报告。</a:t>
             </a:r>
@@ -24981,10 +24981,10 @@
                 <a:solidFill>
                   <a:srgbClr val="109488"/>
                 </a:solidFill>
-                <a:latin typeface="Noto Sans SC"/>
-                <a:ea typeface="Noto Sans SC"/>
-                <a:cs typeface="Noto Sans SC"/>
-                <a:sym typeface="Noto Sans SC"/>
+                <a:latin typeface="Hiragino Sans GB"/>
+                <a:ea typeface="Hiragino Sans GB"/>
+                <a:cs typeface="Hiragino Sans GB"/>
+                <a:sym typeface="Hiragino Sans GB"/>
               </a:rPr>
               <a:t>≤15 分钟</a:t>
             </a:r>
@@ -25028,10 +25028,10 @@
                 <a:solidFill>
                   <a:srgbClr val="64748B"/>
                 </a:solidFill>
-                <a:latin typeface="Noto Sans SC"/>
-                <a:ea typeface="Noto Sans SC"/>
-                <a:cs typeface="Noto Sans SC"/>
-                <a:sym typeface="Noto Sans SC"/>
+                <a:latin typeface="Hiragino Sans GB"/>
+                <a:ea typeface="Hiragino Sans GB"/>
+                <a:cs typeface="Hiragino Sans GB"/>
+                <a:sym typeface="Hiragino Sans GB"/>
               </a:rPr>
               <a:t>标准深度端到端</a:t>
             </a:r>
@@ -25075,10 +25075,10 @@
                 <a:solidFill>
                   <a:srgbClr val="109488"/>
                 </a:solidFill>
-                <a:latin typeface="Noto Sans SC"/>
-                <a:ea typeface="Noto Sans SC"/>
-                <a:cs typeface="Noto Sans SC"/>
-                <a:sym typeface="Noto Sans SC"/>
+                <a:latin typeface="Hiragino Sans GB"/>
+                <a:ea typeface="Hiragino Sans GB"/>
+                <a:cs typeface="Hiragino Sans GB"/>
+                <a:sym typeface="Hiragino Sans GB"/>
               </a:rPr>
               <a:t>4 路</a:t>
             </a:r>
@@ -25122,10 +25122,10 @@
                 <a:solidFill>
                   <a:srgbClr val="64748B"/>
                 </a:solidFill>
-                <a:latin typeface="Noto Sans SC"/>
-                <a:ea typeface="Noto Sans SC"/>
-                <a:cs typeface="Noto Sans SC"/>
-                <a:sym typeface="Noto Sans SC"/>
+                <a:latin typeface="Hiragino Sans GB"/>
+                <a:ea typeface="Hiragino Sans GB"/>
+                <a:cs typeface="Hiragino Sans GB"/>
+                <a:sym typeface="Hiragino Sans GB"/>
               </a:rPr>
               <a:t>分析节点并行</a:t>
             </a:r>
@@ -25169,10 +25169,10 @@
                 <a:solidFill>
                   <a:srgbClr val="109488"/>
                 </a:solidFill>
-                <a:latin typeface="Noto Sans SC"/>
-                <a:ea typeface="Noto Sans SC"/>
-                <a:cs typeface="Noto Sans SC"/>
-                <a:sym typeface="Noto Sans SC"/>
+                <a:latin typeface="Hiragino Sans GB"/>
+                <a:ea typeface="Hiragino Sans GB"/>
+                <a:cs typeface="Hiragino Sans GB"/>
+                <a:sym typeface="Hiragino Sans GB"/>
               </a:rPr>
               <a:t>全追溯</a:t>
             </a:r>
@@ -25216,10 +25216,10 @@
                 <a:solidFill>
                   <a:srgbClr val="64748B"/>
                 </a:solidFill>
-                <a:latin typeface="Noto Sans SC"/>
-                <a:ea typeface="Noto Sans SC"/>
-                <a:cs typeface="Noto Sans SC"/>
-                <a:sym typeface="Noto Sans SC"/>
+                <a:latin typeface="Hiragino Sans GB"/>
+                <a:ea typeface="Hiragino Sans GB"/>
+                <a:cs typeface="Hiragino Sans GB"/>
+                <a:sym typeface="Hiragino Sans GB"/>
               </a:rPr>
               <a:t>evidence.json</a:t>
             </a:r>
@@ -25263,10 +25263,10 @@
                 <a:solidFill>
                   <a:srgbClr val="64748B"/>
                 </a:solidFill>
-                <a:latin typeface="Noto Sans SC"/>
-                <a:ea typeface="Noto Sans SC"/>
-                <a:cs typeface="Noto Sans SC"/>
-                <a:sym typeface="Noto Sans SC"/>
+                <a:latin typeface="Hiragino Sans GB"/>
+                <a:ea typeface="Hiragino Sans GB"/>
+                <a:cs typeface="Hiragino Sans GB"/>
+                <a:sym typeface="Hiragino Sans GB"/>
               </a:rPr>
               <a:t>验证能力：DAG 编排(010) · 条件跳过 · 失败传播 · 浏览器 Agent · 研究模式 · 成本分项</a:t>
             </a:r>
@@ -25310,24 +25310,12 @@
                 <a:solidFill>
                   <a:srgbClr val="0F172A"/>
                 </a:solidFill>
-                <a:latin typeface="Noto Sans SC"/>
-                <a:ea typeface="Noto Sans SC"/>
-                <a:cs typeface="Noto Sans SC"/>
-                <a:sym typeface="Noto Sans SC"/>
+                <a:latin typeface="Hiragino Sans GB"/>
+                <a:ea typeface="Hiragino Sans GB"/>
+                <a:cs typeface="Hiragino Sans GB"/>
+                <a:sym typeface="Hiragino Sans GB"/>
               </a:rPr>
-              <a:t>选型原则：</a:t>
-            </a:r>
-            <a:r>
-              <a:rPr lang="en-US" b="false" i="false" strike="noStrike" u="none" sz="1200">
-                <a:solidFill>
-                  <a:srgbClr val="475569"/>
-                </a:solidFill>
-                <a:latin typeface="Noto Sans SC"/>
-                <a:ea typeface="Noto Sans SC"/>
-                <a:cs typeface="Noto Sans SC"/>
-                <a:sym typeface="Noto Sans SC"/>
-              </a:rPr>
-              <a:t>任务顺序依赖、共享同一批上下文 → 单 Agent（案例一）；维度可并行、依赖静态 → DAG graph（案例二）；依赖需运行时动态决定 → 才上 hybrid。</a:t>
+              <a:t>选型原则：顺序依赖、共享上下文 → 单 Agent（案例一）；维度可并行、依赖静态 → DAG graph（案例二）；依赖需运行时动态决定 → hybrid。</a:t>
             </a:r>
             <a:endParaRPr lang="en-US" sz="1100"/>
           </a:p>
@@ -25369,12 +25357,12 @@
                 <a:solidFill>
                   <a:srgbClr val="94A3B8"/>
                 </a:solidFill>
-                <a:latin typeface="Noto Sans SC"/>
-                <a:ea typeface="Noto Sans SC"/>
-                <a:cs typeface="Noto Sans SC"/>
-                <a:sym typeface="Noto Sans SC"/>
+                <a:latin typeface="Hiragino Sans GB"/>
+                <a:ea typeface="Hiragino Sans GB"/>
+                <a:cs typeface="Hiragino Sans GB"/>
+                <a:sym typeface="Hiragino Sans GB"/>
               </a:rPr>
-              <a:t>MOGONG · 企业级智能体功能补强规划</a:t>
+              <a:t>墨攻 · 企业级智能体功能补强规划</a:t>
             </a:r>
             <a:endParaRPr lang="en-US" sz="1100"/>
           </a:p>
@@ -25416,10 +25404,10 @@
                 <a:solidFill>
                   <a:srgbClr val="94A3B8"/>
                 </a:solidFill>
-                <a:latin typeface="Noto Sans SC"/>
-                <a:ea typeface="Noto Sans SC"/>
-                <a:cs typeface="Noto Sans SC"/>
-                <a:sym typeface="Noto Sans SC"/>
+                <a:latin typeface="Hiragino Sans GB"/>
+                <a:ea typeface="Hiragino Sans GB"/>
+                <a:cs typeface="Hiragino Sans GB"/>
+                <a:sym typeface="Hiragino Sans GB"/>
               </a:rPr>
               <a:t>12 / 16</a:t>
             </a:r>
@@ -25535,10 +25523,10 @@
                 <a:solidFill>
                   <a:srgbClr val="109488"/>
                 </a:solidFill>
-                <a:latin typeface="Noto Sans SC"/>
-                <a:ea typeface="Noto Sans SC"/>
-                <a:cs typeface="Noto Sans SC"/>
-                <a:sym typeface="Noto Sans SC"/>
+                <a:latin typeface="Hiragino Sans GB"/>
+                <a:ea typeface="Hiragino Sans GB"/>
+                <a:cs typeface="Hiragino Sans GB"/>
+                <a:sym typeface="Hiragino Sans GB"/>
               </a:rPr>
               <a:t>09 · 标杆场景一 · 单智能体</a:t>
             </a:r>
@@ -25582,10 +25570,10 @@
                 <a:solidFill>
                   <a:srgbClr val="0F172A"/>
                 </a:solidFill>
-                <a:latin typeface="Noto Sans SC"/>
-                <a:ea typeface="Noto Sans SC"/>
-                <a:cs typeface="Noto Sans SC"/>
-                <a:sym typeface="Noto Sans SC"/>
+                <a:latin typeface="Hiragino Sans GB"/>
+                <a:ea typeface="Hiragino Sans GB"/>
+                <a:cs typeface="Hiragino Sans GB"/>
+                <a:sym typeface="Hiragino Sans GB"/>
               </a:rPr>
               <a:t>客户反馈分诊：单 Agent 顺序流水线，P0 自动触发审批</a:t>
             </a:r>
@@ -25703,10 +25691,10 @@
                 <a:solidFill>
                   <a:srgbClr val="64748B"/>
                 </a:solidFill>
-                <a:latin typeface="Noto Sans SC"/>
-                <a:ea typeface="Noto Sans SC"/>
-                <a:cs typeface="Noto Sans SC"/>
-                <a:sym typeface="Noto Sans SC"/>
+                <a:latin typeface="Hiragino Sans GB"/>
+                <a:ea typeface="Hiragino Sans GB"/>
+                <a:cs typeface="Hiragino Sans GB"/>
+                <a:sym typeface="Hiragino Sans GB"/>
               </a:rPr>
               <a:t>痛点</a:t>
             </a:r>
@@ -25750,10 +25738,10 @@
                 <a:solidFill>
                   <a:srgbClr val="334155"/>
                 </a:solidFill>
-                <a:latin typeface="Noto Sans SC"/>
-                <a:ea typeface="Noto Sans SC"/>
-                <a:cs typeface="Noto Sans SC"/>
-                <a:sym typeface="Noto Sans SC"/>
+                <a:latin typeface="Hiragino Sans GB"/>
+                <a:ea typeface="Hiragino Sans GB"/>
+                <a:cs typeface="Hiragino Sans GB"/>
+                <a:sym typeface="Hiragino Sans GB"/>
               </a:rPr>
               <a:t>每天 200–500 条反馈来自工单、邮件、社群、应用内；人工分诊 4–6 小时/日，P0 紧急问题容易被埋没。</a:t>
             </a:r>
@@ -25829,10 +25817,10 @@
                 <a:solidFill>
                   <a:srgbClr val="64748B"/>
                 </a:solidFill>
-                <a:latin typeface="Noto Sans SC"/>
-                <a:ea typeface="Noto Sans SC"/>
-                <a:cs typeface="Noto Sans SC"/>
-                <a:sym typeface="Noto Sans SC"/>
+                <a:latin typeface="Hiragino Sans GB"/>
+                <a:ea typeface="Hiragino Sans GB"/>
+                <a:cs typeface="Hiragino Sans GB"/>
+                <a:sym typeface="Hiragino Sans GB"/>
               </a:rPr>
               <a:t>一次交互产出</a:t>
             </a:r>
@@ -25876,10 +25864,10 @@
                 <a:solidFill>
                   <a:srgbClr val="0F172A"/>
                 </a:solidFill>
-                <a:latin typeface="Noto Sans SC"/>
-                <a:ea typeface="Noto Sans SC"/>
-                <a:cs typeface="Noto Sans SC"/>
-                <a:sym typeface="Noto Sans SC"/>
+                <a:latin typeface="Hiragino Sans GB"/>
+                <a:ea typeface="Hiragino Sans GB"/>
+                <a:cs typeface="Hiragino Sans GB"/>
+                <a:sym typeface="Hiragino Sans GB"/>
               </a:rPr>
               <a:t>· triage_report.md 分诊报告</a:t>
             </a:r>
@@ -25923,10 +25911,10 @@
                 <a:solidFill>
                   <a:srgbClr val="0F172A"/>
                 </a:solidFill>
-                <a:latin typeface="Noto Sans SC"/>
-                <a:ea typeface="Noto Sans SC"/>
-                <a:cs typeface="Noto Sans SC"/>
-                <a:sym typeface="Noto Sans SC"/>
+                <a:latin typeface="Hiragino Sans GB"/>
+                <a:ea typeface="Hiragino Sans GB"/>
+                <a:cs typeface="Hiragino Sans GB"/>
+                <a:sym typeface="Hiragino Sans GB"/>
               </a:rPr>
               <a:t>· action_items.csv 跟进清单</a:t>
             </a:r>
@@ -25970,10 +25958,10 @@
                 <a:solidFill>
                   <a:srgbClr val="0F172A"/>
                 </a:solidFill>
-                <a:latin typeface="Noto Sans SC"/>
-                <a:ea typeface="Noto Sans SC"/>
-                <a:cs typeface="Noto Sans SC"/>
-                <a:sym typeface="Noto Sans SC"/>
+                <a:latin typeface="Hiragino Sans GB"/>
+                <a:ea typeface="Hiragino Sans GB"/>
+                <a:cs typeface="Hiragino Sans GB"/>
+                <a:sym typeface="Hiragino Sans GB"/>
               </a:rPr>
               <a:t>· P0≥3 自动触发 R1 审批</a:t>
             </a:r>
@@ -26017,10 +26005,10 @@
                 <a:solidFill>
                   <a:srgbClr val="64748B"/>
                 </a:solidFill>
-                <a:latin typeface="Noto Sans SC"/>
-                <a:ea typeface="Noto Sans SC"/>
-                <a:cs typeface="Noto Sans SC"/>
-                <a:sym typeface="Noto Sans SC"/>
+                <a:latin typeface="Hiragino Sans GB"/>
+                <a:ea typeface="Hiragino Sans GB"/>
+                <a:cs typeface="Hiragino Sans GB"/>
+                <a:sym typeface="Hiragino Sans GB"/>
               </a:rPr>
               <a:t>P0 关键词：无法登录 / 数据丢失 / 服务不可用 / 支付失败</a:t>
             </a:r>
@@ -26064,10 +26052,10 @@
                 <a:solidFill>
                   <a:srgbClr val="109488"/>
                 </a:solidFill>
-                <a:latin typeface="Noto Sans SC"/>
-                <a:ea typeface="Noto Sans SC"/>
-                <a:cs typeface="Noto Sans SC"/>
-                <a:sym typeface="Noto Sans SC"/>
+                <a:latin typeface="Hiragino Sans GB"/>
+                <a:ea typeface="Hiragino Sans GB"/>
+                <a:cs typeface="Hiragino Sans GB"/>
+                <a:sym typeface="Hiragino Sans GB"/>
               </a:rPr>
               <a:t>8 个顺序 Step · 共享同一批反馈上下文</a:t>
             </a:r>
@@ -26191,10 +26179,10 @@
                 <a:solidFill>
                   <a:srgbClr val="FFFFFF"/>
                 </a:solidFill>
-                <a:latin typeface="Noto Sans SC"/>
-                <a:ea typeface="Noto Sans SC"/>
-                <a:cs typeface="Noto Sans SC"/>
-                <a:sym typeface="Noto Sans SC"/>
+                <a:latin typeface="Hiragino Sans GB"/>
+                <a:ea typeface="Hiragino Sans GB"/>
+                <a:cs typeface="Hiragino Sans GB"/>
+                <a:sym typeface="Hiragino Sans GB"/>
               </a:rPr>
               <a:t>1</a:t>
             </a:r>
@@ -26238,10 +26226,10 @@
                 <a:solidFill>
                   <a:srgbClr val="0F172A"/>
                 </a:solidFill>
-                <a:latin typeface="Noto Sans SC"/>
-                <a:ea typeface="Noto Sans SC"/>
-                <a:cs typeface="Noto Sans SC"/>
-                <a:sym typeface="Noto Sans SC"/>
+                <a:latin typeface="Hiragino Sans GB"/>
+                <a:ea typeface="Hiragino Sans GB"/>
+                <a:cs typeface="Hiragino Sans GB"/>
+                <a:sym typeface="Hiragino Sans GB"/>
               </a:rPr>
               <a:t>load_feedback</a:t>
             </a:r>
@@ -26285,10 +26273,10 @@
                 <a:solidFill>
                   <a:srgbClr val="64748B"/>
                 </a:solidFill>
-                <a:latin typeface="Noto Sans SC"/>
-                <a:ea typeface="Noto Sans SC"/>
-                <a:cs typeface="Noto Sans SC"/>
-                <a:sym typeface="Noto Sans SC"/>
+                <a:latin typeface="Hiragino Sans GB"/>
+                <a:ea typeface="Hiragino Sans GB"/>
+                <a:cs typeface="Hiragino Sans GB"/>
+                <a:sym typeface="Hiragino Sans GB"/>
               </a:rPr>
               <a:t>读取 xlsx / csv / pdf / 文本</a:t>
             </a:r>
@@ -26412,10 +26400,10 @@
                 <a:solidFill>
                   <a:srgbClr val="FFFFFF"/>
                 </a:solidFill>
-                <a:latin typeface="Noto Sans SC"/>
-                <a:ea typeface="Noto Sans SC"/>
-                <a:cs typeface="Noto Sans SC"/>
-                <a:sym typeface="Noto Sans SC"/>
+                <a:latin typeface="Hiragino Sans GB"/>
+                <a:ea typeface="Hiragino Sans GB"/>
+                <a:cs typeface="Hiragino Sans GB"/>
+                <a:sym typeface="Hiragino Sans GB"/>
               </a:rPr>
               <a:t>2</a:t>
             </a:r>
@@ -26459,10 +26447,10 @@
                 <a:solidFill>
                   <a:srgbClr val="0F172A"/>
                 </a:solidFill>
-                <a:latin typeface="Noto Sans SC"/>
-                <a:ea typeface="Noto Sans SC"/>
-                <a:cs typeface="Noto Sans SC"/>
-                <a:sym typeface="Noto Sans SC"/>
+                <a:latin typeface="Hiragino Sans GB"/>
+                <a:ea typeface="Hiragino Sans GB"/>
+                <a:cs typeface="Hiragino Sans GB"/>
+                <a:sym typeface="Hiragino Sans GB"/>
               </a:rPr>
               <a:t>normalize_batch</a:t>
             </a:r>
@@ -26506,10 +26494,10 @@
                 <a:solidFill>
                   <a:srgbClr val="64748B"/>
                 </a:solidFill>
-                <a:latin typeface="Noto Sans SC"/>
-                <a:ea typeface="Noto Sans SC"/>
-                <a:cs typeface="Noto Sans SC"/>
-                <a:sym typeface="Noto Sans SC"/>
+                <a:latin typeface="Hiragino Sans GB"/>
+                <a:ea typeface="Hiragino Sans GB"/>
+                <a:cs typeface="Hiragino Sans GB"/>
+                <a:sym typeface="Hiragino Sans GB"/>
               </a:rPr>
               <a:t>去重、剔除空条目、字段规范化</a:t>
             </a:r>
@@ -26633,10 +26621,10 @@
                 <a:solidFill>
                   <a:srgbClr val="FFFFFF"/>
                 </a:solidFill>
-                <a:latin typeface="Noto Sans SC"/>
-                <a:ea typeface="Noto Sans SC"/>
-                <a:cs typeface="Noto Sans SC"/>
-                <a:sym typeface="Noto Sans SC"/>
+                <a:latin typeface="Hiragino Sans GB"/>
+                <a:ea typeface="Hiragino Sans GB"/>
+                <a:cs typeface="Hiragino Sans GB"/>
+                <a:sym typeface="Hiragino Sans GB"/>
               </a:rPr>
               <a:t>3</a:t>
             </a:r>
@@ -26680,10 +26668,10 @@
                 <a:solidFill>
                   <a:srgbClr val="0F172A"/>
                 </a:solidFill>
-                <a:latin typeface="Noto Sans SC"/>
-                <a:ea typeface="Noto Sans SC"/>
-                <a:cs typeface="Noto Sans SC"/>
-                <a:sym typeface="Noto Sans SC"/>
+                <a:latin typeface="Hiragino Sans GB"/>
+                <a:ea typeface="Hiragino Sans GB"/>
+                <a:cs typeface="Hiragino Sans GB"/>
+                <a:sym typeface="Hiragino Sans GB"/>
               </a:rPr>
               <a:t>classify_severity</a:t>
             </a:r>
@@ -26727,10 +26715,10 @@
                 <a:solidFill>
                   <a:srgbClr val="64748B"/>
                 </a:solidFill>
-                <a:latin typeface="Noto Sans SC"/>
-                <a:ea typeface="Noto Sans SC"/>
-                <a:cs typeface="Noto Sans SC"/>
-                <a:sym typeface="Noto Sans SC"/>
+                <a:latin typeface="Hiragino Sans GB"/>
+                <a:ea typeface="Hiragino Sans GB"/>
+                <a:cs typeface="Hiragino Sans GB"/>
+                <a:sym typeface="Hiragino Sans GB"/>
               </a:rPr>
               <a:t>逐条打 P0–P3 严重度标签</a:t>
             </a:r>
@@ -26854,10 +26842,10 @@
                 <a:solidFill>
                   <a:srgbClr val="FFFFFF"/>
                 </a:solidFill>
-                <a:latin typeface="Noto Sans SC"/>
-                <a:ea typeface="Noto Sans SC"/>
-                <a:cs typeface="Noto Sans SC"/>
-                <a:sym typeface="Noto Sans SC"/>
+                <a:latin typeface="Hiragino Sans GB"/>
+                <a:ea typeface="Hiragino Sans GB"/>
+                <a:cs typeface="Hiragino Sans GB"/>
+                <a:sym typeface="Hiragino Sans GB"/>
               </a:rPr>
               <a:t>4</a:t>
             </a:r>
@@ -26901,10 +26889,10 @@
                 <a:solidFill>
                   <a:srgbClr val="0F172A"/>
                 </a:solidFill>
-                <a:latin typeface="Noto Sans SC"/>
-                <a:ea typeface="Noto Sans SC"/>
-                <a:cs typeface="Noto Sans SC"/>
-                <a:sym typeface="Noto Sans SC"/>
+                <a:latin typeface="Hiragino Sans GB"/>
+                <a:ea typeface="Hiragino Sans GB"/>
+                <a:cs typeface="Hiragino Sans GB"/>
+                <a:sym typeface="Hiragino Sans GB"/>
               </a:rPr>
               <a:t>categorize_issue</a:t>
             </a:r>
@@ -26948,10 +26936,10 @@
                 <a:solidFill>
                   <a:srgbClr val="64748B"/>
                 </a:solidFill>
-                <a:latin typeface="Noto Sans SC"/>
-                <a:ea typeface="Noto Sans SC"/>
-                <a:cs typeface="Noto Sans SC"/>
-                <a:sym typeface="Noto Sans SC"/>
+                <a:latin typeface="Hiragino Sans GB"/>
+                <a:ea typeface="Hiragino Sans GB"/>
+                <a:cs typeface="Hiragino Sans GB"/>
+                <a:sym typeface="Hiragino Sans GB"/>
               </a:rPr>
               <a:t>归入登录/数据/计费等 8 大类</a:t>
             </a:r>
@@ -27075,10 +27063,10 @@
                 <a:solidFill>
                   <a:srgbClr val="FFFFFF"/>
                 </a:solidFill>
-                <a:latin typeface="Noto Sans SC"/>
-                <a:ea typeface="Noto Sans SC"/>
-                <a:cs typeface="Noto Sans SC"/>
-                <a:sym typeface="Noto Sans SC"/>
+                <a:latin typeface="Hiragino Sans GB"/>
+                <a:ea typeface="Hiragino Sans GB"/>
+                <a:cs typeface="Hiragino Sans GB"/>
+                <a:sym typeface="Hiragino Sans GB"/>
               </a:rPr>
               <a:t>5</a:t>
             </a:r>
@@ -27122,10 +27110,10 @@
                 <a:solidFill>
                   <a:srgbClr val="0F172A"/>
                 </a:solidFill>
-                <a:latin typeface="Noto Sans SC"/>
-                <a:ea typeface="Noto Sans SC"/>
-                <a:cs typeface="Noto Sans SC"/>
-                <a:sym typeface="Noto Sans SC"/>
+                <a:latin typeface="Hiragino Sans GB"/>
+                <a:ea typeface="Hiragino Sans GB"/>
+                <a:cs typeface="Hiragino Sans GB"/>
+                <a:sym typeface="Hiragino Sans GB"/>
               </a:rPr>
               <a:t>detect_pii_and_redact</a:t>
             </a:r>
@@ -27169,10 +27157,10 @@
                 <a:solidFill>
                   <a:srgbClr val="64748B"/>
                 </a:solidFill>
-                <a:latin typeface="Noto Sans SC"/>
-                <a:ea typeface="Noto Sans SC"/>
-                <a:cs typeface="Noto Sans SC"/>
-                <a:sym typeface="Noto Sans SC"/>
+                <a:latin typeface="Hiragino Sans GB"/>
+                <a:ea typeface="Hiragino Sans GB"/>
+                <a:cs typeface="Hiragino Sans GB"/>
+                <a:sym typeface="Hiragino Sans GB"/>
               </a:rPr>
               <a:t>手机号/身份证/银行卡脱敏</a:t>
             </a:r>
@@ -27296,10 +27284,10 @@
                 <a:solidFill>
                   <a:srgbClr val="FFFFFF"/>
                 </a:solidFill>
-                <a:latin typeface="Noto Sans SC"/>
-                <a:ea typeface="Noto Sans SC"/>
-                <a:cs typeface="Noto Sans SC"/>
-                <a:sym typeface="Noto Sans SC"/>
+                <a:latin typeface="Hiragino Sans GB"/>
+                <a:ea typeface="Hiragino Sans GB"/>
+                <a:cs typeface="Hiragino Sans GB"/>
+                <a:sym typeface="Hiragino Sans GB"/>
               </a:rPr>
               <a:t>6</a:t>
             </a:r>
@@ -27343,10 +27331,10 @@
                 <a:solidFill>
                   <a:srgbClr val="0F172A"/>
                 </a:solidFill>
-                <a:latin typeface="Noto Sans SC"/>
-                <a:ea typeface="Noto Sans SC"/>
-                <a:cs typeface="Noto Sans SC"/>
-                <a:sym typeface="Noto Sans SC"/>
+                <a:latin typeface="Hiragino Sans GB"/>
+                <a:ea typeface="Hiragino Sans GB"/>
+                <a:cs typeface="Hiragino Sans GB"/>
+                <a:sym typeface="Hiragino Sans GB"/>
               </a:rPr>
               <a:t>rank_action_items</a:t>
             </a:r>
@@ -27390,10 +27378,10 @@
                 <a:solidFill>
                   <a:srgbClr val="64748B"/>
                 </a:solidFill>
-                <a:latin typeface="Noto Sans SC"/>
-                <a:ea typeface="Noto Sans SC"/>
-                <a:cs typeface="Noto Sans SC"/>
-                <a:sym typeface="Noto Sans SC"/>
+                <a:latin typeface="Hiragino Sans GB"/>
+                <a:ea typeface="Hiragino Sans GB"/>
+                <a:cs typeface="Hiragino Sans GB"/>
+                <a:sym typeface="Hiragino Sans GB"/>
               </a:rPr>
               <a:t>P0+P1 按紧迫度打分排序</a:t>
             </a:r>
@@ -27517,10 +27505,10 @@
                 <a:solidFill>
                   <a:srgbClr val="FFFFFF"/>
                 </a:solidFill>
-                <a:latin typeface="Noto Sans SC"/>
-                <a:ea typeface="Noto Sans SC"/>
-                <a:cs typeface="Noto Sans SC"/>
-                <a:sym typeface="Noto Sans SC"/>
+                <a:latin typeface="Hiragino Sans GB"/>
+                <a:ea typeface="Hiragino Sans GB"/>
+                <a:cs typeface="Hiragino Sans GB"/>
+                <a:sym typeface="Hiragino Sans GB"/>
               </a:rPr>
               <a:t>7</a:t>
             </a:r>
@@ -27564,10 +27552,10 @@
                 <a:solidFill>
                   <a:srgbClr val="0F172A"/>
                 </a:solidFill>
-                <a:latin typeface="Noto Sans SC"/>
-                <a:ea typeface="Noto Sans SC"/>
-                <a:cs typeface="Noto Sans SC"/>
-                <a:sym typeface="Noto Sans SC"/>
+                <a:latin typeface="Hiragino Sans GB"/>
+                <a:ea typeface="Hiragino Sans GB"/>
+                <a:cs typeface="Hiragino Sans GB"/>
+                <a:sym typeface="Hiragino Sans GB"/>
               </a:rPr>
               <a:t>compose_report</a:t>
             </a:r>
@@ -27611,10 +27599,10 @@
                 <a:solidFill>
                   <a:srgbClr val="64748B"/>
                 </a:solidFill>
-                <a:latin typeface="Noto Sans SC"/>
-                <a:ea typeface="Noto Sans SC"/>
-                <a:cs typeface="Noto Sans SC"/>
-                <a:sym typeface="Noto Sans SC"/>
+                <a:latin typeface="Hiragino Sans GB"/>
+                <a:ea typeface="Hiragino Sans GB"/>
+                <a:cs typeface="Hiragino Sans GB"/>
+                <a:sym typeface="Hiragino Sans GB"/>
               </a:rPr>
               <a:t>生成摘要/P0清单/趋势/建议</a:t>
             </a:r>
@@ -27738,10 +27726,10 @@
                 <a:solidFill>
                   <a:srgbClr val="FFFFFF"/>
                 </a:solidFill>
-                <a:latin typeface="Noto Sans SC"/>
-                <a:ea typeface="Noto Sans SC"/>
-                <a:cs typeface="Noto Sans SC"/>
-                <a:sym typeface="Noto Sans SC"/>
+                <a:latin typeface="Hiragino Sans GB"/>
+                <a:ea typeface="Hiragino Sans GB"/>
+                <a:cs typeface="Hiragino Sans GB"/>
+                <a:sym typeface="Hiragino Sans GB"/>
               </a:rPr>
               <a:t>8</a:t>
             </a:r>
@@ -27785,10 +27773,10 @@
                 <a:solidFill>
                   <a:srgbClr val="0F172A"/>
                 </a:solidFill>
-                <a:latin typeface="Noto Sans SC"/>
-                <a:ea typeface="Noto Sans SC"/>
-                <a:cs typeface="Noto Sans SC"/>
-                <a:sym typeface="Noto Sans SC"/>
+                <a:latin typeface="Hiragino Sans GB"/>
+                <a:ea typeface="Hiragino Sans GB"/>
+                <a:cs typeface="Hiragino Sans GB"/>
+                <a:sym typeface="Hiragino Sans GB"/>
               </a:rPr>
               <a:t>trigger_approval_if_p0</a:t>
             </a:r>
@@ -27832,10 +27820,10 @@
                 <a:solidFill>
                   <a:srgbClr val="109488"/>
                 </a:solidFill>
-                <a:latin typeface="Noto Sans SC"/>
-                <a:ea typeface="Noto Sans SC"/>
-                <a:cs typeface="Noto Sans SC"/>
-                <a:sym typeface="Noto Sans SC"/>
+                <a:latin typeface="Hiragino Sans GB"/>
+                <a:ea typeface="Hiragino Sans GB"/>
+                <a:cs typeface="Hiragino Sans GB"/>
+                <a:sym typeface="Hiragino Sans GB"/>
               </a:rPr>
               <a:t>P0≥3 触发 R1 审批，否则跳过</a:t>
             </a:r>
@@ -27879,10 +27867,10 @@
                 <a:solidFill>
                   <a:srgbClr val="0F172A"/>
                 </a:solidFill>
-                <a:latin typeface="Noto Sans SC"/>
-                <a:ea typeface="Noto Sans SC"/>
-                <a:cs typeface="Noto Sans SC"/>
-                <a:sym typeface="Noto Sans SC"/>
+                <a:latin typeface="Hiragino Sans GB"/>
+                <a:ea typeface="Hiragino Sans GB"/>
+                <a:cs typeface="Hiragino Sans GB"/>
+                <a:sym typeface="Hiragino Sans GB"/>
               </a:rPr>
               <a:t>为什么不用多智能体：</a:t>
             </a:r>
@@ -27891,10 +27879,10 @@
                 <a:solidFill>
                   <a:srgbClr val="475569"/>
                 </a:solidFill>
-                <a:latin typeface="Noto Sans SC"/>
-                <a:ea typeface="Noto Sans SC"/>
-                <a:cs typeface="Noto Sans SC"/>
-                <a:sym typeface="Noto Sans SC"/>
+                <a:latin typeface="Hiragino Sans GB"/>
+                <a:ea typeface="Hiragino Sans GB"/>
+                <a:cs typeface="Hiragino Sans GB"/>
+                <a:sym typeface="Hiragino Sans GB"/>
               </a:rPr>
               <a:t>所有 step 共享同一份"批次上下文"，任何并行拆分都会导致上下文重建成本大于并行收益——这是单 Agent 顺序流水线的典型场景。</a:t>
             </a:r>
@@ -27938,12 +27926,12 @@
                 <a:solidFill>
                   <a:srgbClr val="94A3B8"/>
                 </a:solidFill>
-                <a:latin typeface="Noto Sans SC"/>
-                <a:ea typeface="Noto Sans SC"/>
-                <a:cs typeface="Noto Sans SC"/>
-                <a:sym typeface="Noto Sans SC"/>
+                <a:latin typeface="Hiragino Sans GB"/>
+                <a:ea typeface="Hiragino Sans GB"/>
+                <a:cs typeface="Hiragino Sans GB"/>
+                <a:sym typeface="Hiragino Sans GB"/>
               </a:rPr>
-              <a:t>MOGONG · 企业级智能体功能补强规划</a:t>
+              <a:t>墨攻 · 企业级智能体功能补强规划</a:t>
             </a:r>
             <a:endParaRPr lang="en-US" sz="1100"/>
           </a:p>
@@ -27985,10 +27973,10 @@
                 <a:solidFill>
                   <a:srgbClr val="94A3B8"/>
                 </a:solidFill>
-                <a:latin typeface="Noto Sans SC"/>
-                <a:ea typeface="Noto Sans SC"/>
-                <a:cs typeface="Noto Sans SC"/>
-                <a:sym typeface="Noto Sans SC"/>
+                <a:latin typeface="Hiragino Sans GB"/>
+                <a:ea typeface="Hiragino Sans GB"/>
+                <a:cs typeface="Hiragino Sans GB"/>
+                <a:sym typeface="Hiragino Sans GB"/>
               </a:rPr>
               <a:t>13 / 16</a:t>
             </a:r>
@@ -28104,10 +28092,10 @@
                 <a:solidFill>
                   <a:srgbClr val="109488"/>
                 </a:solidFill>
-                <a:latin typeface="Noto Sans SC"/>
-                <a:ea typeface="Noto Sans SC"/>
-                <a:cs typeface="Noto Sans SC"/>
-                <a:sym typeface="Noto Sans SC"/>
+                <a:latin typeface="Hiragino Sans GB"/>
+                <a:ea typeface="Hiragino Sans GB"/>
+                <a:cs typeface="Hiragino Sans GB"/>
+                <a:sym typeface="Hiragino Sans GB"/>
               </a:rPr>
               <a:t>09 · 标杆场景二 · 多智能体 DAG</a:t>
             </a:r>
@@ -28151,10 +28139,10 @@
                 <a:solidFill>
                   <a:srgbClr val="0F172A"/>
                 </a:solidFill>
-                <a:latin typeface="Noto Sans SC"/>
-                <a:ea typeface="Noto Sans SC"/>
-                <a:cs typeface="Noto Sans SC"/>
-                <a:sym typeface="Noto Sans SC"/>
+                <a:latin typeface="Hiragino Sans GB"/>
+                <a:ea typeface="Hiragino Sans GB"/>
+                <a:cs typeface="Hiragino Sans GB"/>
+                <a:sym typeface="Hiragino Sans GB"/>
               </a:rPr>
               <a:t>竞品深度调研：4 路并行分析，合成可追溯报告</a:t>
             </a:r>
@@ -28268,10 +28256,10 @@
                 <a:solidFill>
                   <a:srgbClr val="FFFFFF"/>
                 </a:solidFill>
-                <a:latin typeface="Noto Sans SC"/>
-                <a:ea typeface="Noto Sans SC"/>
-                <a:cs typeface="Noto Sans SC"/>
-                <a:sym typeface="Noto Sans SC"/>
+                <a:latin typeface="Hiragino Sans GB"/>
+                <a:ea typeface="Hiragino Sans GB"/>
+                <a:cs typeface="Hiragino Sans GB"/>
+                <a:sym typeface="Hiragino Sans GB"/>
               </a:rPr>
               <a:t>supervisor 协调（planner + aggregator）</a:t>
             </a:r>
@@ -28549,10 +28537,10 @@
                 <a:solidFill>
                   <a:srgbClr val="0F172A"/>
                 </a:solidFill>
-                <a:latin typeface="Noto Sans SC"/>
-                <a:ea typeface="Noto Sans SC"/>
-                <a:cs typeface="Noto Sans SC"/>
-                <a:sym typeface="Noto Sans SC"/>
+                <a:latin typeface="Hiragino Sans GB"/>
+                <a:ea typeface="Hiragino Sans GB"/>
+                <a:cs typeface="Hiragino Sans GB"/>
+                <a:sym typeface="Hiragino Sans GB"/>
               </a:rPr>
               <a:t>市场情报员</a:t>
             </a:r>
@@ -28596,10 +28584,10 @@
                 <a:solidFill>
                   <a:srgbClr val="64748B"/>
                 </a:solidFill>
-                <a:latin typeface="Noto Sans SC"/>
-                <a:ea typeface="Noto Sans SC"/>
-                <a:cs typeface="Noto Sans SC"/>
-                <a:sym typeface="Noto Sans SC"/>
+                <a:latin typeface="Hiragino Sans GB"/>
+                <a:ea typeface="Hiragino Sans GB"/>
+                <a:cs typeface="Hiragino Sans GB"/>
+                <a:sym typeface="Hiragino Sans GB"/>
               </a:rPr>
               <a:t>检索 + 时间线新闻、融资、份额</a:t>
             </a:r>
@@ -28685,10 +28673,10 @@
                 <a:solidFill>
                   <a:srgbClr val="0F172A"/>
                 </a:solidFill>
-                <a:latin typeface="Noto Sans SC"/>
-                <a:ea typeface="Noto Sans SC"/>
-                <a:cs typeface="Noto Sans SC"/>
-                <a:sym typeface="Noto Sans SC"/>
+                <a:latin typeface="Hiragino Sans GB"/>
+                <a:ea typeface="Hiragino Sans GB"/>
+                <a:cs typeface="Hiragino Sans GB"/>
+                <a:sym typeface="Hiragino Sans GB"/>
               </a:rPr>
               <a:t>产品分析师</a:t>
             </a:r>
@@ -28732,10 +28720,10 @@
                 <a:solidFill>
                   <a:srgbClr val="64748B"/>
                 </a:solidFill>
-                <a:latin typeface="Noto Sans SC"/>
-                <a:ea typeface="Noto Sans SC"/>
-                <a:cs typeface="Noto Sans SC"/>
-                <a:sym typeface="Noto Sans SC"/>
+                <a:latin typeface="Hiragino Sans GB"/>
+                <a:ea typeface="Hiragino Sans GB"/>
+                <a:cs typeface="Hiragino Sans GB"/>
+                <a:sym typeface="Hiragino Sans GB"/>
               </a:rPr>
               <a:t>浏览器抓取官网、功能对比</a:t>
             </a:r>
@@ -28821,10 +28809,10 @@
                 <a:solidFill>
                   <a:srgbClr val="0F172A"/>
                 </a:solidFill>
-                <a:latin typeface="Noto Sans SC"/>
-                <a:ea typeface="Noto Sans SC"/>
-                <a:cs typeface="Noto Sans SC"/>
-                <a:sym typeface="Noto Sans SC"/>
+                <a:latin typeface="Hiragino Sans GB"/>
+                <a:ea typeface="Hiragino Sans GB"/>
+                <a:cs typeface="Hiragino Sans GB"/>
+                <a:sym typeface="Hiragino Sans GB"/>
               </a:rPr>
               <a:t>财务分析师</a:t>
             </a:r>
@@ -28868,10 +28856,10 @@
                 <a:solidFill>
                   <a:srgbClr val="64748B"/>
                 </a:solidFill>
-                <a:latin typeface="Noto Sans SC"/>
-                <a:ea typeface="Noto Sans SC"/>
-                <a:cs typeface="Noto Sans SC"/>
-                <a:sym typeface="Noto Sans SC"/>
+                <a:latin typeface="Hiragino Sans GB"/>
+                <a:ea typeface="Hiragino Sans GB"/>
+                <a:cs typeface="Hiragino Sans GB"/>
+                <a:sym typeface="Hiragino Sans GB"/>
               </a:rPr>
               <a:t>定量 + 估值模型</a:t>
             </a:r>
@@ -28915,10 +28903,10 @@
                 <a:solidFill>
                   <a:srgbClr val="109488"/>
                 </a:solidFill>
-                <a:latin typeface="Noto Sans SC"/>
-                <a:ea typeface="Noto Sans SC"/>
-                <a:cs typeface="Noto Sans SC"/>
-                <a:sym typeface="Noto Sans SC"/>
+                <a:latin typeface="Hiragino Sans GB"/>
+                <a:ea typeface="Hiragino Sans GB"/>
+                <a:cs typeface="Hiragino Sans GB"/>
+                <a:sym typeface="Hiragino Sans GB"/>
               </a:rPr>
               <a:t>私有公司则条件跳过</a:t>
             </a:r>
@@ -29004,10 +28992,10 @@
                 <a:solidFill>
                   <a:srgbClr val="0F172A"/>
                 </a:solidFill>
-                <a:latin typeface="Noto Sans SC"/>
-                <a:ea typeface="Noto Sans SC"/>
-                <a:cs typeface="Noto Sans SC"/>
-                <a:sym typeface="Noto Sans SC"/>
+                <a:latin typeface="Hiragino Sans GB"/>
+                <a:ea typeface="Hiragino Sans GB"/>
+                <a:cs typeface="Hiragino Sans GB"/>
+                <a:sym typeface="Hiragino Sans GB"/>
               </a:rPr>
               <a:t>舆情监测员</a:t>
             </a:r>
@@ -29051,10 +29039,10 @@
                 <a:solidFill>
                   <a:srgbClr val="64748B"/>
                 </a:solidFill>
-                <a:latin typeface="Noto Sans SC"/>
-                <a:ea typeface="Noto Sans SC"/>
-                <a:cs typeface="Noto Sans SC"/>
-                <a:sym typeface="Noto Sans SC"/>
+                <a:latin typeface="Hiragino Sans GB"/>
+                <a:ea typeface="Hiragino Sans GB"/>
+                <a:cs typeface="Hiragino Sans GB"/>
+                <a:sym typeface="Hiragino Sans GB"/>
               </a:rPr>
               <a:t>微博/知乎/Reddit 情感聚类</a:t>
             </a:r>
@@ -29332,10 +29320,10 @@
                 <a:solidFill>
                   <a:srgbClr val="0D9488"/>
                 </a:solidFill>
-                <a:latin typeface="Noto Sans SC"/>
-                <a:ea typeface="Noto Sans SC"/>
-                <a:cs typeface="Noto Sans SC"/>
-                <a:sym typeface="Noto Sans SC"/>
+                <a:latin typeface="Hiragino Sans GB"/>
+                <a:ea typeface="Hiragino Sans GB"/>
+                <a:cs typeface="Hiragino Sans GB"/>
+                <a:sym typeface="Hiragino Sans GB"/>
               </a:rPr>
               <a:t>report_synthesis 引用四节点 + 综合判断</a:t>
             </a:r>
@@ -29379,10 +29367,10 @@
                 <a:solidFill>
                   <a:srgbClr val="0F172A"/>
                 </a:solidFill>
-                <a:latin typeface="Noto Sans SC"/>
-                <a:ea typeface="Noto Sans SC"/>
-                <a:cs typeface="Noto Sans SC"/>
-                <a:sym typeface="Noto Sans SC"/>
+                <a:latin typeface="Hiragino Sans GB"/>
+                <a:ea typeface="Hiragino Sans GB"/>
+                <a:cs typeface="Hiragino Sans GB"/>
+                <a:sym typeface="Hiragino Sans GB"/>
               </a:rPr>
               <a:t>失败容错</a:t>
             </a:r>
@@ -29391,10 +29379,10 @@
                 <a:solidFill>
                   <a:srgbClr val="475569"/>
                 </a:solidFill>
-                <a:latin typeface="Noto Sans SC"/>
-                <a:ea typeface="Noto Sans SC"/>
-                <a:cs typeface="Noto Sans SC"/>
-                <a:sym typeface="Noto Sans SC"/>
+                <a:latin typeface="Hiragino Sans GB"/>
+                <a:ea typeface="Hiragino Sans GB"/>
+                <a:cs typeface="Hiragino Sans GB"/>
+                <a:sym typeface="Hiragino Sans GB"/>
               </a:rPr>
               <a:t/>
             </a:r>
@@ -29403,10 +29391,10 @@
                 <a:solidFill>
                   <a:srgbClr val="475569"/>
                 </a:solidFill>
-                <a:latin typeface="Noto Sans SC"/>
-                <a:ea typeface="Noto Sans SC"/>
-                <a:cs typeface="Noto Sans SC"/>
-                <a:sym typeface="Noto Sans SC"/>
+                <a:latin typeface="Hiragino Sans GB"/>
+                <a:ea typeface="Hiragino Sans GB"/>
+                <a:cs typeface="Hiragino Sans GB"/>
+                <a:sym typeface="Hiragino Sans GB"/>
               </a:rPr>
             </a:br>
             <a:r>
@@ -29414,10 +29402,10 @@
                 <a:solidFill>
                   <a:srgbClr val="475569"/>
                 </a:solidFill>
-                <a:latin typeface="Noto Sans SC"/>
-                <a:ea typeface="Noto Sans SC"/>
-                <a:cs typeface="Noto Sans SC"/>
-                <a:sym typeface="Noto Sans SC"/>
+                <a:latin typeface="Hiragino Sans GB"/>
+                <a:ea typeface="Hiragino Sans GB"/>
+                <a:cs typeface="Hiragino Sans GB"/>
+                <a:sym typeface="Hiragino Sans GB"/>
               </a:rPr>
               <a:t>节点指数退避重试 2 次（5s→10s），总超时 30 分钟</a:t>
             </a:r>
@@ -29461,10 +29449,10 @@
                 <a:solidFill>
                   <a:srgbClr val="0F172A"/>
                 </a:solidFill>
-                <a:latin typeface="Noto Sans SC"/>
-                <a:ea typeface="Noto Sans SC"/>
-                <a:cs typeface="Noto Sans SC"/>
-                <a:sym typeface="Noto Sans SC"/>
+                <a:latin typeface="Hiragino Sans GB"/>
+                <a:ea typeface="Hiragino Sans GB"/>
+                <a:cs typeface="Hiragino Sans GB"/>
+                <a:sym typeface="Hiragino Sans GB"/>
               </a:rPr>
               <a:t>降级策略</a:t>
             </a:r>
@@ -29473,10 +29461,10 @@
                 <a:solidFill>
                   <a:srgbClr val="475569"/>
                 </a:solidFill>
-                <a:latin typeface="Noto Sans SC"/>
-                <a:ea typeface="Noto Sans SC"/>
-                <a:cs typeface="Noto Sans SC"/>
-                <a:sym typeface="Noto Sans SC"/>
+                <a:latin typeface="Hiragino Sans GB"/>
+                <a:ea typeface="Hiragino Sans GB"/>
+                <a:cs typeface="Hiragino Sans GB"/>
+                <a:sym typeface="Hiragino Sans GB"/>
               </a:rPr>
               <a:t/>
             </a:r>
@@ -29485,10 +29473,10 @@
                 <a:solidFill>
                   <a:srgbClr val="475569"/>
                 </a:solidFill>
-                <a:latin typeface="Noto Sans SC"/>
-                <a:ea typeface="Noto Sans SC"/>
-                <a:cs typeface="Noto Sans SC"/>
-                <a:sym typeface="Noto Sans SC"/>
+                <a:latin typeface="Hiragino Sans GB"/>
+                <a:ea typeface="Hiragino Sans GB"/>
+                <a:cs typeface="Hiragino Sans GB"/>
+                <a:sym typeface="Hiragino Sans GB"/>
               </a:rPr>
             </a:br>
             <a:r>
@@ -29496,10 +29484,10 @@
                 <a:solidFill>
                   <a:srgbClr val="475569"/>
                 </a:solidFill>
-                <a:latin typeface="Noto Sans SC"/>
-                <a:ea typeface="Noto Sans SC"/>
-                <a:cs typeface="Noto Sans SC"/>
-                <a:sym typeface="Noto Sans SC"/>
+                <a:latin typeface="Hiragino Sans GB"/>
+                <a:ea typeface="Hiragino Sans GB"/>
+                <a:cs typeface="Hiragino Sans GB"/>
+                <a:sym typeface="Hiragino Sans GB"/>
               </a:rPr>
               <a:t>≥3 子节点完成正常合成；&lt;3 则输出数据不足降级报告</a:t>
             </a:r>
@@ -29543,10 +29531,10 @@
                 <a:solidFill>
                   <a:srgbClr val="0F172A"/>
                 </a:solidFill>
-                <a:latin typeface="Noto Sans SC"/>
-                <a:ea typeface="Noto Sans SC"/>
-                <a:cs typeface="Noto Sans SC"/>
-                <a:sym typeface="Noto Sans SC"/>
+                <a:latin typeface="Hiragino Sans GB"/>
+                <a:ea typeface="Hiragino Sans GB"/>
+                <a:cs typeface="Hiragino Sans GB"/>
+                <a:sym typeface="Hiragino Sans GB"/>
               </a:rPr>
               <a:t>为什么用 graph</a:t>
             </a:r>
@@ -29555,10 +29543,10 @@
                 <a:solidFill>
                   <a:srgbClr val="475569"/>
                 </a:solidFill>
-                <a:latin typeface="Noto Sans SC"/>
-                <a:ea typeface="Noto Sans SC"/>
-                <a:cs typeface="Noto Sans SC"/>
-                <a:sym typeface="Noto Sans SC"/>
+                <a:latin typeface="Hiragino Sans GB"/>
+                <a:ea typeface="Hiragino Sans GB"/>
+                <a:cs typeface="Hiragino Sans GB"/>
+                <a:sym typeface="Hiragino Sans GB"/>
               </a:rPr>
               <a:t/>
             </a:r>
@@ -29567,10 +29555,10 @@
                 <a:solidFill>
                   <a:srgbClr val="475569"/>
                 </a:solidFill>
-                <a:latin typeface="Noto Sans SC"/>
-                <a:ea typeface="Noto Sans SC"/>
-                <a:cs typeface="Noto Sans SC"/>
-                <a:sym typeface="Noto Sans SC"/>
+                <a:latin typeface="Hiragino Sans GB"/>
+                <a:ea typeface="Hiragino Sans GB"/>
+                <a:cs typeface="Hiragino Sans GB"/>
+                <a:sym typeface="Hiragino Sans GB"/>
               </a:rPr>
             </a:br>
             <a:r>
@@ -29578,10 +29566,10 @@
                 <a:solidFill>
                   <a:srgbClr val="475569"/>
                 </a:solidFill>
-                <a:latin typeface="Noto Sans SC"/>
-                <a:ea typeface="Noto Sans SC"/>
-                <a:cs typeface="Noto Sans SC"/>
-                <a:sym typeface="Noto Sans SC"/>
+                <a:latin typeface="Hiragino Sans GB"/>
+                <a:ea typeface="Hiragino Sans GB"/>
+                <a:cs typeface="Hiragino Sans GB"/>
+                <a:sym typeface="Hiragino Sans GB"/>
               </a:rPr>
               <a:t>4 维度静态可并行；sequential 太慢，hybrid 徒增监督开销</a:t>
             </a:r>
@@ -29625,12 +29613,12 @@
                 <a:solidFill>
                   <a:srgbClr val="94A3B8"/>
                 </a:solidFill>
-                <a:latin typeface="Noto Sans SC"/>
-                <a:ea typeface="Noto Sans SC"/>
-                <a:cs typeface="Noto Sans SC"/>
-                <a:sym typeface="Noto Sans SC"/>
+                <a:latin typeface="Hiragino Sans GB"/>
+                <a:ea typeface="Hiragino Sans GB"/>
+                <a:cs typeface="Hiragino Sans GB"/>
+                <a:sym typeface="Hiragino Sans GB"/>
               </a:rPr>
-              <a:t>MOGONG · 企业级智能体功能补强规划</a:t>
+              <a:t>墨攻 · 企业级智能体功能补强规划</a:t>
             </a:r>
             <a:endParaRPr lang="en-US" sz="1100"/>
           </a:p>
@@ -29672,10 +29660,10 @@
                 <a:solidFill>
                   <a:srgbClr val="94A3B8"/>
                 </a:solidFill>
-                <a:latin typeface="Noto Sans SC"/>
-                <a:ea typeface="Noto Sans SC"/>
-                <a:cs typeface="Noto Sans SC"/>
-                <a:sym typeface="Noto Sans SC"/>
+                <a:latin typeface="Hiragino Sans GB"/>
+                <a:ea typeface="Hiragino Sans GB"/>
+                <a:cs typeface="Hiragino Sans GB"/>
+                <a:sym typeface="Hiragino Sans GB"/>
               </a:rPr>
               <a:t>14 / 16</a:t>
             </a:r>
@@ -29791,10 +29779,10 @@
                 <a:solidFill>
                   <a:srgbClr val="109488"/>
                 </a:solidFill>
-                <a:latin typeface="Noto Sans SC"/>
-                <a:ea typeface="Noto Sans SC"/>
-                <a:cs typeface="Noto Sans SC"/>
-                <a:sym typeface="Noto Sans SC"/>
+                <a:latin typeface="Hiragino Sans GB"/>
+                <a:ea typeface="Hiragino Sans GB"/>
+                <a:cs typeface="Hiragino Sans GB"/>
+                <a:sym typeface="Hiragino Sans GB"/>
               </a:rPr>
               <a:t>10 · 生产部署扩展</a:t>
             </a:r>
@@ -29838,10 +29826,10 @@
                 <a:solidFill>
                   <a:srgbClr val="0F172A"/>
                 </a:solidFill>
-                <a:latin typeface="Noto Sans SC"/>
-                <a:ea typeface="Noto Sans SC"/>
-                <a:cs typeface="Noto Sans SC"/>
-                <a:sym typeface="Noto Sans SC"/>
+                <a:latin typeface="Hiragino Sans GB"/>
+                <a:ea typeface="Hiragino Sans GB"/>
+                <a:cs typeface="Hiragino Sans GB"/>
+                <a:sym typeface="Hiragino Sans GB"/>
               </a:rPr>
               <a:t>多实例运行改造：本轮先做 runtime-host 水平扩展</a:t>
             </a:r>
@@ -29997,10 +29985,10 @@
                 <a:solidFill>
                   <a:srgbClr val="FFFFFF"/>
                 </a:solidFill>
-                <a:latin typeface="Noto Sans SC"/>
-                <a:ea typeface="Noto Sans SC"/>
-                <a:cs typeface="Noto Sans SC"/>
-                <a:sym typeface="Noto Sans SC"/>
+                <a:latin typeface="Hiragino Sans GB"/>
+                <a:ea typeface="Hiragino Sans GB"/>
+                <a:cs typeface="Hiragino Sans GB"/>
+                <a:sym typeface="Hiragino Sans GB"/>
               </a:rPr>
               <a:t>层 A · 本轮主交付</a:t>
             </a:r>
@@ -30044,10 +30032,10 @@
                 <a:solidFill>
                   <a:srgbClr val="0F172A"/>
                 </a:solidFill>
-                <a:latin typeface="Noto Sans SC"/>
-                <a:ea typeface="Noto Sans SC"/>
-                <a:cs typeface="Noto Sans SC"/>
-                <a:sym typeface="Noto Sans SC"/>
+                <a:latin typeface="Hiragino Sans GB"/>
+                <a:ea typeface="Hiragino Sans GB"/>
+                <a:cs typeface="Hiragino Sans GB"/>
+                <a:sym typeface="Hiragino Sans GB"/>
               </a:rPr>
               <a:t>runtime-host 水平扩展</a:t>
             </a:r>
@@ -30095,10 +30083,10 @@
                 <a:solidFill>
                   <a:srgbClr val="475569"/>
                 </a:solidFill>
-                <a:latin typeface="Noto Sans SC"/>
-                <a:ea typeface="Noto Sans SC"/>
-                <a:cs typeface="Noto Sans SC"/>
-                <a:sym typeface="Noto Sans SC"/>
+                <a:latin typeface="Hiragino Sans GB"/>
+                <a:ea typeface="Hiragino Sans GB"/>
+                <a:cs typeface="Hiragino Sans GB"/>
+                <a:sym typeface="Hiragino Sans GB"/>
               </a:rPr>
               <a:t>多 dsh-runtime-host 实例共享命名空间</a:t>
             </a:r>
@@ -30119,10 +30107,10 @@
                 <a:solidFill>
                   <a:srgbClr val="475569"/>
                 </a:solidFill>
-                <a:latin typeface="Noto Sans SC"/>
-                <a:ea typeface="Noto Sans SC"/>
-                <a:cs typeface="Noto Sans SC"/>
-                <a:sym typeface="Noto Sans SC"/>
+                <a:latin typeface="Hiragino Sans GB"/>
+                <a:ea typeface="Hiragino Sans GB"/>
+                <a:cs typeface="Hiragino Sans GB"/>
+                <a:sym typeface="Hiragino Sans GB"/>
               </a:rPr>
               <a:t>前置 sticky LB，按 kernel_session_id 一致性哈希</a:t>
             </a:r>
@@ -30142,10 +30130,10 @@
                 <a:solidFill>
                   <a:srgbClr val="475569"/>
                 </a:solidFill>
-                <a:latin typeface="Noto Sans SC"/>
-                <a:ea typeface="Noto Sans SC"/>
-                <a:cs typeface="Noto Sans SC"/>
-                <a:sym typeface="Noto Sans SC"/>
+                <a:latin typeface="Hiragino Sans GB"/>
+                <a:ea typeface="Hiragino Sans GB"/>
+                <a:cs typeface="Hiragino Sans GB"/>
+                <a:sym typeface="Hiragino Sans GB"/>
               </a:rPr>
               <a:t>chat-api 保持单实例，改动面最小</a:t>
             </a:r>
@@ -30188,10 +30176,10 @@
                 <a:solidFill>
                   <a:srgbClr val="109488"/>
                 </a:solidFill>
-                <a:latin typeface="Noto Sans SC"/>
-                <a:ea typeface="Noto Sans SC"/>
-                <a:cs typeface="Noto Sans SC"/>
-                <a:sym typeface="Noto Sans SC"/>
+                <a:latin typeface="Hiragino Sans GB"/>
+                <a:ea typeface="Hiragino Sans GB"/>
+                <a:cs typeface="Hiragino Sans GB"/>
+                <a:sym typeface="Hiragino Sans GB"/>
               </a:rPr>
               <a:t>复杂度：低 · 无阻塞依赖</a:t>
             </a:r>
@@ -30315,10 +30303,10 @@
                 <a:solidFill>
                   <a:srgbClr val="FFFFFF"/>
                 </a:solidFill>
-                <a:latin typeface="Noto Sans SC"/>
-                <a:ea typeface="Noto Sans SC"/>
-                <a:cs typeface="Noto Sans SC"/>
-                <a:sym typeface="Noto Sans SC"/>
+                <a:latin typeface="Hiragino Sans GB"/>
+                <a:ea typeface="Hiragino Sans GB"/>
+                <a:cs typeface="Hiragino Sans GB"/>
+                <a:sym typeface="Hiragino Sans GB"/>
               </a:rPr>
               <a:t>层 B · 后续 P4–P5</a:t>
             </a:r>
@@ -30362,10 +30350,10 @@
                 <a:solidFill>
                   <a:srgbClr val="0F172A"/>
                 </a:solidFill>
-                <a:latin typeface="Noto Sans SC"/>
-                <a:ea typeface="Noto Sans SC"/>
-                <a:cs typeface="Noto Sans SC"/>
-                <a:sym typeface="Noto Sans SC"/>
+                <a:latin typeface="Hiragino Sans GB"/>
+                <a:ea typeface="Hiragino Sans GB"/>
+                <a:cs typeface="Hiragino Sans GB"/>
+                <a:sym typeface="Hiragino Sans GB"/>
               </a:rPr>
               <a:t>chat-api 无状态化</a:t>
             </a:r>
@@ -30413,10 +30401,10 @@
                 <a:solidFill>
                   <a:srgbClr val="475569"/>
                 </a:solidFill>
-                <a:latin typeface="Noto Sans SC"/>
-                <a:ea typeface="Noto Sans SC"/>
-                <a:cs typeface="Noto Sans SC"/>
-                <a:sym typeface="Noto Sans SC"/>
+                <a:latin typeface="Hiragino Sans GB"/>
+                <a:ea typeface="Hiragino Sans GB"/>
+                <a:cs typeface="Hiragino Sans GB"/>
+                <a:sym typeface="Hiragino Sans GB"/>
               </a:rPr>
               <a:t>_sessions / _runtimes / 凭据锁外置 Redis</a:t>
             </a:r>
@@ -30437,10 +30425,10 @@
                 <a:solidFill>
                   <a:srgbClr val="475569"/>
                 </a:solidFill>
-                <a:latin typeface="Noto Sans SC"/>
-                <a:ea typeface="Noto Sans SC"/>
-                <a:cs typeface="Noto Sans SC"/>
-                <a:sym typeface="Noto Sans SC"/>
+                <a:latin typeface="Hiragino Sans GB"/>
+                <a:ea typeface="Hiragino Sans GB"/>
+                <a:cs typeface="Hiragino Sans GB"/>
+                <a:sym typeface="Hiragino Sans GB"/>
               </a:rPr>
               <a:t>按 conversation_id 一致性哈希路由实例</a:t>
             </a:r>
@@ -30460,10 +30448,10 @@
                 <a:solidFill>
                   <a:srgbClr val="475569"/>
                 </a:solidFill>
-                <a:latin typeface="Noto Sans SC"/>
-                <a:ea typeface="Noto Sans SC"/>
-                <a:cs typeface="Noto Sans SC"/>
-                <a:sym typeface="Noto Sans SC"/>
+                <a:latin typeface="Hiragino Sans GB"/>
+                <a:ea typeface="Hiragino Sans GB"/>
+                <a:cs typeface="Hiragino Sans GB"/>
+                <a:sym typeface="Hiragino Sans GB"/>
               </a:rPr>
               <a:t>Mongo claim_turn 乐观锁已就绪</a:t>
             </a:r>
@@ -30506,10 +30494,10 @@
                 <a:solidFill>
                   <a:srgbClr val="64748B"/>
                 </a:solidFill>
-                <a:latin typeface="Noto Sans SC"/>
-                <a:ea typeface="Noto Sans SC"/>
-                <a:cs typeface="Noto Sans SC"/>
-                <a:sym typeface="Noto Sans SC"/>
+                <a:latin typeface="Hiragino Sans GB"/>
+                <a:ea typeface="Hiragino Sans GB"/>
+                <a:cs typeface="Hiragino Sans GB"/>
+                <a:sym typeface="Hiragino Sans GB"/>
               </a:rPr>
               <a:t>复杂度：中高 · 触发于需要多实例时</a:t>
             </a:r>
@@ -30633,10 +30621,10 @@
                 <a:solidFill>
                   <a:srgbClr val="FFFFFF"/>
                 </a:solidFill>
-                <a:latin typeface="Noto Sans SC"/>
-                <a:ea typeface="Noto Sans SC"/>
-                <a:cs typeface="Noto Sans SC"/>
-                <a:sym typeface="Noto Sans SC"/>
+                <a:latin typeface="Hiragino Sans GB"/>
+                <a:ea typeface="Hiragino Sans GB"/>
+                <a:cs typeface="Hiragino Sans GB"/>
+                <a:sym typeface="Hiragino Sans GB"/>
               </a:rPr>
               <a:t>层 C · 后续 P6</a:t>
             </a:r>
@@ -30680,10 +30668,10 @@
                 <a:solidFill>
                   <a:srgbClr val="0F172A"/>
                 </a:solidFill>
-                <a:latin typeface="Noto Sans SC"/>
-                <a:ea typeface="Noto Sans SC"/>
-                <a:cs typeface="Noto Sans SC"/>
-                <a:sym typeface="Noto Sans SC"/>
+                <a:latin typeface="Hiragino Sans GB"/>
+                <a:ea typeface="Hiragino Sans GB"/>
+                <a:cs typeface="Hiragino Sans GB"/>
+                <a:sym typeface="Hiragino Sans GB"/>
               </a:rPr>
               <a:t>Browser Agent WS 集群</a:t>
             </a:r>
@@ -30731,10 +30719,10 @@
                 <a:solidFill>
                   <a:srgbClr val="475569"/>
                 </a:solidFill>
-                <a:latin typeface="Noto Sans SC"/>
-                <a:ea typeface="Noto Sans SC"/>
-                <a:cs typeface="Noto Sans SC"/>
-                <a:sym typeface="Noto Sans SC"/>
+                <a:latin typeface="Hiragino Sans GB"/>
+                <a:ea typeface="Hiragino Sans GB"/>
+                <a:cs typeface="Hiragino Sans GB"/>
+                <a:sym typeface="Hiragino Sans GB"/>
               </a:rPr>
               <a:t>agent_registry 跨实例改 Redis pub/sub</a:t>
             </a:r>
@@ -30755,10 +30743,10 @@
                 <a:solidFill>
                   <a:srgbClr val="475569"/>
                 </a:solidFill>
-                <a:latin typeface="Noto Sans SC"/>
-                <a:ea typeface="Noto Sans SC"/>
-                <a:cs typeface="Noto Sans SC"/>
-                <a:sym typeface="Noto Sans SC"/>
+                <a:latin typeface="Hiragino Sans GB"/>
+                <a:ea typeface="Hiragino Sans GB"/>
+                <a:cs typeface="Hiragino Sans GB"/>
+                <a:sym typeface="Hiragino Sans GB"/>
               </a:rPr>
               <a:t>闭源客户端 WS 重连能力待调研</a:t>
             </a:r>
@@ -30778,10 +30766,10 @@
                 <a:solidFill>
                   <a:srgbClr val="475569"/>
                 </a:solidFill>
-                <a:latin typeface="Noto Sans SC"/>
-                <a:ea typeface="Noto Sans SC"/>
-                <a:cs typeface="Noto Sans SC"/>
-                <a:sym typeface="Noto Sans SC"/>
+                <a:latin typeface="Hiragino Sans GB"/>
+                <a:ea typeface="Hiragino Sans GB"/>
+                <a:cs typeface="Hiragino Sans GB"/>
+                <a:sym typeface="Hiragino Sans GB"/>
               </a:rPr>
               <a:t>滚动升级容忍 5–30 秒命令闪断</a:t>
             </a:r>
@@ -30824,10 +30812,10 @@
                 <a:solidFill>
                   <a:srgbClr val="64748B"/>
                 </a:solidFill>
-                <a:latin typeface="Noto Sans SC"/>
-                <a:ea typeface="Noto Sans SC"/>
-                <a:cs typeface="Noto Sans SC"/>
-                <a:sym typeface="Noto Sans SC"/>
+                <a:latin typeface="Hiragino Sans GB"/>
+                <a:ea typeface="Hiragino Sans GB"/>
+                <a:cs typeface="Hiragino Sans GB"/>
+                <a:sym typeface="Hiragino Sans GB"/>
               </a:rPr>
               <a:t>复杂度：高 · 依赖层 B 与调研结论</a:t>
             </a:r>
@@ -30871,10 +30859,10 @@
                 <a:solidFill>
                   <a:srgbClr val="0F172A"/>
                 </a:solidFill>
-                <a:latin typeface="Noto Sans SC"/>
-                <a:ea typeface="Noto Sans SC"/>
-                <a:cs typeface="Noto Sans SC"/>
-                <a:sym typeface="Noto Sans SC"/>
+                <a:latin typeface="Hiragino Sans GB"/>
+                <a:ea typeface="Hiragino Sans GB"/>
+                <a:cs typeface="Hiragino Sans GB"/>
+                <a:sym typeface="Hiragino Sans GB"/>
               </a:rPr>
               <a:t>硬约束：</a:t>
             </a:r>
@@ -30883,10 +30871,10 @@
                 <a:solidFill>
                   <a:srgbClr val="475569"/>
                 </a:solidFill>
-                <a:latin typeface="Noto Sans SC"/>
-                <a:ea typeface="Noto Sans SC"/>
-                <a:cs typeface="Noto Sans SC"/>
-                <a:sym typeface="Noto Sans SC"/>
+                <a:latin typeface="Hiragino Sans GB"/>
+                <a:ea typeface="Hiragino Sans GB"/>
+                <a:cs typeface="Hiragino Sans GB"/>
+                <a:sym typeface="Hiragino Sans GB"/>
               </a:rPr>
               <a:t>不做同一会话跨实例并发处理，避免 kernel session 双写与事件顺序错乱；本轮不引入 Celery，路由走同步 HTTP。</a:t>
             </a:r>
@@ -30930,10 +30918,10 @@
                 <a:solidFill>
                   <a:srgbClr val="0F172A"/>
                 </a:solidFill>
-                <a:latin typeface="Noto Sans SC"/>
-                <a:ea typeface="Noto Sans SC"/>
-                <a:cs typeface="Noto Sans SC"/>
-                <a:sym typeface="Noto Sans SC"/>
+                <a:latin typeface="Hiragino Sans GB"/>
+                <a:ea typeface="Hiragino Sans GB"/>
+                <a:cs typeface="Hiragino Sans GB"/>
+                <a:sym typeface="Hiragino Sans GB"/>
               </a:rPr>
               <a:t>验收：</a:t>
             </a:r>
@@ -30942,10 +30930,10 @@
                 <a:solidFill>
                   <a:srgbClr val="475569"/>
                 </a:solidFill>
-                <a:latin typeface="Noto Sans SC"/>
-                <a:ea typeface="Noto Sans SC"/>
-                <a:cs typeface="Noto Sans SC"/>
-                <a:sym typeface="Noto Sans SC"/>
+                <a:latin typeface="Hiragino Sans GB"/>
+                <a:ea typeface="Hiragino Sans GB"/>
+                <a:cs typeface="Hiragino Sans GB"/>
+                <a:sym typeface="Hiragino Sans GB"/>
               </a:rPr>
               <a:t>200 并发 P99 与单实例偏差 ±20%；滚动升级进行中会话不丢；实例切换后第二实例可 attach 续聊。</a:t>
             </a:r>
@@ -30989,12 +30977,12 @@
                 <a:solidFill>
                   <a:srgbClr val="94A3B8"/>
                 </a:solidFill>
-                <a:latin typeface="Noto Sans SC"/>
-                <a:ea typeface="Noto Sans SC"/>
-                <a:cs typeface="Noto Sans SC"/>
-                <a:sym typeface="Noto Sans SC"/>
+                <a:latin typeface="Hiragino Sans GB"/>
+                <a:ea typeface="Hiragino Sans GB"/>
+                <a:cs typeface="Hiragino Sans GB"/>
+                <a:sym typeface="Hiragino Sans GB"/>
               </a:rPr>
-              <a:t>MOGONG · 企业级智能体功能补强规划</a:t>
+              <a:t>墨攻 · 企业级智能体功能补强规划</a:t>
             </a:r>
             <a:endParaRPr lang="en-US" sz="1100"/>
           </a:p>
@@ -31036,10 +31024,10 @@
                 <a:solidFill>
                   <a:srgbClr val="94A3B8"/>
                 </a:solidFill>
-                <a:latin typeface="Noto Sans SC"/>
-                <a:ea typeface="Noto Sans SC"/>
-                <a:cs typeface="Noto Sans SC"/>
-                <a:sym typeface="Noto Sans SC"/>
+                <a:latin typeface="Hiragino Sans GB"/>
+                <a:ea typeface="Hiragino Sans GB"/>
+                <a:cs typeface="Hiragino Sans GB"/>
+                <a:sym typeface="Hiragino Sans GB"/>
               </a:rPr>
               <a:t>15 / 16</a:t>
             </a:r>
@@ -31349,12 +31337,12 @@
                 <a:solidFill>
                   <a:srgbClr val="10B9A9"/>
                 </a:solidFill>
-                <a:latin typeface="Noto Sans SC"/>
-                <a:ea typeface="Noto Sans SC"/>
-                <a:cs typeface="Noto Sans SC"/>
-                <a:sym typeface="Noto Sans SC"/>
+                <a:latin typeface="Hiragino Sans GB"/>
+                <a:ea typeface="Hiragino Sans GB"/>
+                <a:cs typeface="Hiragino Sans GB"/>
+                <a:sym typeface="Hiragino Sans GB"/>
               </a:rPr>
-              <a:t>MOGONG · 企业级智能体平台</a:t>
+              <a:t>墨攻 · 企业级智能体平台</a:t>
             </a:r>
             <a:endParaRPr lang="en-US" sz="1100"/>
           </a:p>
@@ -31398,12 +31386,12 @@
                 <a:solidFill>
                   <a:srgbClr val="FFFFFF"/>
                 </a:solidFill>
-                <a:latin typeface="Noto Sans SC"/>
-                <a:ea typeface="Noto Sans SC"/>
-                <a:cs typeface="Noto Sans SC"/>
-                <a:sym typeface="Noto Sans SC"/>
+                <a:latin typeface="Hiragino Sans GB"/>
+                <a:ea typeface="Hiragino Sans GB"/>
+                <a:cs typeface="Hiragino Sans GB"/>
+                <a:sym typeface="Hiragino Sans GB"/>
               </a:rPr>
-              <a:t>库代码 + 单测全绿，生产接线与 UI 触点全部闭合（15 项落地的 SDD 全流程），从能力走进生产</a:t>
+              <a:t>库代码 + 单测全绿，生产接线与 UI 触点全部闭合（15 项 + 020 的 SDD 全流程），从能力走进生产</a:t>
             </a:r>
             <a:endParaRPr lang="en-US" sz="1100"/>
           </a:p>
@@ -31449,12 +31437,12 @@
                     <a:alpha val="70196"/>
                   </a:srgbClr>
                 </a:solidFill>
-                <a:latin typeface="Noto Sans SC"/>
-                <a:ea typeface="Noto Sans SC"/>
-                <a:cs typeface="Noto Sans SC"/>
-                <a:sym typeface="Noto Sans SC"/>
+                <a:latin typeface="Hiragino Sans GB"/>
+                <a:ea typeface="Hiragino Sans GB"/>
+                <a:cs typeface="Hiragino Sans GB"/>
+                <a:sym typeface="Hiragino Sans GB"/>
               </a:rPr>
-              <a:t>下一步：以 019 弹性 Harness 收尾的 SDD 全流程已就绪，可进入 PR 评审与版本发布——库能力、生产接线与治理资产齐备。</a:t>
+              <a:t>下一步：以 020 平台化多租户收尾的 SDD 全流程已就绪，可进入 PR 评审与版本发布——库能力、生产接线与治理资产齐备。</a:t>
             </a:r>
             <a:endParaRPr lang="en-US" sz="1100"/>
           </a:p>
@@ -31536,10 +31524,10 @@
                     <a:alpha val="45098"/>
                   </a:srgbClr>
                 </a:solidFill>
-                <a:latin typeface="Noto Sans SC"/>
-                <a:ea typeface="Noto Sans SC"/>
-                <a:cs typeface="Noto Sans SC"/>
-                <a:sym typeface="Noto Sans SC"/>
+                <a:latin typeface="Hiragino Sans GB"/>
+                <a:ea typeface="Hiragino Sans GB"/>
+                <a:cs typeface="Hiragino Sans GB"/>
+                <a:sym typeface="Hiragino Sans GB"/>
               </a:rPr>
               <a:t>16 / 16</a:t>
             </a:r>
@@ -31681,10 +31669,10 @@
                 <a:solidFill>
                   <a:srgbClr val="0D9488"/>
                 </a:solidFill>
-                <a:latin typeface="Noto Sans SC"/>
-                <a:ea typeface="Noto Sans SC"/>
-                <a:cs typeface="Noto Sans SC"/>
-                <a:sym typeface="Noto Sans SC"/>
+                <a:latin typeface="Hiragino Sans GB"/>
+                <a:ea typeface="Hiragino Sans GB"/>
+                <a:cs typeface="Hiragino Sans GB"/>
+                <a:sym typeface="Hiragino Sans GB"/>
               </a:rPr>
               <a:t>01 · 定位与主线</a:t>
             </a:r>
@@ -31730,12 +31718,12 @@
                 <a:solidFill>
                   <a:srgbClr val="0F172A"/>
                 </a:solidFill>
-                <a:latin typeface="Noto Sans SC"/>
-                <a:ea typeface="Noto Sans SC"/>
-                <a:cs typeface="Noto Sans SC"/>
-                <a:sym typeface="Noto Sans SC"/>
+                <a:latin typeface="Hiragino Sans GB"/>
+                <a:ea typeface="Hiragino Sans GB"/>
+                <a:cs typeface="Hiragino Sans GB"/>
+                <a:sym typeface="Hiragino Sans GB"/>
               </a:rPr>
-              <a:t>DSH 管运行，MOGONG 管进企业——15 项补强已按 SDD 落地</a:t>
+              <a:t>DSH 管运行，墨攻管进企业——15 项补强已按 SDD 落地</a:t>
             </a:r>
             <a:endParaRPr lang="en-US" sz="1100"/>
           </a:p>
@@ -31849,10 +31837,10 @@
                 <a:solidFill>
                   <a:srgbClr val="2DD4BF"/>
                 </a:solidFill>
-                <a:latin typeface="Noto Sans SC"/>
-                <a:ea typeface="Noto Sans SC"/>
-                <a:cs typeface="Noto Sans SC"/>
-                <a:sym typeface="Noto Sans SC"/>
+                <a:latin typeface="Hiragino Sans GB"/>
+                <a:ea typeface="Hiragino Sans GB"/>
+                <a:cs typeface="Hiragino Sans GB"/>
+                <a:sym typeface="Hiragino Sans GB"/>
               </a:rPr>
               <a:t>一句话定位</a:t>
             </a:r>
@@ -31898,12 +31886,12 @@
                 <a:solidFill>
                   <a:srgbClr val="FFFFFF"/>
                 </a:solidFill>
-                <a:latin typeface="Noto Sans SC"/>
-                <a:ea typeface="Noto Sans SC"/>
-                <a:cs typeface="Noto Sans SC"/>
-                <a:sym typeface="Noto Sans SC"/>
+                <a:latin typeface="Hiragino Sans GB"/>
+                <a:ea typeface="Hiragino Sans GB"/>
+                <a:cs typeface="Hiragino Sans GB"/>
+                <a:sym typeface="Hiragino Sans GB"/>
               </a:rPr>
-              <a:t>MOGONG = DSH Runtime（执行底座）+ MOGONG 企业层（进入生产）</a:t>
+              <a:t>墨攻 = DSH Runtime（执行底座）+ 墨攻企业层（进入生产）</a:t>
             </a:r>
             <a:endParaRPr lang="en-US" sz="1100"/>
           </a:p>
@@ -31987,10 +31975,10 @@
                     <a:alpha val="74902"/>
                   </a:srgbClr>
                 </a:solidFill>
-                <a:latin typeface="Noto Sans SC"/>
-                <a:ea typeface="Noto Sans SC"/>
-                <a:cs typeface="Noto Sans SC"/>
-                <a:sym typeface="Noto Sans SC"/>
+                <a:latin typeface="Hiragino Sans GB"/>
+                <a:ea typeface="Hiragino Sans GB"/>
+                <a:cs typeface="Hiragino Sans GB"/>
+                <a:sym typeface="Hiragino Sans GB"/>
               </a:rPr>
               <a:t>在执行底座、文档与内容生成、多形态 Agent、SkillHub、自托管部署上已是较完整起点；本次不推倒重来，只补缺口。</a:t>
             </a:r>
@@ -32036,10 +32024,10 @@
                 <a:solidFill>
                   <a:srgbClr val="0F172A"/>
                 </a:solidFill>
-                <a:latin typeface="Noto Sans SC"/>
-                <a:ea typeface="Noto Sans SC"/>
-                <a:cs typeface="Noto Sans SC"/>
-                <a:sym typeface="Noto Sans SC"/>
+                <a:latin typeface="Hiragino Sans GB"/>
+                <a:ea typeface="Hiragino Sans GB"/>
+                <a:cs typeface="Hiragino Sans GB"/>
+                <a:sym typeface="Hiragino Sans GB"/>
               </a:rPr>
               <a:t>本材料按四步回答</a:t>
             </a:r>
@@ -32127,10 +32115,10 @@
                 <a:solidFill>
                   <a:srgbClr val="10B9A9"/>
                 </a:solidFill>
-                <a:latin typeface="Noto Sans SC"/>
-                <a:ea typeface="Noto Sans SC"/>
-                <a:cs typeface="Noto Sans SC"/>
-                <a:sym typeface="Noto Sans SC"/>
+                <a:latin typeface="Hiragino Sans GB"/>
+                <a:ea typeface="Hiragino Sans GB"/>
+                <a:cs typeface="Hiragino Sans GB"/>
+                <a:sym typeface="Hiragino Sans GB"/>
               </a:rPr>
               <a:t>01</a:t>
             </a:r>
@@ -32176,10 +32164,10 @@
                 <a:solidFill>
                   <a:srgbClr val="334155"/>
                 </a:solidFill>
-                <a:latin typeface="Noto Sans SC"/>
-                <a:ea typeface="Noto Sans SC"/>
-                <a:cs typeface="Noto Sans SC"/>
-                <a:sym typeface="Noto Sans SC"/>
+                <a:latin typeface="Hiragino Sans GB"/>
+                <a:ea typeface="Hiragino Sans GB"/>
+                <a:cs typeface="Hiragino Sans GB"/>
+                <a:sym typeface="Hiragino Sans GB"/>
               </a:rPr>
               <a:t>已有哪些能力，哪些已领先、不重复投入</a:t>
             </a:r>
@@ -32267,10 +32255,10 @@
                 <a:solidFill>
                   <a:srgbClr val="10B9A9"/>
                 </a:solidFill>
-                <a:latin typeface="Noto Sans SC"/>
-                <a:ea typeface="Noto Sans SC"/>
-                <a:cs typeface="Noto Sans SC"/>
-                <a:sym typeface="Noto Sans SC"/>
+                <a:latin typeface="Hiragino Sans GB"/>
+                <a:ea typeface="Hiragino Sans GB"/>
+                <a:cs typeface="Hiragino Sans GB"/>
+                <a:sym typeface="Hiragino Sans GB"/>
               </a:rPr>
               <a:t>02</a:t>
             </a:r>
@@ -32316,10 +32304,10 @@
                 <a:solidFill>
                   <a:srgbClr val="334155"/>
                 </a:solidFill>
-                <a:latin typeface="Noto Sans SC"/>
-                <a:ea typeface="Noto Sans SC"/>
-                <a:cs typeface="Noto Sans SC"/>
-                <a:sym typeface="Noto Sans SC"/>
+                <a:latin typeface="Hiragino Sans GB"/>
+                <a:ea typeface="Hiragino Sans GB"/>
+                <a:cs typeface="Hiragino Sans GB"/>
+                <a:sym typeface="Hiragino Sans GB"/>
               </a:rPr>
               <a:t>与 EntAgent / AgentGit 对比，缺哪六处</a:t>
             </a:r>
@@ -32407,10 +32395,10 @@
                 <a:solidFill>
                   <a:srgbClr val="10B9A9"/>
                 </a:solidFill>
-                <a:latin typeface="Noto Sans SC"/>
-                <a:ea typeface="Noto Sans SC"/>
-                <a:cs typeface="Noto Sans SC"/>
-                <a:sym typeface="Noto Sans SC"/>
+                <a:latin typeface="Hiragino Sans GB"/>
+                <a:ea typeface="Hiragino Sans GB"/>
+                <a:cs typeface="Hiragino Sans GB"/>
+                <a:sym typeface="Hiragino Sans GB"/>
               </a:rPr>
               <a:t>03</a:t>
             </a:r>
@@ -32456,10 +32444,10 @@
                 <a:solidFill>
                   <a:srgbClr val="334155"/>
                 </a:solidFill>
-                <a:latin typeface="Noto Sans SC"/>
-                <a:ea typeface="Noto Sans SC"/>
-                <a:cs typeface="Noto Sans SC"/>
-                <a:sym typeface="Noto Sans SC"/>
+                <a:latin typeface="Hiragino Sans GB"/>
+                <a:ea typeface="Hiragino Sans GB"/>
+                <a:cs typeface="Hiragino Sans GB"/>
+                <a:sym typeface="Hiragino Sans GB"/>
               </a:rPr>
               <a:t>按 P0 / P1 / P2 优先级逐项补强什么</a:t>
             </a:r>
@@ -32547,10 +32535,10 @@
                 <a:solidFill>
                   <a:srgbClr val="10B9A9"/>
                 </a:solidFill>
-                <a:latin typeface="Noto Sans SC"/>
-                <a:ea typeface="Noto Sans SC"/>
-                <a:cs typeface="Noto Sans SC"/>
-                <a:sym typeface="Noto Sans SC"/>
+                <a:latin typeface="Hiragino Sans GB"/>
+                <a:ea typeface="Hiragino Sans GB"/>
+                <a:cs typeface="Hiragino Sans GB"/>
+                <a:sym typeface="Hiragino Sans GB"/>
               </a:rPr>
               <a:t>04</a:t>
             </a:r>
@@ -32596,10 +32584,10 @@
                 <a:solidFill>
                   <a:srgbClr val="334155"/>
                 </a:solidFill>
-                <a:latin typeface="Noto Sans SC"/>
-                <a:ea typeface="Noto Sans SC"/>
-                <a:cs typeface="Noto Sans SC"/>
-                <a:sym typeface="Noto Sans SC"/>
+                <a:latin typeface="Hiragino Sans GB"/>
+                <a:ea typeface="Hiragino Sans GB"/>
+                <a:cs typeface="Hiragino Sans GB"/>
+                <a:sym typeface="Hiragino Sans GB"/>
               </a:rPr>
               <a:t>三阶段多久落地、各交付什么</a:t>
             </a:r>
@@ -32645,12 +32633,12 @@
                 <a:solidFill>
                   <a:srgbClr val="94A3B8"/>
                 </a:solidFill>
-                <a:latin typeface="Noto Sans SC"/>
-                <a:ea typeface="Noto Sans SC"/>
-                <a:cs typeface="Noto Sans SC"/>
-                <a:sym typeface="Noto Sans SC"/>
+                <a:latin typeface="Hiragino Sans GB"/>
+                <a:ea typeface="Hiragino Sans GB"/>
+                <a:cs typeface="Hiragino Sans GB"/>
+                <a:sym typeface="Hiragino Sans GB"/>
               </a:rPr>
-              <a:t>MOGONG · 企业级智能体平台</a:t>
+              <a:t>墨攻 · 企业级智能体平台</a:t>
             </a:r>
             <a:endParaRPr lang="en-US" sz="1100"/>
           </a:p>
@@ -32692,10 +32680,10 @@
                 <a:solidFill>
                   <a:srgbClr val="94A3B8"/>
                 </a:solidFill>
-                <a:latin typeface="Noto Sans SC"/>
-                <a:ea typeface="Noto Sans SC"/>
-                <a:cs typeface="Noto Sans SC"/>
-                <a:sym typeface="Noto Sans SC"/>
+                <a:latin typeface="Hiragino Sans GB"/>
+                <a:ea typeface="Hiragino Sans GB"/>
+                <a:cs typeface="Hiragino Sans GB"/>
+                <a:sym typeface="Hiragino Sans GB"/>
               </a:rPr>
               <a:t>'2 / 16'</a:t>
             </a:r>
@@ -32813,10 +32801,10 @@
                 <a:solidFill>
                   <a:srgbClr val="0D9488"/>
                 </a:solidFill>
-                <a:latin typeface="Noto Sans SC"/>
-                <a:ea typeface="Noto Sans SC"/>
-                <a:cs typeface="Noto Sans SC"/>
-                <a:sym typeface="Noto Sans SC"/>
+                <a:latin typeface="Hiragino Sans GB"/>
+                <a:ea typeface="Hiragino Sans GB"/>
+                <a:cs typeface="Hiragino Sans GB"/>
+                <a:sym typeface="Hiragino Sans GB"/>
               </a:rPr>
               <a:t>02 · 现状 — 已有基线</a:t>
             </a:r>
@@ -32862,12 +32850,12 @@
                 <a:solidFill>
                   <a:srgbClr val="0F172A"/>
                 </a:solidFill>
-                <a:latin typeface="Noto Sans SC"/>
-                <a:ea typeface="Noto Sans SC"/>
-                <a:cs typeface="Noto Sans SC"/>
-                <a:sym typeface="Noto Sans SC"/>
+                <a:latin typeface="Hiragino Sans GB"/>
+                <a:ea typeface="Hiragino Sans GB"/>
+                <a:cs typeface="Hiragino Sans GB"/>
+                <a:sym typeface="Hiragino Sans GB"/>
               </a:rPr>
-              <a:t>MOGONG 已具备九大能力域，执行与内容生成完整</a:t>
+              <a:t>墨攻已具备九大能力域，执行与内容生成完整</a:t>
             </a:r>
             <a:endParaRPr lang="en-US" sz="1100"/>
           </a:p>
@@ -32985,10 +32973,10 @@
                 <a:solidFill>
                   <a:srgbClr val="0F172A"/>
                 </a:solidFill>
-                <a:latin typeface="Noto Sans SC"/>
-                <a:ea typeface="Noto Sans SC"/>
-                <a:cs typeface="Noto Sans SC"/>
-                <a:sym typeface="Noto Sans SC"/>
+                <a:latin typeface="Hiragino Sans GB"/>
+                <a:ea typeface="Hiragino Sans GB"/>
+                <a:cs typeface="Hiragino Sans GB"/>
+                <a:sym typeface="Hiragino Sans GB"/>
               </a:rPr>
               <a:t>Agent Runtime</a:t>
             </a:r>
@@ -33034,10 +33022,10 @@
                 <a:solidFill>
                   <a:srgbClr val="64748B"/>
                 </a:solidFill>
-                <a:latin typeface="Noto Sans SC"/>
-                <a:ea typeface="Noto Sans SC"/>
-                <a:cs typeface="Noto Sans SC"/>
-                <a:sym typeface="Noto Sans SC"/>
+                <a:latin typeface="Hiragino Sans GB"/>
+                <a:ea typeface="Hiragino Sans GB"/>
+                <a:cs typeface="Hiragino Sans GB"/>
+                <a:sym typeface="Hiragino Sans GB"/>
               </a:rPr>
               <a:t>DSH 原生：任务规划、工具调用、Skill、子智能体、受控执行</a:t>
             </a:r>
@@ -33125,10 +33113,10 @@
                 <a:solidFill>
                   <a:srgbClr val="0F172A"/>
                 </a:solidFill>
-                <a:latin typeface="Noto Sans SC"/>
-                <a:ea typeface="Noto Sans SC"/>
-                <a:cs typeface="Noto Sans SC"/>
-                <a:sym typeface="Noto Sans SC"/>
+                <a:latin typeface="Hiragino Sans GB"/>
+                <a:ea typeface="Hiragino Sans GB"/>
+                <a:cs typeface="Hiragino Sans GB"/>
+                <a:sym typeface="Hiragino Sans GB"/>
               </a:rPr>
               <a:t>企业知识 / RAG</a:t>
             </a:r>
@@ -33174,10 +33162,10 @@
                 <a:solidFill>
                   <a:srgbClr val="64748B"/>
                 </a:solidFill>
-                <a:latin typeface="Noto Sans SC"/>
-                <a:ea typeface="Noto Sans SC"/>
-                <a:cs typeface="Noto Sans SC"/>
-                <a:sym typeface="Noto Sans SC"/>
+                <a:latin typeface="Hiragino Sans GB"/>
+                <a:ea typeface="Hiragino Sans GB"/>
+                <a:cs typeface="Hiragino Sans GB"/>
+                <a:sym typeface="Hiragino Sans GB"/>
               </a:rPr>
               <a:t>内部+公开检索、多轮研究、保留引用、可分享个人知识库</a:t>
             </a:r>
@@ -33265,10 +33253,10 @@
                 <a:solidFill>
                   <a:srgbClr val="0F172A"/>
                 </a:solidFill>
-                <a:latin typeface="Noto Sans SC"/>
-                <a:ea typeface="Noto Sans SC"/>
-                <a:cs typeface="Noto Sans SC"/>
-                <a:sym typeface="Noto Sans SC"/>
+                <a:latin typeface="Hiragino Sans GB"/>
+                <a:ea typeface="Hiragino Sans GB"/>
+                <a:cs typeface="Hiragino Sans GB"/>
+                <a:sym typeface="Hiragino Sans GB"/>
               </a:rPr>
               <a:t>多模态理解</a:t>
             </a:r>
@@ -33314,10 +33302,10 @@
                 <a:solidFill>
                   <a:srgbClr val="64748B"/>
                 </a:solidFill>
-                <a:latin typeface="Noto Sans SC"/>
-                <a:ea typeface="Noto Sans SC"/>
-                <a:cs typeface="Noto Sans SC"/>
-                <a:sym typeface="Noto Sans SC"/>
+                <a:latin typeface="Hiragino Sans GB"/>
+                <a:ea typeface="Hiragino Sans GB"/>
+                <a:cs typeface="Hiragino Sans GB"/>
+                <a:sym typeface="Hiragino Sans GB"/>
               </a:rPr>
               <a:t>PDF/DOCX/XLSX/PPTX/CSV/MD，含文档内图片与图表</a:t>
             </a:r>
@@ -33405,10 +33393,10 @@
                 <a:solidFill>
                   <a:srgbClr val="0F172A"/>
                 </a:solidFill>
-                <a:latin typeface="Noto Sans SC"/>
-                <a:ea typeface="Noto Sans SC"/>
-                <a:cs typeface="Noto Sans SC"/>
-                <a:sym typeface="Noto Sans SC"/>
+                <a:latin typeface="Hiragino Sans GB"/>
+                <a:ea typeface="Hiragino Sans GB"/>
+                <a:cs typeface="Hiragino Sans GB"/>
+                <a:sym typeface="Hiragino Sans GB"/>
               </a:rPr>
               <a:t>内容生成</a:t>
             </a:r>
@@ -33454,10 +33442,10 @@
                 <a:solidFill>
                   <a:srgbClr val="64748B"/>
                 </a:solidFill>
-                <a:latin typeface="Noto Sans SC"/>
-                <a:ea typeface="Noto Sans SC"/>
-                <a:cs typeface="Noto Sans SC"/>
-                <a:sym typeface="Noto Sans SC"/>
+                <a:latin typeface="Hiragino Sans GB"/>
+                <a:ea typeface="Hiragino Sans GB"/>
+                <a:cs typeface="Hiragino Sans GB"/>
+                <a:sym typeface="Hiragino Sans GB"/>
               </a:rPr>
               <a:t>报告 / 文章 / PPTX / 表格 / PDF / MD 交付物</a:t>
             </a:r>
@@ -33545,10 +33533,10 @@
                 <a:solidFill>
                   <a:srgbClr val="0F172A"/>
                 </a:solidFill>
-                <a:latin typeface="Noto Sans SC"/>
-                <a:ea typeface="Noto Sans SC"/>
-                <a:cs typeface="Noto Sans SC"/>
-                <a:sym typeface="Noto Sans SC"/>
+                <a:latin typeface="Hiragino Sans GB"/>
+                <a:ea typeface="Hiragino Sans GB"/>
+                <a:cs typeface="Hiragino Sans GB"/>
+                <a:sym typeface="Hiragino Sans GB"/>
               </a:rPr>
               <a:t>集成（MCP）</a:t>
             </a:r>
@@ -33594,10 +33582,10 @@
                 <a:solidFill>
                   <a:srgbClr val="64748B"/>
                 </a:solidFill>
-                <a:latin typeface="Noto Sans SC"/>
-                <a:ea typeface="Noto Sans SC"/>
-                <a:cs typeface="Noto Sans SC"/>
-                <a:sym typeface="Noto Sans SC"/>
+                <a:latin typeface="Hiragino Sans GB"/>
+                <a:ea typeface="Hiragino Sans GB"/>
+                <a:cs typeface="Hiragino Sans GB"/>
+                <a:sym typeface="Hiragino Sans GB"/>
               </a:rPr>
               <a:t>工作流型 Skill、HTTP / MCP 连接业务系统</a:t>
             </a:r>
@@ -33685,10 +33673,10 @@
                 <a:solidFill>
                   <a:srgbClr val="0F172A"/>
                 </a:solidFill>
-                <a:latin typeface="Noto Sans SC"/>
-                <a:ea typeface="Noto Sans SC"/>
-                <a:cs typeface="Noto Sans SC"/>
-                <a:sym typeface="Noto Sans SC"/>
+                <a:latin typeface="Hiragino Sans GB"/>
+                <a:ea typeface="Hiragino Sans GB"/>
+                <a:cs typeface="Hiragino Sans GB"/>
+                <a:sym typeface="Hiragino Sans GB"/>
               </a:rPr>
               <a:t>自动化与治理</a:t>
             </a:r>
@@ -33734,10 +33722,10 @@
                 <a:solidFill>
                   <a:srgbClr val="64748B"/>
                 </a:solidFill>
-                <a:latin typeface="Noto Sans SC"/>
-                <a:ea typeface="Noto Sans SC"/>
-                <a:cs typeface="Noto Sans SC"/>
-                <a:sym typeface="Noto Sans SC"/>
+                <a:latin typeface="Hiragino Sans GB"/>
+                <a:ea typeface="Hiragino Sans GB"/>
+                <a:cs typeface="Hiragino Sans GB"/>
+                <a:sym typeface="Hiragino Sans GB"/>
               </a:rPr>
               <a:t>定时任务、敏感工具审批、执行追踪、产物留存</a:t>
             </a:r>
@@ -33825,10 +33813,10 @@
                 <a:solidFill>
                   <a:srgbClr val="0F172A"/>
                 </a:solidFill>
-                <a:latin typeface="Noto Sans SC"/>
-                <a:ea typeface="Noto Sans SC"/>
-                <a:cs typeface="Noto Sans SC"/>
-                <a:sym typeface="Noto Sans SC"/>
+                <a:latin typeface="Hiragino Sans GB"/>
+                <a:ea typeface="Hiragino Sans GB"/>
+                <a:cs typeface="Hiragino Sans GB"/>
+                <a:sym typeface="Hiragino Sans GB"/>
               </a:rPr>
               <a:t>管理后台</a:t>
             </a:r>
@@ -33874,10 +33862,10 @@
                 <a:solidFill>
                   <a:srgbClr val="64748B"/>
                 </a:solidFill>
-                <a:latin typeface="Noto Sans SC"/>
-                <a:ea typeface="Noto Sans SC"/>
-                <a:cs typeface="Noto Sans SC"/>
-                <a:sym typeface="Noto Sans SC"/>
+                <a:latin typeface="Hiragino Sans GB"/>
+                <a:ea typeface="Hiragino Sans GB"/>
+                <a:cs typeface="Hiragino Sans GB"/>
+                <a:sym typeface="Hiragino Sans GB"/>
               </a:rPr>
               <a:t>组织/用户/角色/模型/知识/Skill/工具/审计、RBAC</a:t>
             </a:r>
@@ -33965,10 +33953,10 @@
                 <a:solidFill>
                   <a:srgbClr val="0F172A"/>
                 </a:solidFill>
-                <a:latin typeface="Noto Sans SC"/>
-                <a:ea typeface="Noto Sans SC"/>
-                <a:cs typeface="Noto Sans SC"/>
-                <a:sym typeface="Noto Sans SC"/>
+                <a:latin typeface="Hiragino Sans GB"/>
+                <a:ea typeface="Hiragino Sans GB"/>
+                <a:cs typeface="Hiragino Sans GB"/>
+                <a:sym typeface="Hiragino Sans GB"/>
               </a:rPr>
               <a:t>部署</a:t>
             </a:r>
@@ -34014,10 +34002,10 @@
                 <a:solidFill>
                   <a:srgbClr val="64748B"/>
                 </a:solidFill>
-                <a:latin typeface="Noto Sans SC"/>
-                <a:ea typeface="Noto Sans SC"/>
-                <a:cs typeface="Noto Sans SC"/>
-                <a:sym typeface="Noto Sans SC"/>
+                <a:latin typeface="Hiragino Sans GB"/>
+                <a:ea typeface="Hiragino Sans GB"/>
+                <a:cs typeface="Hiragino Sans GB"/>
+                <a:sym typeface="Hiragino Sans GB"/>
               </a:rPr>
               <a:t>Docker Compose 一键 12 服务、自托管、模型数据自主</a:t>
             </a:r>
@@ -34105,10 +34093,10 @@
                 <a:solidFill>
                   <a:srgbClr val="0F172A"/>
                 </a:solidFill>
-                <a:latin typeface="Noto Sans SC"/>
-                <a:ea typeface="Noto Sans SC"/>
-                <a:cs typeface="Noto Sans SC"/>
-                <a:sym typeface="Noto Sans SC"/>
+                <a:latin typeface="Hiragino Sans GB"/>
+                <a:ea typeface="Hiragino Sans GB"/>
+                <a:cs typeface="Hiragino Sans GB"/>
+                <a:sym typeface="Hiragino Sans GB"/>
               </a:rPr>
               <a:t>桌面扩展</a:t>
             </a:r>
@@ -34154,12 +34142,12 @@
                 <a:solidFill>
                   <a:srgbClr val="64748B"/>
                 </a:solidFill>
-                <a:latin typeface="Noto Sans SC"/>
-                <a:ea typeface="Noto Sans SC"/>
-                <a:cs typeface="Noto Sans SC"/>
-                <a:sym typeface="Noto Sans SC"/>
+                <a:latin typeface="Hiragino Sans GB"/>
+                <a:ea typeface="Hiragino Sans GB"/>
+                <a:cs typeface="Hiragino Sans GB"/>
+                <a:sym typeface="Hiragino Sans GB"/>
               </a:rPr>
-              <a:t>MOGONG Desktop 连接浏览器 / Code Agent</a:t>
+              <a:t>墨攻 Desktop 连接浏览器 / Code Agent</a:t>
             </a:r>
             <a:endParaRPr lang="en-US" sz="1100"/>
           </a:p>
@@ -34203,12 +34191,12 @@
                 <a:solidFill>
                   <a:srgbClr val="94A3B8"/>
                 </a:solidFill>
-                <a:latin typeface="Noto Sans SC"/>
-                <a:ea typeface="Noto Sans SC"/>
-                <a:cs typeface="Noto Sans SC"/>
-                <a:sym typeface="Noto Sans SC"/>
+                <a:latin typeface="Hiragino Sans GB"/>
+                <a:ea typeface="Hiragino Sans GB"/>
+                <a:cs typeface="Hiragino Sans GB"/>
+                <a:sym typeface="Hiragino Sans GB"/>
               </a:rPr>
-              <a:t>MOGONG · 企业级智能体平台</a:t>
+              <a:t>墨攻 · 企业级智能体平台</a:t>
             </a:r>
             <a:endParaRPr lang="en-US" sz="1100"/>
           </a:p>
@@ -34250,10 +34238,10 @@
                 <a:solidFill>
                   <a:srgbClr val="94A3B8"/>
                 </a:solidFill>
-                <a:latin typeface="Noto Sans SC"/>
-                <a:ea typeface="Noto Sans SC"/>
-                <a:cs typeface="Noto Sans SC"/>
-                <a:sym typeface="Noto Sans SC"/>
+                <a:latin typeface="Hiragino Sans GB"/>
+                <a:ea typeface="Hiragino Sans GB"/>
+                <a:cs typeface="Hiragino Sans GB"/>
+                <a:sym typeface="Hiragino Sans GB"/>
               </a:rPr>
               <a:t>'3 / 16'</a:t>
             </a:r>
@@ -34371,10 +34359,10 @@
                 <a:solidFill>
                   <a:srgbClr val="0D9488"/>
                 </a:solidFill>
-                <a:latin typeface="Noto Sans SC"/>
-                <a:ea typeface="Noto Sans SC"/>
-                <a:cs typeface="Noto Sans SC"/>
-                <a:sym typeface="Noto Sans SC"/>
+                <a:latin typeface="Hiragino Sans GB"/>
+                <a:ea typeface="Hiragino Sans GB"/>
+                <a:cs typeface="Hiragino Sans GB"/>
+                <a:sym typeface="Hiragino Sans GB"/>
               </a:rPr>
               <a:t>02 · 现状 — 已领先边界</a:t>
             </a:r>
@@ -34420,10 +34408,10 @@
                 <a:solidFill>
                   <a:srgbClr val="0F172A"/>
                 </a:solidFill>
-                <a:latin typeface="Noto Sans SC"/>
-                <a:ea typeface="Noto Sans SC"/>
-                <a:cs typeface="Noto Sans SC"/>
-                <a:sym typeface="Noto Sans SC"/>
+                <a:latin typeface="Hiragino Sans GB"/>
+                <a:ea typeface="Hiragino Sans GB"/>
+                <a:cs typeface="Hiragino Sans GB"/>
+                <a:sym typeface="Hiragino Sans GB"/>
               </a:rPr>
               <a:t>五块能力已强于对标，作为"不重复造轮子"的边界</a:t>
             </a:r>
@@ -34543,10 +34531,10 @@
                 <a:solidFill>
                   <a:srgbClr val="0F172A"/>
                 </a:solidFill>
-                <a:latin typeface="Noto Sans SC"/>
-                <a:ea typeface="Noto Sans SC"/>
-                <a:cs typeface="Noto Sans SC"/>
-                <a:sym typeface="Noto Sans SC"/>
+                <a:latin typeface="Hiragino Sans GB"/>
+                <a:ea typeface="Hiragino Sans GB"/>
+                <a:cs typeface="Hiragino Sans GB"/>
+                <a:sym typeface="Hiragino Sans GB"/>
               </a:rPr>
               <a:t>容器化自托管部署</a:t>
             </a:r>
@@ -34592,10 +34580,10 @@
                 <a:solidFill>
                   <a:srgbClr val="64748B"/>
                 </a:solidFill>
-                <a:latin typeface="Noto Sans SC"/>
-                <a:ea typeface="Noto Sans SC"/>
-                <a:cs typeface="Noto Sans SC"/>
-                <a:sym typeface="Noto Sans SC"/>
+                <a:latin typeface="Hiragino Sans GB"/>
+                <a:ea typeface="Hiragino Sans GB"/>
+                <a:cs typeface="Hiragino Sans GB"/>
+                <a:sym typeface="Hiragino Sans GB"/>
               </a:rPr>
               <a:t>Docker Compose 一键 12 服务 + CLI 启动器 + 备份/恢复，生产运维底座已就绪</a:t>
             </a:r>
@@ -34683,10 +34671,10 @@
                 <a:solidFill>
                   <a:srgbClr val="0F172A"/>
                 </a:solidFill>
-                <a:latin typeface="Noto Sans SC"/>
-                <a:ea typeface="Noto Sans SC"/>
-                <a:cs typeface="Noto Sans SC"/>
-                <a:sym typeface="Noto Sans SC"/>
+                <a:latin typeface="Hiragino Sans GB"/>
+                <a:ea typeface="Hiragino Sans GB"/>
+                <a:cs typeface="Hiragino Sans GB"/>
+                <a:sym typeface="Hiragino Sans GB"/>
               </a:rPr>
               <a:t>Docling 多格式解析</a:t>
             </a:r>
@@ -34732,10 +34720,10 @@
                 <a:solidFill>
                   <a:srgbClr val="64748B"/>
                 </a:solidFill>
-                <a:latin typeface="Noto Sans SC"/>
-                <a:ea typeface="Noto Sans SC"/>
-                <a:cs typeface="Noto Sans SC"/>
-                <a:sym typeface="Noto Sans SC"/>
+                <a:latin typeface="Hiragino Sans GB"/>
+                <a:ea typeface="Hiragino Sans GB"/>
+                <a:cs typeface="Hiragino Sans GB"/>
+                <a:sym typeface="Hiragino Sans GB"/>
               </a:rPr>
               <a:t>PDF/DOCX/XLSX/PPTX/CSV + LibreOffice 预览，文档理解强于对标方案</a:t>
             </a:r>
@@ -34823,10 +34811,10 @@
                 <a:solidFill>
                   <a:srgbClr val="0F172A"/>
                 </a:solidFill>
-                <a:latin typeface="Noto Sans SC"/>
-                <a:ea typeface="Noto Sans SC"/>
-                <a:cs typeface="Noto Sans SC"/>
-                <a:sym typeface="Noto Sans SC"/>
+                <a:latin typeface="Hiragino Sans GB"/>
+                <a:ea typeface="Hiragino Sans GB"/>
+                <a:cs typeface="Hiragino Sans GB"/>
+                <a:sym typeface="Hiragino Sans GB"/>
               </a:rPr>
               <a:t>内容与文件生成</a:t>
             </a:r>
@@ -34872,12 +34860,12 @@
                 <a:solidFill>
                   <a:srgbClr val="64748B"/>
                 </a:solidFill>
-                <a:latin typeface="Noto Sans SC"/>
-                <a:ea typeface="Noto Sans SC"/>
-                <a:cs typeface="Noto Sans SC"/>
-                <a:sym typeface="Noto Sans SC"/>
+                <a:latin typeface="Hiragino Sans GB"/>
+                <a:ea typeface="Hiragino Sans GB"/>
+                <a:cs typeface="Hiragino Sans GB"/>
+                <a:sym typeface="Hiragino Sans GB"/>
               </a:rPr>
-              <a:t>报告/文章/PPTX/表格/PDF/翻译/表单——对标几乎空白，MOGONG 差异化强项</a:t>
+              <a:t>报告/文章/PPTX/表格/PDF/翻译/表单——对标几乎空白，墨攻差异化强项</a:t>
             </a:r>
             <a:endParaRPr lang="en-US" sz="1100"/>
           </a:p>
@@ -34963,10 +34951,10 @@
                 <a:solidFill>
                   <a:srgbClr val="0F172A"/>
                 </a:solidFill>
-                <a:latin typeface="Noto Sans SC"/>
-                <a:ea typeface="Noto Sans SC"/>
-                <a:cs typeface="Noto Sans SC"/>
-                <a:sym typeface="Noto Sans SC"/>
+                <a:latin typeface="Hiragino Sans GB"/>
+                <a:ea typeface="Hiragino Sans GB"/>
+                <a:cs typeface="Hiragino Sans GB"/>
+                <a:sym typeface="Hiragino Sans GB"/>
               </a:rPr>
               <a:t>多形态 Agent</a:t>
             </a:r>
@@ -35012,10 +35000,10 @@
                 <a:solidFill>
                   <a:srgbClr val="64748B"/>
                 </a:solidFill>
-                <a:latin typeface="Noto Sans SC"/>
-                <a:ea typeface="Noto Sans SC"/>
-                <a:cs typeface="Noto Sans SC"/>
-                <a:sym typeface="Noto Sans SC"/>
+                <a:latin typeface="Hiragino Sans GB"/>
+                <a:ea typeface="Hiragino Sans GB"/>
+                <a:cs typeface="Hiragino Sans GB"/>
+                <a:sym typeface="Hiragino Sans GB"/>
               </a:rPr>
               <a:t>浏览器 Agent、代码 Agent、子智能体（桌面端），执行形态丰富</a:t>
             </a:r>
@@ -35103,10 +35091,10 @@
                 <a:solidFill>
                   <a:srgbClr val="0F172A"/>
                 </a:solidFill>
-                <a:latin typeface="Noto Sans SC"/>
-                <a:ea typeface="Noto Sans SC"/>
-                <a:cs typeface="Noto Sans SC"/>
-                <a:sym typeface="Noto Sans SC"/>
+                <a:latin typeface="Hiragino Sans GB"/>
+                <a:ea typeface="Hiragino Sans GB"/>
+                <a:cs typeface="Hiragino Sans GB"/>
+                <a:sym typeface="Hiragino Sans GB"/>
               </a:rPr>
               <a:t>SkillHub 生态</a:t>
             </a:r>
@@ -35152,10 +35140,10 @@
                 <a:solidFill>
                   <a:srgbClr val="64748B"/>
                 </a:solidFill>
-                <a:latin typeface="Noto Sans SC"/>
-                <a:ea typeface="Noto Sans SC"/>
-                <a:cs typeface="Noto Sans SC"/>
-                <a:sym typeface="Noto Sans SC"/>
+                <a:latin typeface="Hiragino Sans GB"/>
+                <a:ea typeface="Hiragino Sans GB"/>
+                <a:cs typeface="Hiragino Sans GB"/>
+                <a:sym typeface="Hiragino Sans GB"/>
               </a:rPr>
               <a:t>企业知识研究、引用证据、Skill 市场 + ZIP 安装，知识闭环与分发成型</a:t>
             </a:r>
@@ -35243,10 +35231,10 @@
                 <a:solidFill>
                   <a:srgbClr val="0D9488"/>
                 </a:solidFill>
-                <a:latin typeface="Noto Sans SC"/>
-                <a:ea typeface="Noto Sans SC"/>
-                <a:cs typeface="Noto Sans SC"/>
-                <a:sym typeface="Noto Sans SC"/>
+                <a:latin typeface="Hiragino Sans GB"/>
+                <a:ea typeface="Hiragino Sans GB"/>
+                <a:cs typeface="Hiragino Sans GB"/>
+                <a:sym typeface="Hiragino Sans GB"/>
               </a:rPr>
               <a:t>结论</a:t>
             </a:r>
@@ -35292,10 +35280,10 @@
                 <a:solidFill>
                   <a:srgbClr val="334155"/>
                 </a:solidFill>
-                <a:latin typeface="Noto Sans SC"/>
-                <a:ea typeface="Noto Sans SC"/>
-                <a:cs typeface="Noto Sans SC"/>
-                <a:sym typeface="Noto Sans SC"/>
+                <a:latin typeface="Hiragino Sans GB"/>
+                <a:ea typeface="Hiragino Sans GB"/>
+                <a:cs typeface="Hiragino Sans GB"/>
+                <a:sym typeface="Hiragino Sans GB"/>
               </a:rPr>
               <a:t>这五块是后续补强的"不重复造轮子"边界，所有新增能力只做加法、不推倒重来。</a:t>
             </a:r>
@@ -35341,12 +35329,12 @@
                 <a:solidFill>
                   <a:srgbClr val="94A3B8"/>
                 </a:solidFill>
-                <a:latin typeface="Noto Sans SC"/>
-                <a:ea typeface="Noto Sans SC"/>
-                <a:cs typeface="Noto Sans SC"/>
-                <a:sym typeface="Noto Sans SC"/>
+                <a:latin typeface="Hiragino Sans GB"/>
+                <a:ea typeface="Hiragino Sans GB"/>
+                <a:cs typeface="Hiragino Sans GB"/>
+                <a:sym typeface="Hiragino Sans GB"/>
               </a:rPr>
-              <a:t>MOGONG · 企业级智能体平台</a:t>
+              <a:t>墨攻 · 企业级智能体平台</a:t>
             </a:r>
             <a:endParaRPr lang="en-US" sz="1100"/>
           </a:p>
@@ -35388,10 +35376,10 @@
                 <a:solidFill>
                   <a:srgbClr val="94A3B8"/>
                 </a:solidFill>
-                <a:latin typeface="Noto Sans SC"/>
-                <a:ea typeface="Noto Sans SC"/>
-                <a:cs typeface="Noto Sans SC"/>
-                <a:sym typeface="Noto Sans SC"/>
+                <a:latin typeface="Hiragino Sans GB"/>
+                <a:ea typeface="Hiragino Sans GB"/>
+                <a:cs typeface="Hiragino Sans GB"/>
+                <a:sym typeface="Hiragino Sans GB"/>
               </a:rPr>
               <a:t>'4 / 16'</a:t>
             </a:r>
@@ -35509,10 +35497,10 @@
                 <a:solidFill>
                   <a:srgbClr val="0D9488"/>
                 </a:solidFill>
-                <a:latin typeface="Noto Sans SC"/>
-                <a:ea typeface="Noto Sans SC"/>
-                <a:cs typeface="Noto Sans SC"/>
-                <a:sym typeface="Noto Sans SC"/>
+                <a:latin typeface="Hiragino Sans GB"/>
+                <a:ea typeface="Hiragino Sans GB"/>
+                <a:cs typeface="Hiragino Sans GB"/>
+                <a:sym typeface="Hiragino Sans GB"/>
               </a:rPr>
               <a:t>03 · GAP — 六大缺口</a:t>
             </a:r>
@@ -35558,10 +35546,10 @@
                 <a:solidFill>
                   <a:srgbClr val="0F172A"/>
                 </a:solidFill>
-                <a:latin typeface="Noto Sans SC"/>
-                <a:ea typeface="Noto Sans SC"/>
-                <a:cs typeface="Noto Sans SC"/>
-                <a:sym typeface="Noto Sans SC"/>
+                <a:latin typeface="Hiragino Sans GB"/>
+                <a:ea typeface="Hiragino Sans GB"/>
+                <a:cs typeface="Hiragino Sans GB"/>
+                <a:sym typeface="Hiragino Sans GB"/>
               </a:rPr>
               <a:t>缺口分级：P0 合规刚需 → P1 可靠协作 → P2 生态自进化</a:t>
             </a:r>
@@ -35677,10 +35665,10 @@
                 <a:solidFill>
                   <a:srgbClr val="FFFFFF"/>
                 </a:solidFill>
-                <a:latin typeface="Noto Sans SC"/>
-                <a:ea typeface="Noto Sans SC"/>
-                <a:cs typeface="Noto Sans SC"/>
-                <a:sym typeface="Noto Sans SC"/>
+                <a:latin typeface="Hiragino Sans GB"/>
+                <a:ea typeface="Hiragino Sans GB"/>
+                <a:cs typeface="Hiragino Sans GB"/>
+                <a:sym typeface="Hiragino Sans GB"/>
               </a:rPr>
               <a:t>P0</a:t>
             </a:r>
@@ -35726,10 +35714,10 @@
                 <a:solidFill>
                   <a:srgbClr val="FFFFFF"/>
                 </a:solidFill>
-                <a:latin typeface="Noto Sans SC"/>
-                <a:ea typeface="Noto Sans SC"/>
-                <a:cs typeface="Noto Sans SC"/>
-                <a:sym typeface="Noto Sans SC"/>
+                <a:latin typeface="Hiragino Sans GB"/>
+                <a:ea typeface="Hiragino Sans GB"/>
+                <a:cs typeface="Hiragino Sans GB"/>
+                <a:sym typeface="Hiragino Sans GB"/>
               </a:rPr>
               <a:t>企业入场券</a:t>
             </a:r>
@@ -35813,10 +35801,10 @@
                 <a:solidFill>
                   <a:srgbClr val="FFFFFF"/>
                 </a:solidFill>
-                <a:latin typeface="Noto Sans SC"/>
-                <a:ea typeface="Noto Sans SC"/>
-                <a:cs typeface="Noto Sans SC"/>
-                <a:sym typeface="Noto Sans SC"/>
+                <a:latin typeface="Hiragino Sans GB"/>
+                <a:ea typeface="Hiragino Sans GB"/>
+                <a:cs typeface="Hiragino Sans GB"/>
+                <a:sym typeface="Hiragino Sans GB"/>
               </a:rPr>
               <a:t>P1</a:t>
             </a:r>
@@ -35862,10 +35850,10 @@
                 <a:solidFill>
                   <a:srgbClr val="FFFFFF"/>
                 </a:solidFill>
-                <a:latin typeface="Noto Sans SC"/>
-                <a:ea typeface="Noto Sans SC"/>
-                <a:cs typeface="Noto Sans SC"/>
-                <a:sym typeface="Noto Sans SC"/>
+                <a:latin typeface="Hiragino Sans GB"/>
+                <a:ea typeface="Hiragino Sans GB"/>
+                <a:cs typeface="Hiragino Sans GB"/>
+                <a:sym typeface="Hiragino Sans GB"/>
               </a:rPr>
               <a:t>可靠性与协作</a:t>
             </a:r>
@@ -35949,10 +35937,10 @@
                 <a:solidFill>
                   <a:srgbClr val="FFFFFF"/>
                 </a:solidFill>
-                <a:latin typeface="Noto Sans SC"/>
-                <a:ea typeface="Noto Sans SC"/>
-                <a:cs typeface="Noto Sans SC"/>
-                <a:sym typeface="Noto Sans SC"/>
+                <a:latin typeface="Hiragino Sans GB"/>
+                <a:ea typeface="Hiragino Sans GB"/>
+                <a:cs typeface="Hiragino Sans GB"/>
+                <a:sym typeface="Hiragino Sans GB"/>
               </a:rPr>
               <a:t>P2</a:t>
             </a:r>
@@ -35998,10 +35986,10 @@
                 <a:solidFill>
                   <a:srgbClr val="FFFFFF"/>
                 </a:solidFill>
-                <a:latin typeface="Noto Sans SC"/>
-                <a:ea typeface="Noto Sans SC"/>
-                <a:cs typeface="Noto Sans SC"/>
-                <a:sym typeface="Noto Sans SC"/>
+                <a:latin typeface="Hiragino Sans GB"/>
+                <a:ea typeface="Hiragino Sans GB"/>
+                <a:cs typeface="Hiragino Sans GB"/>
+                <a:sym typeface="Hiragino Sans GB"/>
               </a:rPr>
               <a:t>自进化与生态</a:t>
             </a:r>
@@ -36089,10 +36077,10 @@
                 <a:solidFill>
                   <a:srgbClr val="0F172A"/>
                 </a:solidFill>
-                <a:latin typeface="Noto Sans SC"/>
-                <a:ea typeface="Noto Sans SC"/>
-                <a:cs typeface="Noto Sans SC"/>
-                <a:sym typeface="Noto Sans SC"/>
+                <a:latin typeface="Hiragino Sans GB"/>
+                <a:ea typeface="Hiragino Sans GB"/>
+                <a:cs typeface="Hiragino Sans GB"/>
+                <a:sym typeface="Hiragino Sans GB"/>
               </a:rPr>
               <a:t>治理与风控层</a:t>
             </a:r>
@@ -36138,10 +36126,10 @@
                 <a:solidFill>
                   <a:srgbClr val="64748B"/>
                 </a:solidFill>
-                <a:latin typeface="Noto Sans SC"/>
-                <a:ea typeface="Noto Sans SC"/>
-                <a:cs typeface="Noto Sans SC"/>
-                <a:sym typeface="Noto Sans SC"/>
+                <a:latin typeface="Hiragino Sans GB"/>
+                <a:ea typeface="Hiragino Sans GB"/>
+                <a:cs typeface="Hiragino Sans GB"/>
+                <a:sym typeface="Hiragino Sans GB"/>
               </a:rPr>
               <a:t>六层门禁 · 风险分级 · RBAC 码 · 脱敏</a:t>
             </a:r>
@@ -36229,10 +36217,10 @@
                 <a:solidFill>
                   <a:srgbClr val="0F172A"/>
                 </a:solidFill>
-                <a:latin typeface="Noto Sans SC"/>
-                <a:ea typeface="Noto Sans SC"/>
-                <a:cs typeface="Noto Sans SC"/>
-                <a:sym typeface="Noto Sans SC"/>
+                <a:latin typeface="Hiragino Sans GB"/>
+                <a:ea typeface="Hiragino Sans GB"/>
+                <a:cs typeface="Hiragino Sans GB"/>
+                <a:sym typeface="Hiragino Sans GB"/>
               </a:rPr>
               <a:t>LLM 网关韧性</a:t>
             </a:r>
@@ -36278,10 +36266,10 @@
                 <a:solidFill>
                   <a:srgbClr val="64748B"/>
                 </a:solidFill>
-                <a:latin typeface="Noto Sans SC"/>
-                <a:ea typeface="Noto Sans SC"/>
-                <a:cs typeface="Noto Sans SC"/>
-                <a:sym typeface="Noto Sans SC"/>
+                <a:latin typeface="Hiragino Sans GB"/>
+                <a:ea typeface="Hiragino Sans GB"/>
+                <a:cs typeface="Hiragino Sans GB"/>
+                <a:sym typeface="Hiragino Sans GB"/>
               </a:rPr>
               <a:t>故障转移 · 降级链 · 退避重试 · 计量</a:t>
             </a:r>
@@ -36369,10 +36357,10 @@
                 <a:solidFill>
                   <a:srgbClr val="0F172A"/>
                 </a:solidFill>
-                <a:latin typeface="Noto Sans SC"/>
-                <a:ea typeface="Noto Sans SC"/>
-                <a:cs typeface="Noto Sans SC"/>
-                <a:sym typeface="Noto Sans SC"/>
+                <a:latin typeface="Hiragino Sans GB"/>
+                <a:ea typeface="Hiragino Sans GB"/>
+                <a:cs typeface="Hiragino Sans GB"/>
+                <a:sym typeface="Hiragino Sans GB"/>
               </a:rPr>
               <a:t>运营驾驶舱</a:t>
             </a:r>
@@ -36418,10 +36406,10 @@
                 <a:solidFill>
                   <a:srgbClr val="64748B"/>
                 </a:solidFill>
-                <a:latin typeface="Noto Sans SC"/>
-                <a:ea typeface="Noto Sans SC"/>
-                <a:cs typeface="Noto Sans SC"/>
-                <a:sym typeface="Noto Sans SC"/>
+                <a:latin typeface="Hiragino Sans GB"/>
+                <a:ea typeface="Hiragino Sans GB"/>
+                <a:cs typeface="Hiragino Sans GB"/>
+                <a:sym typeface="Hiragino Sans GB"/>
               </a:rPr>
               <a:t>成本 / 使用 / 质量 / 趋势 四维看板</a:t>
             </a:r>
@@ -36509,10 +36497,10 @@
                 <a:solidFill>
                   <a:srgbClr val="0F172A"/>
                 </a:solidFill>
-                <a:latin typeface="Noto Sans SC"/>
-                <a:ea typeface="Noto Sans SC"/>
-                <a:cs typeface="Noto Sans SC"/>
-                <a:sym typeface="Noto Sans SC"/>
+                <a:latin typeface="Hiragino Sans GB"/>
+                <a:ea typeface="Hiragino Sans GB"/>
+                <a:cs typeface="Hiragino Sans GB"/>
+                <a:sym typeface="Hiragino Sans GB"/>
               </a:rPr>
               <a:t>Hooks 拦截机制</a:t>
             </a:r>
@@ -36558,10 +36546,10 @@
                 <a:solidFill>
                   <a:srgbClr val="64748B"/>
                 </a:solidFill>
-                <a:latin typeface="Noto Sans SC"/>
-                <a:ea typeface="Noto Sans SC"/>
-                <a:cs typeface="Noto Sans SC"/>
-                <a:sym typeface="Noto Sans SC"/>
+                <a:latin typeface="Hiragino Sans GB"/>
+                <a:ea typeface="Hiragino Sans GB"/>
+                <a:cs typeface="Hiragino Sans GB"/>
+                <a:sym typeface="Hiragino Sans GB"/>
               </a:rPr>
               <a:t>五事件钩子 · 声明式规则 · fail-closed</a:t>
             </a:r>
@@ -36649,10 +36637,10 @@
                 <a:solidFill>
                   <a:srgbClr val="0F172A"/>
                 </a:solidFill>
-                <a:latin typeface="Noto Sans SC"/>
-                <a:ea typeface="Noto Sans SC"/>
-                <a:cs typeface="Noto Sans SC"/>
-                <a:sym typeface="Noto Sans SC"/>
+                <a:latin typeface="Hiragino Sans GB"/>
+                <a:ea typeface="Hiragino Sans GB"/>
+                <a:cs typeface="Hiragino Sans GB"/>
+                <a:sym typeface="Hiragino Sans GB"/>
               </a:rPr>
               <a:t>DAG 通用编排</a:t>
             </a:r>
@@ -36698,10 +36686,10 @@
                 <a:solidFill>
                   <a:srgbClr val="64748B"/>
                 </a:solidFill>
-                <a:latin typeface="Noto Sans SC"/>
-                <a:ea typeface="Noto Sans SC"/>
-                <a:cs typeface="Noto Sans SC"/>
-                <a:sym typeface="Noto Sans SC"/>
+                <a:latin typeface="Hiragino Sans GB"/>
+                <a:ea typeface="Hiragino Sans GB"/>
+                <a:cs typeface="Hiragino Sans GB"/>
+                <a:sym typeface="Hiragino Sans GB"/>
               </a:rPr>
               <a:t>四模式 · 拓扑排序 · 环检测 · 节点重试</a:t>
             </a:r>
@@ -36789,10 +36777,10 @@
                 <a:solidFill>
                   <a:srgbClr val="0F172A"/>
                 </a:solidFill>
-                <a:latin typeface="Noto Sans SC"/>
-                <a:ea typeface="Noto Sans SC"/>
-                <a:cs typeface="Noto Sans SC"/>
-                <a:sym typeface="Noto Sans SC"/>
+                <a:latin typeface="Hiragino Sans GB"/>
+                <a:ea typeface="Hiragino Sans GB"/>
+                <a:cs typeface="Hiragino Sans GB"/>
+                <a:sym typeface="Hiragino Sans GB"/>
               </a:rPr>
               <a:t>会话/工作流双版本化</a:t>
             </a:r>
@@ -36838,10 +36826,10 @@
                 <a:solidFill>
                   <a:srgbClr val="64748B"/>
                 </a:solidFill>
-                <a:latin typeface="Noto Sans SC"/>
-                <a:ea typeface="Noto Sans SC"/>
-                <a:cs typeface="Noto Sans SC"/>
-                <a:sym typeface="Noto Sans SC"/>
+                <a:latin typeface="Hiragino Sans GB"/>
+                <a:ea typeface="Hiragino Sans GB"/>
+                <a:cs typeface="Hiragino Sans GB"/>
+                <a:sym typeface="Hiragino Sans GB"/>
               </a:rPr>
               <a:t>commit / resume / share + GraphSpec 契约</a:t>
             </a:r>
@@ -36929,10 +36917,10 @@
                 <a:solidFill>
                   <a:srgbClr val="0F172A"/>
                 </a:solidFill>
-                <a:latin typeface="Noto Sans SC"/>
-                <a:ea typeface="Noto Sans SC"/>
-                <a:cs typeface="Noto Sans SC"/>
-                <a:sym typeface="Noto Sans SC"/>
+                <a:latin typeface="Hiragino Sans GB"/>
+                <a:ea typeface="Hiragino Sans GB"/>
+                <a:cs typeface="Hiragino Sans GB"/>
+                <a:sym typeface="Hiragino Sans GB"/>
               </a:rPr>
               <a:t>Dream 自进化</a:t>
             </a:r>
@@ -36978,10 +36966,10 @@
                 <a:solidFill>
                   <a:srgbClr val="64748B"/>
                 </a:solidFill>
-                <a:latin typeface="Noto Sans SC"/>
-                <a:ea typeface="Noto Sans SC"/>
-                <a:cs typeface="Noto Sans SC"/>
-                <a:sym typeface="Noto Sans SC"/>
+                <a:latin typeface="Hiragino Sans GB"/>
+                <a:ea typeface="Hiragino Sans GB"/>
+                <a:cs typeface="Hiragino Sans GB"/>
+                <a:sym typeface="Hiragino Sans GB"/>
               </a:rPr>
               <a:t>会话 → 经验 → Skill 闭环 · 自动淘汰</a:t>
             </a:r>
@@ -37069,10 +37057,10 @@
                 <a:solidFill>
                   <a:srgbClr val="0F172A"/>
                 </a:solidFill>
-                <a:latin typeface="Noto Sans SC"/>
-                <a:ea typeface="Noto Sans SC"/>
-                <a:cs typeface="Noto Sans SC"/>
-                <a:sym typeface="Noto Sans SC"/>
+                <a:latin typeface="Hiragino Sans GB"/>
+                <a:ea typeface="Hiragino Sans GB"/>
+                <a:cs typeface="Hiragino Sans GB"/>
+                <a:sym typeface="Hiragino Sans GB"/>
               </a:rPr>
               <a:t>会话级与生态清单</a:t>
             </a:r>
@@ -37118,10 +37106,10 @@
                 <a:solidFill>
                   <a:srgbClr val="64748B"/>
                 </a:solidFill>
-                <a:latin typeface="Noto Sans SC"/>
-                <a:ea typeface="Noto Sans SC"/>
-                <a:cs typeface="Noto Sans SC"/>
-                <a:sym typeface="Noto Sans SC"/>
+                <a:latin typeface="Hiragino Sans GB"/>
+                <a:ea typeface="Hiragino Sans GB"/>
+                <a:cs typeface="Hiragino Sans GB"/>
+                <a:sym typeface="Hiragino Sans GB"/>
               </a:rPr>
               <a:t>秘密不上链 · A2A · 多 IM · 知识图谱</a:t>
             </a:r>
@@ -37209,10 +37197,10 @@
                 <a:solidFill>
                   <a:srgbClr val="0F172A"/>
                 </a:solidFill>
-                <a:latin typeface="Noto Sans SC"/>
-                <a:ea typeface="Noto Sans SC"/>
-                <a:cs typeface="Noto Sans SC"/>
-                <a:sym typeface="Noto Sans SC"/>
+                <a:latin typeface="Hiragino Sans GB"/>
+                <a:ea typeface="Hiragino Sans GB"/>
+                <a:cs typeface="Hiragino Sans GB"/>
+                <a:sym typeface="Hiragino Sans GB"/>
               </a:rPr>
               <a:t>Skill 市场强化</a:t>
             </a:r>
@@ -37258,10 +37246,10 @@
                 <a:solidFill>
                   <a:srgbClr val="64748B"/>
                 </a:solidFill>
-                <a:latin typeface="Noto Sans SC"/>
-                <a:ea typeface="Noto Sans SC"/>
-                <a:cs typeface="Noto Sans SC"/>
-                <a:sym typeface="Noto Sans SC"/>
+                <a:latin typeface="Hiragino Sans GB"/>
+                <a:ea typeface="Hiragino Sans GB"/>
+                <a:cs typeface="Hiragino Sans GB"/>
+                <a:sym typeface="Hiragino Sans GB"/>
               </a:rPr>
               <a:t>三范围 Memory · 能力资产化 · 厚/薄 Harness</a:t>
             </a:r>
@@ -37307,12 +37295,12 @@
                 <a:solidFill>
                   <a:srgbClr val="64748B"/>
                 </a:solidFill>
-                <a:latin typeface="Noto Sans SC"/>
-                <a:ea typeface="Noto Sans SC"/>
-                <a:cs typeface="Noto Sans SC"/>
-                <a:sym typeface="Noto Sans SC"/>
+                <a:latin typeface="Hiragino Sans GB"/>
+                <a:ea typeface="Hiragino Sans GB"/>
+                <a:cs typeface="Hiragino Sans GB"/>
+                <a:sym typeface="Hiragino Sans GB"/>
               </a:rPr>
-              <a:t>最新进展：P0/P1/P2 共 15 项已按 SDD 全流程落地——库代码 + 单测全绿、生产接线（007/009/002/T999/001）与 UI 触点全部闭合，19 份 spec/plan 资产归档（详见后页）。</a:t>
+              <a:t>最新进展：15 项 + 020 已按 SDD 落地，库代码 + 单测全绿，接线与 UI 触点闭合；specs/ 20 个特性（16 份 tasks.md / 332 项）已归档。</a:t>
             </a:r>
             <a:endParaRPr lang="en-US" sz="1100"/>
           </a:p>
@@ -37356,12 +37344,12 @@
                 <a:solidFill>
                   <a:srgbClr val="94A3B8"/>
                 </a:solidFill>
-                <a:latin typeface="Noto Sans SC"/>
-                <a:ea typeface="Noto Sans SC"/>
-                <a:cs typeface="Noto Sans SC"/>
-                <a:sym typeface="Noto Sans SC"/>
+                <a:latin typeface="Hiragino Sans GB"/>
+                <a:ea typeface="Hiragino Sans GB"/>
+                <a:cs typeface="Hiragino Sans GB"/>
+                <a:sym typeface="Hiragino Sans GB"/>
               </a:rPr>
-              <a:t>MOGONG · 企业级智能体平台</a:t>
+              <a:t>墨攻 · 企业级智能体平台</a:t>
             </a:r>
             <a:endParaRPr lang="en-US" sz="1100"/>
           </a:p>
@@ -37403,10 +37391,10 @@
                 <a:solidFill>
                   <a:srgbClr val="94A3B8"/>
                 </a:solidFill>
-                <a:latin typeface="Noto Sans SC"/>
-                <a:ea typeface="Noto Sans SC"/>
-                <a:cs typeface="Noto Sans SC"/>
-                <a:sym typeface="Noto Sans SC"/>
+                <a:latin typeface="Hiragino Sans GB"/>
+                <a:ea typeface="Hiragino Sans GB"/>
+                <a:cs typeface="Hiragino Sans GB"/>
+                <a:sym typeface="Hiragino Sans GB"/>
               </a:rPr>
               <a:t>'5 / 16'</a:t>
             </a:r>
@@ -37524,10 +37512,10 @@
                 <a:solidFill>
                   <a:srgbClr val="0D9488"/>
                 </a:solidFill>
-                <a:latin typeface="Noto Sans SC"/>
-                <a:ea typeface="Noto Sans SC"/>
-                <a:cs typeface="Noto Sans SC"/>
-                <a:sym typeface="Noto Sans SC"/>
+                <a:latin typeface="Hiragino Sans GB"/>
+                <a:ea typeface="Hiragino Sans GB"/>
+                <a:cs typeface="Hiragino Sans GB"/>
+                <a:sym typeface="Hiragino Sans GB"/>
               </a:rPr>
               <a:t>04 · P0 — 治理与风控层</a:t>
             </a:r>
@@ -37573,10 +37561,10 @@
                 <a:solidFill>
                   <a:srgbClr val="0F172A"/>
                 </a:solidFill>
-                <a:latin typeface="Noto Sans SC"/>
-                <a:ea typeface="Noto Sans SC"/>
-                <a:cs typeface="Noto Sans SC"/>
-                <a:sym typeface="Noto Sans SC"/>
+                <a:latin typeface="Hiragino Sans GB"/>
+                <a:ea typeface="Hiragino Sans GB"/>
+                <a:cs typeface="Hiragino Sans GB"/>
+                <a:sym typeface="Hiragino Sans GB"/>
               </a:rPr>
               <a:t>六层串行门禁 + 风险矩阵 + 权限码 + 脱敏</a:t>
             </a:r>
@@ -37654,10 +37642,10 @@
                 <a:solidFill>
                   <a:srgbClr val="334155"/>
                 </a:solidFill>
-                <a:latin typeface="Noto Sans SC"/>
-                <a:ea typeface="Noto Sans SC"/>
-                <a:cs typeface="Noto Sans SC"/>
-                <a:sym typeface="Noto Sans SC"/>
+                <a:latin typeface="Hiragino Sans GB"/>
+                <a:ea typeface="Hiragino Sans GB"/>
+                <a:cs typeface="Hiragino Sans GB"/>
+                <a:sym typeface="Hiragino Sans GB"/>
               </a:rPr>
               <a:t>Gatekeeper 六层串行门禁（R4 红线不可覆盖）</a:t>
             </a:r>
@@ -37741,10 +37729,10 @@
                 <a:solidFill>
                   <a:srgbClr val="FFFFFF"/>
                 </a:solidFill>
-                <a:latin typeface="Noto Sans SC"/>
-                <a:ea typeface="Noto Sans SC"/>
-                <a:cs typeface="Noto Sans SC"/>
-                <a:sym typeface="Noto Sans SC"/>
+                <a:latin typeface="Hiragino Sans GB"/>
+                <a:ea typeface="Hiragino Sans GB"/>
+                <a:cs typeface="Hiragino Sans GB"/>
+                <a:sym typeface="Hiragino Sans GB"/>
               </a:rPr>
               <a:t>身份</a:t>
             </a:r>
@@ -37790,10 +37778,10 @@
                 <a:solidFill>
                   <a:srgbClr val="94A3B8"/>
                 </a:solidFill>
-                <a:latin typeface="Noto Sans SC"/>
-                <a:ea typeface="Noto Sans SC"/>
-                <a:cs typeface="Noto Sans SC"/>
-                <a:sym typeface="Noto Sans SC"/>
+                <a:latin typeface="Hiragino Sans GB"/>
+                <a:ea typeface="Hiragino Sans GB"/>
+                <a:cs typeface="Hiragino Sans GB"/>
+                <a:sym typeface="Hiragino Sans GB"/>
               </a:rPr>
               <a:t>▸</a:t>
             </a:r>
@@ -37881,10 +37869,10 @@
                 <a:solidFill>
                   <a:srgbClr val="0F172A"/>
                 </a:solidFill>
-                <a:latin typeface="Noto Sans SC"/>
-                <a:ea typeface="Noto Sans SC"/>
-                <a:cs typeface="Noto Sans SC"/>
-                <a:sym typeface="Noto Sans SC"/>
+                <a:latin typeface="Hiragino Sans GB"/>
+                <a:ea typeface="Hiragino Sans GB"/>
+                <a:cs typeface="Hiragino Sans GB"/>
+                <a:sym typeface="Hiragino Sans GB"/>
               </a:rPr>
               <a:t>RBAC</a:t>
             </a:r>
@@ -37930,10 +37918,10 @@
                 <a:solidFill>
                   <a:srgbClr val="94A3B8"/>
                 </a:solidFill>
-                <a:latin typeface="Noto Sans SC"/>
-                <a:ea typeface="Noto Sans SC"/>
-                <a:cs typeface="Noto Sans SC"/>
-                <a:sym typeface="Noto Sans SC"/>
+                <a:latin typeface="Hiragino Sans GB"/>
+                <a:ea typeface="Hiragino Sans GB"/>
+                <a:cs typeface="Hiragino Sans GB"/>
+                <a:sym typeface="Hiragino Sans GB"/>
               </a:rPr>
               <a:t>▸</a:t>
             </a:r>
@@ -38021,10 +38009,10 @@
                 <a:solidFill>
                   <a:srgbClr val="0F172A"/>
                 </a:solidFill>
-                <a:latin typeface="Noto Sans SC"/>
-                <a:ea typeface="Noto Sans SC"/>
-                <a:cs typeface="Noto Sans SC"/>
-                <a:sym typeface="Noto Sans SC"/>
+                <a:latin typeface="Hiragino Sans GB"/>
+                <a:ea typeface="Hiragino Sans GB"/>
+                <a:cs typeface="Hiragino Sans GB"/>
+                <a:sym typeface="Hiragino Sans GB"/>
               </a:rPr>
               <a:t>脱敏</a:t>
             </a:r>
@@ -38070,10 +38058,10 @@
                 <a:solidFill>
                   <a:srgbClr val="94A3B8"/>
                 </a:solidFill>
-                <a:latin typeface="Noto Sans SC"/>
-                <a:ea typeface="Noto Sans SC"/>
-                <a:cs typeface="Noto Sans SC"/>
-                <a:sym typeface="Noto Sans SC"/>
+                <a:latin typeface="Hiragino Sans GB"/>
+                <a:ea typeface="Hiragino Sans GB"/>
+                <a:cs typeface="Hiragino Sans GB"/>
+                <a:sym typeface="Hiragino Sans GB"/>
               </a:rPr>
               <a:t>▸</a:t>
             </a:r>
@@ -38161,10 +38149,10 @@
                 <a:solidFill>
                   <a:srgbClr val="0F172A"/>
                 </a:solidFill>
-                <a:latin typeface="Noto Sans SC"/>
-                <a:ea typeface="Noto Sans SC"/>
-                <a:cs typeface="Noto Sans SC"/>
-                <a:sym typeface="Noto Sans SC"/>
+                <a:latin typeface="Hiragino Sans GB"/>
+                <a:ea typeface="Hiragino Sans GB"/>
+                <a:cs typeface="Hiragino Sans GB"/>
+                <a:sym typeface="Hiragino Sans GB"/>
               </a:rPr>
               <a:t>审批</a:t>
             </a:r>
@@ -38210,10 +38198,10 @@
                 <a:solidFill>
                   <a:srgbClr val="94A3B8"/>
                 </a:solidFill>
-                <a:latin typeface="Noto Sans SC"/>
-                <a:ea typeface="Noto Sans SC"/>
-                <a:cs typeface="Noto Sans SC"/>
-                <a:sym typeface="Noto Sans SC"/>
+                <a:latin typeface="Hiragino Sans GB"/>
+                <a:ea typeface="Hiragino Sans GB"/>
+                <a:cs typeface="Hiragino Sans GB"/>
+                <a:sym typeface="Hiragino Sans GB"/>
               </a:rPr>
               <a:t>▸</a:t>
             </a:r>
@@ -38301,10 +38289,10 @@
                 <a:solidFill>
                   <a:srgbClr val="0D9488"/>
                 </a:solidFill>
-                <a:latin typeface="Noto Sans SC"/>
-                <a:ea typeface="Noto Sans SC"/>
-                <a:cs typeface="Noto Sans SC"/>
-                <a:sym typeface="Noto Sans SC"/>
+                <a:latin typeface="Hiragino Sans GB"/>
+                <a:ea typeface="Hiragino Sans GB"/>
+                <a:cs typeface="Hiragino Sans GB"/>
+                <a:sym typeface="Hiragino Sans GB"/>
               </a:rPr>
               <a:t>配额</a:t>
             </a:r>
@@ -38350,10 +38338,10 @@
                 <a:solidFill>
                   <a:srgbClr val="94A3B8"/>
                 </a:solidFill>
-                <a:latin typeface="Noto Sans SC"/>
-                <a:ea typeface="Noto Sans SC"/>
-                <a:cs typeface="Noto Sans SC"/>
-                <a:sym typeface="Noto Sans SC"/>
+                <a:latin typeface="Hiragino Sans GB"/>
+                <a:ea typeface="Hiragino Sans GB"/>
+                <a:cs typeface="Hiragino Sans GB"/>
+                <a:sym typeface="Hiragino Sans GB"/>
               </a:rPr>
               <a:t>▸</a:t>
             </a:r>
@@ -38441,10 +38429,10 @@
                 <a:solidFill>
                   <a:srgbClr val="0D9488"/>
                 </a:solidFill>
-                <a:latin typeface="Noto Sans SC"/>
-                <a:ea typeface="Noto Sans SC"/>
-                <a:cs typeface="Noto Sans SC"/>
-                <a:sym typeface="Noto Sans SC"/>
+                <a:latin typeface="Hiragino Sans GB"/>
+                <a:ea typeface="Hiragino Sans GB"/>
+                <a:cs typeface="Hiragino Sans GB"/>
+                <a:sym typeface="Hiragino Sans GB"/>
               </a:rPr>
               <a:t>审计</a:t>
             </a:r>
@@ -38532,10 +38520,10 @@
                 <a:solidFill>
                   <a:srgbClr val="0F172A"/>
                 </a:solidFill>
-                <a:latin typeface="Noto Sans SC"/>
-                <a:ea typeface="Noto Sans SC"/>
-                <a:cs typeface="Noto Sans SC"/>
-                <a:sym typeface="Noto Sans SC"/>
+                <a:latin typeface="Hiragino Sans GB"/>
+                <a:ea typeface="Hiragino Sans GB"/>
+                <a:cs typeface="Hiragino Sans GB"/>
+                <a:sym typeface="Hiragino Sans GB"/>
               </a:rPr>
               <a:t>R0–R4 风险分级 × L1–L5 自主矩阵（25 格）</a:t>
             </a:r>
@@ -38581,10 +38569,10 @@
                 <a:solidFill>
                   <a:srgbClr val="64748B"/>
                 </a:solidFill>
-                <a:latin typeface="Noto Sans SC"/>
-                <a:ea typeface="Noto Sans SC"/>
-                <a:cs typeface="Noto Sans SC"/>
-                <a:sym typeface="Noto Sans SC"/>
+                <a:latin typeface="Hiragino Sans GB"/>
+                <a:ea typeface="Hiragino Sans GB"/>
+                <a:cs typeface="Hiragino Sans GB"/>
+                <a:sym typeface="Hiragino Sans GB"/>
               </a:rPr>
               <a:t>把"敏感工具审批"升级为系统化分级放权：按风险等级决定自主级别。</a:t>
             </a:r>
@@ -38672,10 +38660,10 @@
                 <a:solidFill>
                   <a:srgbClr val="0F172A"/>
                 </a:solidFill>
-                <a:latin typeface="Noto Sans SC"/>
-                <a:ea typeface="Noto Sans SC"/>
-                <a:cs typeface="Noto Sans SC"/>
-                <a:sym typeface="Noto Sans SC"/>
+                <a:latin typeface="Hiragino Sans GB"/>
+                <a:ea typeface="Hiragino Sans GB"/>
+                <a:cs typeface="Hiragino Sans GB"/>
+                <a:sym typeface="Hiragino Sans GB"/>
               </a:rPr>
               <a:t>RBAC 权限码 &lt;resource&gt;:&lt;action&gt;[:&lt;target&gt;]</a:t>
             </a:r>
@@ -38721,10 +38709,10 @@
                 <a:solidFill>
                   <a:srgbClr val="64748B"/>
                 </a:solidFill>
-                <a:latin typeface="Noto Sans SC"/>
-                <a:ea typeface="Noto Sans SC"/>
-                <a:cs typeface="Noto Sans SC"/>
-                <a:sym typeface="Noto Sans SC"/>
+                <a:latin typeface="Hiragino Sans GB"/>
+                <a:ea typeface="Hiragino Sans GB"/>
+                <a:cs typeface="Hiragino Sans GB"/>
+                <a:sym typeface="Hiragino Sans GB"/>
               </a:rPr>
               <a:t>三级隔离、fail-closed 默认拒绝，替代当前粗粒度的"岗位角色"。</a:t>
             </a:r>
@@ -38812,10 +38800,10 @@
                 <a:solidFill>
                   <a:srgbClr val="0F172A"/>
                 </a:solidFill>
-                <a:latin typeface="Noto Sans SC"/>
-                <a:ea typeface="Noto Sans SC"/>
-                <a:cs typeface="Noto Sans SC"/>
-                <a:sym typeface="Noto Sans SC"/>
+                <a:latin typeface="Hiragino Sans GB"/>
+                <a:ea typeface="Hiragino Sans GB"/>
+                <a:cs typeface="Hiragino Sans GB"/>
+                <a:sym typeface="Hiragino Sans GB"/>
               </a:rPr>
               <a:t>PII 脱敏层</a:t>
             </a:r>
@@ -38861,10 +38849,10 @@
                 <a:solidFill>
                   <a:srgbClr val="64748B"/>
                 </a:solidFill>
-                <a:latin typeface="Noto Sans SC"/>
-                <a:ea typeface="Noto Sans SC"/>
-                <a:cs typeface="Noto Sans SC"/>
-                <a:sym typeface="Noto Sans SC"/>
+                <a:latin typeface="Hiragino Sans GB"/>
+                <a:ea typeface="Hiragino Sans GB"/>
+                <a:cs typeface="Hiragino Sans GB"/>
+                <a:sym typeface="Hiragino Sans GB"/>
               </a:rPr>
               <a:t>私钥 / 身份证 / 银行卡 / 手机号 × mask / remove / hash / abstract 策略。</a:t>
             </a:r>
@@ -38952,10 +38940,10 @@
                 <a:solidFill>
                   <a:srgbClr val="0F172A"/>
                 </a:solidFill>
-                <a:latin typeface="Noto Sans SC"/>
-                <a:ea typeface="Noto Sans SC"/>
-                <a:cs typeface="Noto Sans SC"/>
-                <a:sym typeface="Noto Sans SC"/>
+                <a:latin typeface="Hiragino Sans GB"/>
+                <a:ea typeface="Hiragino Sans GB"/>
+                <a:cs typeface="Hiragino Sans GB"/>
+                <a:sym typeface="Hiragino Sans GB"/>
               </a:rPr>
               <a:t>会话保存/分享秘密过滤</a:t>
             </a:r>
@@ -39001,10 +38989,10 @@
                 <a:solidFill>
                   <a:srgbClr val="64748B"/>
                 </a:solidFill>
-                <a:latin typeface="Noto Sans SC"/>
-                <a:ea typeface="Noto Sans SC"/>
-                <a:cs typeface="Noto Sans SC"/>
-                <a:sym typeface="Noto Sans SC"/>
+                <a:latin typeface="Hiragino Sans GB"/>
+                <a:ea typeface="Hiragino Sans GB"/>
+                <a:cs typeface="Hiragino Sans GB"/>
+                <a:sym typeface="Hiragino Sans GB"/>
               </a:rPr>
               <a:t>发布时低熵秘密过滤、敏感内容换可逆占位符、clone 默认只读，与运行时拦截形成双保险。</a:t>
             </a:r>
@@ -39088,10 +39076,10 @@
                 <a:solidFill>
                   <a:srgbClr val="0D9488"/>
                 </a:solidFill>
-                <a:latin typeface="Noto Sans SC"/>
-                <a:ea typeface="Noto Sans SC"/>
-                <a:cs typeface="Noto Sans SC"/>
-                <a:sym typeface="Noto Sans SC"/>
+                <a:latin typeface="Hiragino Sans GB"/>
+                <a:ea typeface="Hiragino Sans GB"/>
+                <a:cs typeface="Hiragino Sans GB"/>
+                <a:sym typeface="Hiragino Sans GB"/>
               </a:rPr>
               <a:t>挂载点</a:t>
             </a:r>
@@ -39137,12 +39125,12 @@
                 <a:solidFill>
                   <a:srgbClr val="334155"/>
                 </a:solidFill>
-                <a:latin typeface="Noto Sans SC"/>
-                <a:ea typeface="Noto Sans SC"/>
-                <a:cs typeface="Noto Sans SC"/>
-                <a:sym typeface="Noto Sans SC"/>
+                <a:latin typeface="Hiragino Sans GB"/>
+                <a:ea typeface="Hiragino Sans GB"/>
+                <a:cs typeface="Hiragino Sans GB"/>
+                <a:sym typeface="Hiragino Sans GB"/>
               </a:rPr>
-              <a:t>复用 MOGONG 已有审批/配额/审计作门禁链挂载点，预留四类门禁可插拔接入，不推倒现有实现。</a:t>
+              <a:t>复用墨攻已有审批/配额/审计作门禁链挂载点，预留四类门禁可插拔接入，不推倒现有实现。</a:t>
             </a:r>
             <a:endParaRPr lang="en-US" sz="1100"/>
           </a:p>
@@ -39186,12 +39174,12 @@
                 <a:solidFill>
                   <a:srgbClr val="94A3B8"/>
                 </a:solidFill>
-                <a:latin typeface="Noto Sans SC"/>
-                <a:ea typeface="Noto Sans SC"/>
-                <a:cs typeface="Noto Sans SC"/>
-                <a:sym typeface="Noto Sans SC"/>
+                <a:latin typeface="Hiragino Sans GB"/>
+                <a:ea typeface="Hiragino Sans GB"/>
+                <a:cs typeface="Hiragino Sans GB"/>
+                <a:sym typeface="Hiragino Sans GB"/>
               </a:rPr>
-              <a:t>MOGONG · 企业级智能体平台</a:t>
+              <a:t>墨攻 · 企业级智能体平台</a:t>
             </a:r>
             <a:endParaRPr lang="en-US" sz="1100"/>
           </a:p>
@@ -39233,10 +39221,10 @@
                 <a:solidFill>
                   <a:srgbClr val="94A3B8"/>
                 </a:solidFill>
-                <a:latin typeface="Noto Sans SC"/>
-                <a:ea typeface="Noto Sans SC"/>
-                <a:cs typeface="Noto Sans SC"/>
-                <a:sym typeface="Noto Sans SC"/>
+                <a:latin typeface="Hiragino Sans GB"/>
+                <a:ea typeface="Hiragino Sans GB"/>
+                <a:cs typeface="Hiragino Sans GB"/>
+                <a:sym typeface="Hiragino Sans GB"/>
               </a:rPr>
               <a:t>'6 / 16'</a:t>
             </a:r>
@@ -39354,10 +39342,10 @@
                 <a:solidFill>
                   <a:srgbClr val="0D9488"/>
                 </a:solidFill>
-                <a:latin typeface="Noto Sans SC"/>
-                <a:ea typeface="Noto Sans SC"/>
-                <a:cs typeface="Noto Sans SC"/>
-                <a:sym typeface="Noto Sans SC"/>
+                <a:latin typeface="Hiragino Sans GB"/>
+                <a:ea typeface="Hiragino Sans GB"/>
+                <a:cs typeface="Hiragino Sans GB"/>
+                <a:sym typeface="Hiragino Sans GB"/>
               </a:rPr>
               <a:t>04 · P0 — 生产可靠与可观测</a:t>
             </a:r>
@@ -39403,10 +39391,10 @@
                 <a:solidFill>
                   <a:srgbClr val="0F172A"/>
                 </a:solidFill>
-                <a:latin typeface="Noto Sans SC"/>
-                <a:ea typeface="Noto Sans SC"/>
-                <a:cs typeface="Noto Sans SC"/>
-                <a:sym typeface="Noto Sans SC"/>
+                <a:latin typeface="Hiragino Sans GB"/>
+                <a:ea typeface="Hiragino Sans GB"/>
+                <a:cs typeface="Hiragino Sans GB"/>
+                <a:sym typeface="Hiragino Sans GB"/>
               </a:rPr>
               <a:t>网关韧性避免单点中断，驾驶舱让运营可观测</a:t>
             </a:r>
@@ -39564,10 +39552,10 @@
                 <a:solidFill>
                   <a:srgbClr val="0F172A"/>
                 </a:solidFill>
-                <a:latin typeface="Noto Sans SC"/>
-                <a:ea typeface="Noto Sans SC"/>
-                <a:cs typeface="Noto Sans SC"/>
-                <a:sym typeface="Noto Sans SC"/>
+                <a:latin typeface="Hiragino Sans GB"/>
+                <a:ea typeface="Hiragino Sans GB"/>
+                <a:cs typeface="Hiragino Sans GB"/>
+                <a:sym typeface="Hiragino Sans GB"/>
               </a:rPr>
               <a:t>LLM 网关韧性</a:t>
             </a:r>
@@ -39613,10 +39601,10 @@
                 <a:solidFill>
                   <a:srgbClr val="64748B"/>
                 </a:solidFill>
-                <a:latin typeface="Noto Sans SC"/>
-                <a:ea typeface="Noto Sans SC"/>
-                <a:cs typeface="Noto Sans SC"/>
-                <a:sym typeface="Noto Sans SC"/>
+                <a:latin typeface="Hiragino Sans GB"/>
+                <a:ea typeface="Hiragino Sans GB"/>
+                <a:cs typeface="Hiragino Sans GB"/>
+                <a:sym typeface="Hiragino Sans GB"/>
               </a:rPr>
               <a:t>主→备供应商故障转移，避免 LLM 单点中断</a:t>
             </a:r>
@@ -39698,10 +39686,10 @@
                 <a:solidFill>
                   <a:srgbClr val="0D9488"/>
                 </a:solidFill>
-                <a:latin typeface="Noto Sans SC"/>
-                <a:ea typeface="Noto Sans SC"/>
-                <a:cs typeface="Noto Sans SC"/>
-                <a:sym typeface="Noto Sans SC"/>
+                <a:latin typeface="Hiragino Sans GB"/>
+                <a:ea typeface="Hiragino Sans GB"/>
+                <a:cs typeface="Hiragino Sans GB"/>
+                <a:sym typeface="Hiragino Sans GB"/>
               </a:rPr>
               <a:t>1</a:t>
             </a:r>
@@ -39747,10 +39735,10 @@
                 <a:solidFill>
                   <a:srgbClr val="0F172A"/>
                 </a:solidFill>
-                <a:latin typeface="Noto Sans SC"/>
-                <a:ea typeface="Noto Sans SC"/>
-                <a:cs typeface="Noto Sans SC"/>
-                <a:sym typeface="Noto Sans SC"/>
+                <a:latin typeface="Hiragino Sans GB"/>
+                <a:ea typeface="Hiragino Sans GB"/>
+                <a:cs typeface="Hiragino Sans GB"/>
+                <a:sym typeface="Hiragino Sans GB"/>
               </a:rPr>
               <a:t>主→备故障转移 failover</a:t>
             </a:r>
@@ -39796,10 +39784,10 @@
                 <a:solidFill>
                   <a:srgbClr val="64748B"/>
                 </a:solidFill>
-                <a:latin typeface="Noto Sans SC"/>
-                <a:ea typeface="Noto Sans SC"/>
-                <a:cs typeface="Noto Sans SC"/>
-                <a:sym typeface="Noto Sans SC"/>
+                <a:latin typeface="Hiragino Sans GB"/>
+                <a:ea typeface="Hiragino Sans GB"/>
+                <a:cs typeface="Hiragino Sans GB"/>
+                <a:sym typeface="Hiragino Sans GB"/>
               </a:rPr>
               <a:t>供应商自动切换，服务不中断</a:t>
             </a:r>
@@ -39881,10 +39869,10 @@
                 <a:solidFill>
                   <a:srgbClr val="0D9488"/>
                 </a:solidFill>
-                <a:latin typeface="Noto Sans SC"/>
-                <a:ea typeface="Noto Sans SC"/>
-                <a:cs typeface="Noto Sans SC"/>
-                <a:sym typeface="Noto Sans SC"/>
+                <a:latin typeface="Hiragino Sans GB"/>
+                <a:ea typeface="Hiragino Sans GB"/>
+                <a:cs typeface="Hiragino Sans GB"/>
+                <a:sym typeface="Hiragino Sans GB"/>
               </a:rPr>
               <a:t>2</a:t>
             </a:r>
@@ -39930,10 +39918,10 @@
                 <a:solidFill>
                   <a:srgbClr val="0F172A"/>
                 </a:solidFill>
-                <a:latin typeface="Noto Sans SC"/>
-                <a:ea typeface="Noto Sans SC"/>
-                <a:cs typeface="Noto Sans SC"/>
-                <a:sym typeface="Noto Sans SC"/>
+                <a:latin typeface="Hiragino Sans GB"/>
+                <a:ea typeface="Hiragino Sans GB"/>
+                <a:cs typeface="Hiragino Sans GB"/>
+                <a:sym typeface="Hiragino Sans GB"/>
               </a:rPr>
               <a:t>降级链 degradation_chain</a:t>
             </a:r>
@@ -39979,10 +39967,10 @@
                 <a:solidFill>
                   <a:srgbClr val="64748B"/>
                 </a:solidFill>
-                <a:latin typeface="Noto Sans SC"/>
-                <a:ea typeface="Noto Sans SC"/>
-                <a:cs typeface="Noto Sans SC"/>
-                <a:sym typeface="Noto Sans SC"/>
+                <a:latin typeface="Hiragino Sans GB"/>
+                <a:ea typeface="Hiragino Sans GB"/>
+                <a:cs typeface="Hiragino Sans GB"/>
+                <a:sym typeface="Hiragino Sans GB"/>
               </a:rPr>
               <a:t>主模型失败逐级降档</a:t>
             </a:r>
@@ -40064,10 +40052,10 @@
                 <a:solidFill>
                   <a:srgbClr val="0D9488"/>
                 </a:solidFill>
-                <a:latin typeface="Noto Sans SC"/>
-                <a:ea typeface="Noto Sans SC"/>
-                <a:cs typeface="Noto Sans SC"/>
-                <a:sym typeface="Noto Sans SC"/>
+                <a:latin typeface="Hiragino Sans GB"/>
+                <a:ea typeface="Hiragino Sans GB"/>
+                <a:cs typeface="Hiragino Sans GB"/>
+                <a:sym typeface="Hiragino Sans GB"/>
               </a:rPr>
               <a:t>3</a:t>
             </a:r>
@@ -40113,10 +40101,10 @@
                 <a:solidFill>
                   <a:srgbClr val="0F172A"/>
                 </a:solidFill>
-                <a:latin typeface="Noto Sans SC"/>
-                <a:ea typeface="Noto Sans SC"/>
-                <a:cs typeface="Noto Sans SC"/>
-                <a:sym typeface="Noto Sans SC"/>
+                <a:latin typeface="Hiragino Sans GB"/>
+                <a:ea typeface="Hiragino Sans GB"/>
+                <a:cs typeface="Hiragino Sans GB"/>
+                <a:sym typeface="Hiragino Sans GB"/>
               </a:rPr>
               <a:t>指数退避重试</a:t>
             </a:r>
@@ -40162,10 +40150,10 @@
                 <a:solidFill>
                   <a:srgbClr val="64748B"/>
                 </a:solidFill>
-                <a:latin typeface="Noto Sans SC"/>
-                <a:ea typeface="Noto Sans SC"/>
-                <a:cs typeface="Noto Sans SC"/>
-                <a:sym typeface="Noto Sans SC"/>
+                <a:latin typeface="Hiragino Sans GB"/>
+                <a:ea typeface="Hiragino Sans GB"/>
+                <a:cs typeface="Hiragino Sans GB"/>
+                <a:sym typeface="Hiragino Sans GB"/>
               </a:rPr>
               <a:t>瞬时故障自恢复，避免雪崩</a:t>
             </a:r>
@@ -40247,10 +40235,10 @@
                 <a:solidFill>
                   <a:srgbClr val="0D9488"/>
                 </a:solidFill>
-                <a:latin typeface="Noto Sans SC"/>
-                <a:ea typeface="Noto Sans SC"/>
-                <a:cs typeface="Noto Sans SC"/>
-                <a:sym typeface="Noto Sans SC"/>
+                <a:latin typeface="Hiragino Sans GB"/>
+                <a:ea typeface="Hiragino Sans GB"/>
+                <a:cs typeface="Hiragino Sans GB"/>
+                <a:sym typeface="Hiragino Sans GB"/>
               </a:rPr>
               <a:t>4</a:t>
             </a:r>
@@ -40296,10 +40284,10 @@
                 <a:solidFill>
                   <a:srgbClr val="0F172A"/>
                 </a:solidFill>
-                <a:latin typeface="Noto Sans SC"/>
-                <a:ea typeface="Noto Sans SC"/>
-                <a:cs typeface="Noto Sans SC"/>
-                <a:sym typeface="Noto Sans SC"/>
+                <a:latin typeface="Hiragino Sans GB"/>
+                <a:ea typeface="Hiragino Sans GB"/>
+                <a:cs typeface="Hiragino Sans GB"/>
+                <a:sym typeface="Hiragino Sans GB"/>
               </a:rPr>
               <a:t>用量 / 成本计量上报</a:t>
             </a:r>
@@ -40345,10 +40333,10 @@
                 <a:solidFill>
                   <a:srgbClr val="64748B"/>
                 </a:solidFill>
-                <a:latin typeface="Noto Sans SC"/>
-                <a:ea typeface="Noto Sans SC"/>
-                <a:cs typeface="Noto Sans SC"/>
-                <a:sym typeface="Noto Sans SC"/>
+                <a:latin typeface="Hiragino Sans GB"/>
+                <a:ea typeface="Hiragino Sans GB"/>
+                <a:cs typeface="Hiragino Sans GB"/>
+                <a:sym typeface="Hiragino Sans GB"/>
               </a:rPr>
               <a:t>按模型与部门归集，支撑账单与配额</a:t>
             </a:r>
@@ -40474,10 +40462,10 @@
                 <a:solidFill>
                   <a:srgbClr val="0F172A"/>
                 </a:solidFill>
-                <a:latin typeface="Noto Sans SC"/>
-                <a:ea typeface="Noto Sans SC"/>
-                <a:cs typeface="Noto Sans SC"/>
-                <a:sym typeface="Noto Sans SC"/>
+                <a:latin typeface="Hiragino Sans GB"/>
+                <a:ea typeface="Hiragino Sans GB"/>
+                <a:cs typeface="Hiragino Sans GB"/>
+                <a:sym typeface="Hiragino Sans GB"/>
               </a:rPr>
               <a:t>总览数据统计驾驶舱</a:t>
             </a:r>
@@ -40523,10 +40511,10 @@
                 <a:solidFill>
                   <a:srgbClr val="64748B"/>
                 </a:solidFill>
-                <a:latin typeface="Noto Sans SC"/>
-                <a:ea typeface="Noto Sans SC"/>
-                <a:cs typeface="Noto Sans SC"/>
-                <a:sym typeface="Noto Sans SC"/>
+                <a:latin typeface="Hiragino Sans GB"/>
+                <a:ea typeface="Hiragino Sans GB"/>
+                <a:cs typeface="Hiragino Sans GB"/>
+                <a:sym typeface="Hiragino Sans GB"/>
               </a:rPr>
               <a:t>管理后台扩展"运营驾驶舱"，复用已有运行数据</a:t>
             </a:r>
@@ -40572,10 +40560,10 @@
                 <a:solidFill>
                   <a:srgbClr val="64748B"/>
                 </a:solidFill>
-                <a:latin typeface="Noto Sans SC"/>
-                <a:ea typeface="Noto Sans SC"/>
-                <a:cs typeface="Noto Sans SC"/>
-                <a:sym typeface="Noto Sans SC"/>
+                <a:latin typeface="Hiragino Sans GB"/>
+                <a:ea typeface="Hiragino Sans GB"/>
+                <a:cs typeface="Hiragino Sans GB"/>
+                <a:sym typeface="Hiragino Sans GB"/>
               </a:rPr>
               <a:t>1</a:t>
             </a:r>
@@ -40621,10 +40609,10 @@
                 <a:solidFill>
                   <a:srgbClr val="0F172A"/>
                 </a:solidFill>
-                <a:latin typeface="Noto Sans SC"/>
-                <a:ea typeface="Noto Sans SC"/>
-                <a:cs typeface="Noto Sans SC"/>
-                <a:sym typeface="Noto Sans SC"/>
+                <a:latin typeface="Hiragino Sans GB"/>
+                <a:ea typeface="Hiragino Sans GB"/>
+                <a:cs typeface="Hiragino Sans GB"/>
+                <a:sym typeface="Hiragino Sans GB"/>
               </a:rPr>
               <a:t>成本</a:t>
             </a:r>
@@ -40670,10 +40658,10 @@
                 <a:solidFill>
                   <a:srgbClr val="64748B"/>
                 </a:solidFill>
-                <a:latin typeface="Noto Sans SC"/>
-                <a:ea typeface="Noto Sans SC"/>
-                <a:cs typeface="Noto Sans SC"/>
-                <a:sym typeface="Noto Sans SC"/>
+                <a:latin typeface="Hiragino Sans GB"/>
+                <a:ea typeface="Hiragino Sans GB"/>
+                <a:cs typeface="Hiragino Sans GB"/>
+                <a:sym typeface="Hiragino Sans GB"/>
               </a:rPr>
               <a:t>Token 总量 · 模型占比 · 部门/智能体分摊 · 预测</a:t>
             </a:r>
@@ -40719,10 +40707,10 @@
                 <a:solidFill>
                   <a:srgbClr val="64748B"/>
                 </a:solidFill>
-                <a:latin typeface="Noto Sans SC"/>
-                <a:ea typeface="Noto Sans SC"/>
-                <a:cs typeface="Noto Sans SC"/>
-                <a:sym typeface="Noto Sans SC"/>
+                <a:latin typeface="Hiragino Sans GB"/>
+                <a:ea typeface="Hiragino Sans GB"/>
+                <a:cs typeface="Hiragino Sans GB"/>
+                <a:sym typeface="Hiragino Sans GB"/>
               </a:rPr>
               <a:t>2</a:t>
             </a:r>
@@ -40768,10 +40756,10 @@
                 <a:solidFill>
                   <a:srgbClr val="0F172A"/>
                 </a:solidFill>
-                <a:latin typeface="Noto Sans SC"/>
-                <a:ea typeface="Noto Sans SC"/>
-                <a:cs typeface="Noto Sans SC"/>
-                <a:sym typeface="Noto Sans SC"/>
+                <a:latin typeface="Hiragino Sans GB"/>
+                <a:ea typeface="Hiragino Sans GB"/>
+                <a:cs typeface="Hiragino Sans GB"/>
+                <a:sym typeface="Hiragino Sans GB"/>
               </a:rPr>
               <a:t>使用</a:t>
             </a:r>
@@ -40817,10 +40805,10 @@
                 <a:solidFill>
                   <a:srgbClr val="64748B"/>
                 </a:solidFill>
-                <a:latin typeface="Noto Sans SC"/>
-                <a:ea typeface="Noto Sans SC"/>
-                <a:cs typeface="Noto Sans SC"/>
-                <a:sym typeface="Noto Sans SC"/>
+                <a:latin typeface="Hiragino Sans GB"/>
+                <a:ea typeface="Hiragino Sans GB"/>
+                <a:cs typeface="Hiragino Sans GB"/>
+                <a:sym typeface="Hiragino Sans GB"/>
               </a:rPr>
               <a:t>调用量 · 活跃用户 · Skill/检索频次</a:t>
             </a:r>
@@ -40866,10 +40854,10 @@
                 <a:solidFill>
                   <a:srgbClr val="64748B"/>
                 </a:solidFill>
-                <a:latin typeface="Noto Sans SC"/>
-                <a:ea typeface="Noto Sans SC"/>
-                <a:cs typeface="Noto Sans SC"/>
-                <a:sym typeface="Noto Sans SC"/>
+                <a:latin typeface="Hiragino Sans GB"/>
+                <a:ea typeface="Hiragino Sans GB"/>
+                <a:cs typeface="Hiragino Sans GB"/>
+                <a:sym typeface="Hiragino Sans GB"/>
               </a:rPr>
               <a:t>3</a:t>
             </a:r>
@@ -40915,10 +40903,10 @@
                 <a:solidFill>
                   <a:srgbClr val="0F172A"/>
                 </a:solidFill>
-                <a:latin typeface="Noto Sans SC"/>
-                <a:ea typeface="Noto Sans SC"/>
-                <a:cs typeface="Noto Sans SC"/>
-                <a:sym typeface="Noto Sans SC"/>
+                <a:latin typeface="Hiragino Sans GB"/>
+                <a:ea typeface="Hiragino Sans GB"/>
+                <a:cs typeface="Hiragino Sans GB"/>
+                <a:sym typeface="Hiragino Sans GB"/>
               </a:rPr>
               <a:t>质量</a:t>
             </a:r>
@@ -40964,10 +40952,10 @@
                 <a:solidFill>
                   <a:srgbClr val="64748B"/>
                 </a:solidFill>
-                <a:latin typeface="Noto Sans SC"/>
-                <a:ea typeface="Noto Sans SC"/>
-                <a:cs typeface="Noto Sans SC"/>
-                <a:sym typeface="Noto Sans SC"/>
+                <a:latin typeface="Hiragino Sans GB"/>
+                <a:ea typeface="Hiragino Sans GB"/>
+                <a:cs typeface="Hiragino Sans GB"/>
+                <a:sym typeface="Hiragino Sans GB"/>
               </a:rPr>
               <a:t>成功率 · 响应时长 · 异常率 · 人工介入率</a:t>
             </a:r>
@@ -41013,10 +41001,10 @@
                 <a:solidFill>
                   <a:srgbClr val="64748B"/>
                 </a:solidFill>
-                <a:latin typeface="Noto Sans SC"/>
-                <a:ea typeface="Noto Sans SC"/>
-                <a:cs typeface="Noto Sans SC"/>
-                <a:sym typeface="Noto Sans SC"/>
+                <a:latin typeface="Hiragino Sans GB"/>
+                <a:ea typeface="Hiragino Sans GB"/>
+                <a:cs typeface="Hiragino Sans GB"/>
+                <a:sym typeface="Hiragino Sans GB"/>
               </a:rPr>
               <a:t>4</a:t>
             </a:r>
@@ -41062,10 +41050,10 @@
                 <a:solidFill>
                   <a:srgbClr val="0F172A"/>
                 </a:solidFill>
-                <a:latin typeface="Noto Sans SC"/>
-                <a:ea typeface="Noto Sans SC"/>
-                <a:cs typeface="Noto Sans SC"/>
-                <a:sym typeface="Noto Sans SC"/>
+                <a:latin typeface="Hiragino Sans GB"/>
+                <a:ea typeface="Hiragino Sans GB"/>
+                <a:cs typeface="Hiragino Sans GB"/>
+                <a:sym typeface="Hiragino Sans GB"/>
               </a:rPr>
               <a:t>趋势</a:t>
             </a:r>
@@ -41111,10 +41099,10 @@
                 <a:solidFill>
                   <a:srgbClr val="64748B"/>
                 </a:solidFill>
-                <a:latin typeface="Noto Sans SC"/>
-                <a:ea typeface="Noto Sans SC"/>
-                <a:cs typeface="Noto Sans SC"/>
-                <a:sym typeface="Noto Sans SC"/>
+                <a:latin typeface="Hiragino Sans GB"/>
+                <a:ea typeface="Hiragino Sans GB"/>
+                <a:cs typeface="Hiragino Sans GB"/>
+                <a:sym typeface="Hiragino Sans GB"/>
               </a:rPr>
               <a:t>环比同比 · 瓶颈识别</a:t>
             </a:r>
@@ -41198,10 +41186,10 @@
                 <a:solidFill>
                   <a:srgbClr val="0D9488"/>
                 </a:solidFill>
-                <a:latin typeface="Noto Sans SC"/>
-                <a:ea typeface="Noto Sans SC"/>
-                <a:cs typeface="Noto Sans SC"/>
-                <a:sym typeface="Noto Sans SC"/>
+                <a:latin typeface="Hiragino Sans GB"/>
+                <a:ea typeface="Hiragino Sans GB"/>
+                <a:cs typeface="Hiragino Sans GB"/>
+                <a:sym typeface="Hiragino Sans GB"/>
               </a:rPr>
               <a:t>影响可控</a:t>
             </a:r>
@@ -41247,10 +41235,10 @@
                 <a:solidFill>
                   <a:srgbClr val="334155"/>
                 </a:solidFill>
-                <a:latin typeface="Noto Sans SC"/>
-                <a:ea typeface="Noto Sans SC"/>
-                <a:cs typeface="Noto Sans SC"/>
-                <a:sym typeface="Noto Sans SC"/>
+                <a:latin typeface="Hiragino Sans GB"/>
+                <a:ea typeface="Hiragino Sans GB"/>
+                <a:cs typeface="Hiragino Sans GB"/>
+                <a:sym typeface="Hiragino Sans GB"/>
               </a:rPr>
               <a:t>网关韧性改动集中在 llm/model_router.py 与 providers 模块；驾驶舱复用现有运行数据，直接作用于生产可用性。</a:t>
             </a:r>
@@ -41296,12 +41284,12 @@
                 <a:solidFill>
                   <a:srgbClr val="94A3B8"/>
                 </a:solidFill>
-                <a:latin typeface="Noto Sans SC"/>
-                <a:ea typeface="Noto Sans SC"/>
-                <a:cs typeface="Noto Sans SC"/>
-                <a:sym typeface="Noto Sans SC"/>
+                <a:latin typeface="Hiragino Sans GB"/>
+                <a:ea typeface="Hiragino Sans GB"/>
+                <a:cs typeface="Hiragino Sans GB"/>
+                <a:sym typeface="Hiragino Sans GB"/>
               </a:rPr>
-              <a:t>MOGONG · 企业级智能体平台</a:t>
+              <a:t>墨攻 · 企业级智能体平台</a:t>
             </a:r>
             <a:endParaRPr lang="en-US" sz="1100"/>
           </a:p>
@@ -41343,10 +41331,10 @@
                 <a:solidFill>
                   <a:srgbClr val="94A3B8"/>
                 </a:solidFill>
-                <a:latin typeface="Noto Sans SC"/>
-                <a:ea typeface="Noto Sans SC"/>
-                <a:cs typeface="Noto Sans SC"/>
-                <a:sym typeface="Noto Sans SC"/>
+                <a:latin typeface="Hiragino Sans GB"/>
+                <a:ea typeface="Hiragino Sans GB"/>
+                <a:cs typeface="Hiragino Sans GB"/>
+                <a:sym typeface="Hiragino Sans GB"/>
               </a:rPr>
               <a:t>'7 / 16'</a:t>
             </a:r>
@@ -41464,10 +41452,10 @@
                 <a:solidFill>
                   <a:srgbClr val="64748B"/>
                 </a:solidFill>
-                <a:latin typeface="Noto Sans SC"/>
-                <a:ea typeface="Noto Sans SC"/>
-                <a:cs typeface="Noto Sans SC"/>
-                <a:sym typeface="Noto Sans SC"/>
+                <a:latin typeface="Hiragino Sans GB"/>
+                <a:ea typeface="Hiragino Sans GB"/>
+                <a:cs typeface="Hiragino Sans GB"/>
+                <a:sym typeface="Hiragino Sans GB"/>
               </a:rPr>
               <a:t>05 · P1 — 可靠执行与会话交接</a:t>
             </a:r>
@@ -41513,10 +41501,10 @@
                 <a:solidFill>
                   <a:srgbClr val="0F172A"/>
                 </a:solidFill>
-                <a:latin typeface="Noto Sans SC"/>
-                <a:ea typeface="Noto Sans SC"/>
-                <a:cs typeface="Noto Sans SC"/>
-                <a:sym typeface="Noto Sans SC"/>
+                <a:latin typeface="Hiragino Sans GB"/>
+                <a:ea typeface="Hiragino Sans GB"/>
+                <a:cs typeface="Hiragino Sans GB"/>
+                <a:sym typeface="Hiragino Sans GB"/>
               </a:rPr>
               <a:t>Hooks 拦截 · DAG 编排 · 会话/工作流双版本化</a:t>
             </a:r>
@@ -41674,10 +41662,10 @@
                 <a:solidFill>
                   <a:srgbClr val="0F172A"/>
                 </a:solidFill>
-                <a:latin typeface="Noto Sans SC"/>
-                <a:ea typeface="Noto Sans SC"/>
-                <a:cs typeface="Noto Sans SC"/>
-                <a:sym typeface="Noto Sans SC"/>
+                <a:latin typeface="Hiragino Sans GB"/>
+                <a:ea typeface="Hiragino Sans GB"/>
+                <a:cs typeface="Hiragino Sans GB"/>
+                <a:sym typeface="Hiragino Sans GB"/>
               </a:rPr>
               <a:t>① Hooks 拦截机制</a:t>
             </a:r>
@@ -41723,10 +41711,10 @@
                 <a:solidFill>
                   <a:srgbClr val="64748B"/>
                 </a:solidFill>
-                <a:latin typeface="Noto Sans SC"/>
-                <a:ea typeface="Noto Sans SC"/>
-                <a:cs typeface="Noto Sans SC"/>
-                <a:sym typeface="Noto Sans SC"/>
+                <a:latin typeface="Hiragino Sans GB"/>
+                <a:ea typeface="Hiragino Sans GB"/>
+                <a:cs typeface="Hiragino Sans GB"/>
+                <a:sym typeface="Hiragino Sans GB"/>
               </a:rPr>
               <a:t>低成本高扩展的合规扩展点</a:t>
             </a:r>
@@ -41808,10 +41796,10 @@
                 <a:solidFill>
                   <a:srgbClr val="334155"/>
                 </a:solidFill>
-                <a:latin typeface="Noto Sans SC"/>
-                <a:ea typeface="Noto Sans SC"/>
-                <a:cs typeface="Noto Sans SC"/>
-                <a:sym typeface="Noto Sans SC"/>
+                <a:latin typeface="Hiragino Sans GB"/>
+                <a:ea typeface="Hiragino Sans GB"/>
+                <a:cs typeface="Hiragino Sans GB"/>
+                <a:sym typeface="Hiragino Sans GB"/>
               </a:rPr>
               <a:t>五事件：SessionStart / PreToolUse / PostToolUse / SessionEnd / MemoryCommit</a:t>
             </a:r>
@@ -41893,10 +41881,10 @@
                 <a:solidFill>
                   <a:srgbClr val="334155"/>
                 </a:solidFill>
-                <a:latin typeface="Noto Sans SC"/>
-                <a:ea typeface="Noto Sans SC"/>
-                <a:cs typeface="Noto Sans SC"/>
-                <a:sym typeface="Noto Sans SC"/>
+                <a:latin typeface="Hiragino Sans GB"/>
+                <a:ea typeface="Hiragino Sans GB"/>
+                <a:cs typeface="Hiragino Sans GB"/>
+                <a:sym typeface="Hiragino Sans GB"/>
               </a:rPr>
               <a:t>超时保护 · fail-closed · 声明式规则 deny_tool / require_field / observe</a:t>
             </a:r>
@@ -41978,10 +41966,10 @@
                 <a:solidFill>
                   <a:srgbClr val="334155"/>
                 </a:solidFill>
-                <a:latin typeface="Noto Sans SC"/>
-                <a:ea typeface="Noto Sans SC"/>
-                <a:cs typeface="Noto Sans SC"/>
-                <a:sym typeface="Noto Sans SC"/>
+                <a:latin typeface="Hiragino Sans GB"/>
+                <a:ea typeface="Hiragino Sans GB"/>
+                <a:cs typeface="Hiragino Sans GB"/>
+                <a:sym typeface="Hiragino Sans GB"/>
               </a:rPr>
               <a:t>切入点：先 PreToolUse 单事件，快速获得合规拦截与字段校验</a:t>
             </a:r>
@@ -42107,10 +42095,10 @@
                 <a:solidFill>
                   <a:srgbClr val="0F172A"/>
                 </a:solidFill>
-                <a:latin typeface="Noto Sans SC"/>
-                <a:ea typeface="Noto Sans SC"/>
-                <a:cs typeface="Noto Sans SC"/>
-                <a:sym typeface="Noto Sans SC"/>
+                <a:latin typeface="Hiragino Sans GB"/>
+                <a:ea typeface="Hiragino Sans GB"/>
+                <a:cs typeface="Hiragino Sans GB"/>
+                <a:sym typeface="Hiragino Sans GB"/>
               </a:rPr>
               <a:t>② DAG 通用编排</a:t>
             </a:r>
@@ -42156,10 +42144,10 @@
                 <a:solidFill>
                   <a:srgbClr val="64748B"/>
                 </a:solidFill>
-                <a:latin typeface="Noto Sans SC"/>
-                <a:ea typeface="Noto Sans SC"/>
-                <a:cs typeface="Noto Sans SC"/>
-                <a:sym typeface="Noto Sans SC"/>
+                <a:latin typeface="Hiragino Sans GB"/>
+                <a:ea typeface="Hiragino Sans GB"/>
+                <a:cs typeface="Hiragino Sans GB"/>
+                <a:sym typeface="Hiragino Sans GB"/>
               </a:rPr>
               <a:t>从"规划/研究"到通用编排</a:t>
             </a:r>
@@ -42241,10 +42229,10 @@
                 <a:solidFill>
                   <a:srgbClr val="334155"/>
                 </a:solidFill>
-                <a:latin typeface="Noto Sans SC"/>
-                <a:ea typeface="Noto Sans SC"/>
-                <a:cs typeface="Noto Sans SC"/>
-                <a:sym typeface="Noto Sans SC"/>
+                <a:latin typeface="Hiragino Sans GB"/>
+                <a:ea typeface="Hiragino Sans GB"/>
+                <a:cs typeface="Hiragino Sans GB"/>
+                <a:sym typeface="Hiragino Sans GB"/>
               </a:rPr>
               <a:t>四模式：sequential / supervisor / hybrid / graph</a:t>
             </a:r>
@@ -42326,10 +42314,10 @@
                 <a:solidFill>
                   <a:srgbClr val="334155"/>
                 </a:solidFill>
-                <a:latin typeface="Noto Sans SC"/>
-                <a:ea typeface="Noto Sans SC"/>
-                <a:cs typeface="Noto Sans SC"/>
-                <a:sym typeface="Noto Sans SC"/>
+                <a:latin typeface="Hiragino Sans GB"/>
+                <a:ea typeface="Hiragino Sans GB"/>
+                <a:cs typeface="Hiragino Sans GB"/>
+                <a:sym typeface="Hiragino Sans GB"/>
               </a:rPr>
               <a:t>DAG 拓扑排序 + 环检测，杜绝依赖回路</a:t>
             </a:r>
@@ -42411,10 +42399,10 @@
                 <a:solidFill>
                   <a:srgbClr val="334155"/>
                 </a:solidFill>
-                <a:latin typeface="Noto Sans SC"/>
-                <a:ea typeface="Noto Sans SC"/>
-                <a:cs typeface="Noto Sans SC"/>
-                <a:sym typeface="Noto Sans SC"/>
+                <a:latin typeface="Hiragino Sans GB"/>
+                <a:ea typeface="Hiragino Sans GB"/>
+                <a:cs typeface="Hiragino Sans GB"/>
+                <a:sym typeface="Hiragino Sans GB"/>
               </a:rPr>
               <a:t>条件跳过（表达式求值）+ 节点级指数退避重试</a:t>
             </a:r>
@@ -42540,10 +42528,10 @@
                 <a:solidFill>
                   <a:srgbClr val="0F172A"/>
                 </a:solidFill>
-                <a:latin typeface="Noto Sans SC"/>
-                <a:ea typeface="Noto Sans SC"/>
-                <a:cs typeface="Noto Sans SC"/>
-                <a:sym typeface="Noto Sans SC"/>
+                <a:latin typeface="Hiragino Sans GB"/>
+                <a:ea typeface="Hiragino Sans GB"/>
+                <a:cs typeface="Hiragino Sans GB"/>
+                <a:sym typeface="Hiragino Sans GB"/>
               </a:rPr>
               <a:t>③ 会话/工作流双版本化</a:t>
             </a:r>
@@ -42589,10 +42577,10 @@
                 <a:solidFill>
                   <a:srgbClr val="64748B"/>
                 </a:solidFill>
-                <a:latin typeface="Noto Sans SC"/>
-                <a:ea typeface="Noto Sans SC"/>
-                <a:cs typeface="Noto Sans SC"/>
-                <a:sym typeface="Noto Sans SC"/>
+                <a:latin typeface="Hiragino Sans GB"/>
+                <a:ea typeface="Hiragino Sans GB"/>
+                <a:cs typeface="Hiragino Sans GB"/>
+                <a:sym typeface="Hiragino Sans GB"/>
               </a:rPr>
               <a:t>解决"换个人从头来""工作即沉没"</a:t>
             </a:r>
@@ -42674,10 +42662,10 @@
                 <a:solidFill>
                   <a:srgbClr val="334155"/>
                 </a:solidFill>
-                <a:latin typeface="Noto Sans SC"/>
-                <a:ea typeface="Noto Sans SC"/>
-                <a:cs typeface="Noto Sans SC"/>
-                <a:sym typeface="Noto Sans SC"/>
+                <a:latin typeface="Hiragino Sans GB"/>
+                <a:ea typeface="Hiragino Sans GB"/>
+                <a:cs typeface="Hiragino Sans GB"/>
+                <a:sym typeface="Hiragino Sans GB"/>
               </a:rPr>
               <a:t>会话级：commit 存进度 · log 回看 · resume 续写不分支 · share 交接上下文</a:t>
             </a:r>
@@ -42759,10 +42747,10 @@
                 <a:solidFill>
                   <a:srgbClr val="334155"/>
                 </a:solidFill>
-                <a:latin typeface="Noto Sans SC"/>
-                <a:ea typeface="Noto Sans SC"/>
-                <a:cs typeface="Noto Sans SC"/>
-                <a:sym typeface="Noto Sans SC"/>
+                <a:latin typeface="Hiragino Sans GB"/>
+                <a:ea typeface="Hiragino Sans GB"/>
+                <a:cs typeface="Hiragino Sans GB"/>
+                <a:sym typeface="Hiragino Sans GB"/>
               </a:rPr>
               <a:t>工作流级：GraphSpec 可执行契约，版本发布 / 灰度 / 回滚 / 轨迹回放</a:t>
             </a:r>
@@ -42844,10 +42832,10 @@
                 <a:solidFill>
                   <a:srgbClr val="334155"/>
                 </a:solidFill>
-                <a:latin typeface="Noto Sans SC"/>
-                <a:ea typeface="Noto Sans SC"/>
-                <a:cs typeface="Noto Sans SC"/>
-                <a:sym typeface="Noto Sans SC"/>
+                <a:latin typeface="Hiragino Sans GB"/>
+                <a:ea typeface="Hiragino Sans GB"/>
+                <a:cs typeface="Hiragino Sans GB"/>
+                <a:sym typeface="Hiragino Sans GB"/>
               </a:rPr>
               <a:t>二者互补：会话管上下文，工作流管流程定义</a:t>
             </a:r>
@@ -42931,10 +42919,10 @@
                 <a:solidFill>
                   <a:srgbClr val="0D9488"/>
                 </a:solidFill>
-                <a:latin typeface="Noto Sans SC"/>
-                <a:ea typeface="Noto Sans SC"/>
-                <a:cs typeface="Noto Sans SC"/>
-                <a:sym typeface="Noto Sans SC"/>
+                <a:latin typeface="Hiragino Sans GB"/>
+                <a:ea typeface="Hiragino Sans GB"/>
+                <a:cs typeface="Hiragino Sans GB"/>
+                <a:sym typeface="Hiragino Sans GB"/>
               </a:rPr>
               <a:t>会话级是横切</a:t>
             </a:r>
@@ -42980,10 +42968,10 @@
                 <a:solidFill>
                   <a:srgbClr val="334155"/>
                 </a:solidFill>
-                <a:latin typeface="Noto Sans SC"/>
-                <a:ea typeface="Noto Sans SC"/>
-                <a:cs typeface="Noto Sans SC"/>
-                <a:sym typeface="Noto Sans SC"/>
+                <a:latin typeface="Hiragino Sans GB"/>
+                <a:ea typeface="Hiragino Sans GB"/>
+                <a:cs typeface="Hiragino Sans GB"/>
+                <a:sym typeface="Hiragino Sans GB"/>
               </a:rPr>
               <a:t>会话级与脱敏（保存时）、Hooks（生命周期事件）、自进化（会话→经验→Skill）交叉，也与现有 Workspace/组织打通多人协同。</a:t>
             </a:r>
@@ -43029,12 +43017,12 @@
                 <a:solidFill>
                   <a:srgbClr val="94A3B8"/>
                 </a:solidFill>
-                <a:latin typeface="Noto Sans SC"/>
-                <a:ea typeface="Noto Sans SC"/>
-                <a:cs typeface="Noto Sans SC"/>
-                <a:sym typeface="Noto Sans SC"/>
+                <a:latin typeface="Hiragino Sans GB"/>
+                <a:ea typeface="Hiragino Sans GB"/>
+                <a:cs typeface="Hiragino Sans GB"/>
+                <a:sym typeface="Hiragino Sans GB"/>
               </a:rPr>
-              <a:t>MOGONG · 企业级智能体平台</a:t>
+              <a:t>墨攻 · 企业级智能体平台</a:t>
             </a:r>
             <a:endParaRPr lang="en-US" sz="1100"/>
           </a:p>
@@ -43076,10 +43064,10 @@
                 <a:solidFill>
                   <a:srgbClr val="94A3B8"/>
                 </a:solidFill>
-                <a:latin typeface="Noto Sans SC"/>
-                <a:ea typeface="Noto Sans SC"/>
-                <a:cs typeface="Noto Sans SC"/>
-                <a:sym typeface="Noto Sans SC"/>
+                <a:latin typeface="Hiragino Sans GB"/>
+                <a:ea typeface="Hiragino Sans GB"/>
+                <a:cs typeface="Hiragino Sans GB"/>
+                <a:sym typeface="Hiragino Sans GB"/>
               </a:rPr>
               <a:t>'8 / 16'</a:t>
             </a:r>
@@ -43197,10 +43185,10 @@
                 <a:solidFill>
                   <a:srgbClr val="1E293B"/>
                 </a:solidFill>
-                <a:latin typeface="Noto Sans SC"/>
-                <a:ea typeface="Noto Sans SC"/>
-                <a:cs typeface="Noto Sans SC"/>
-                <a:sym typeface="Noto Sans SC"/>
+                <a:latin typeface="Hiragino Sans GB"/>
+                <a:ea typeface="Hiragino Sans GB"/>
+                <a:cs typeface="Hiragino Sans GB"/>
+                <a:sym typeface="Hiragino Sans GB"/>
               </a:rPr>
               <a:t>06 · P2 — 自进化与生态</a:t>
             </a:r>
@@ -43246,10 +43234,10 @@
                 <a:solidFill>
                   <a:srgbClr val="0F172A"/>
                 </a:solidFill>
-                <a:latin typeface="Noto Sans SC"/>
-                <a:ea typeface="Noto Sans SC"/>
-                <a:cs typeface="Noto Sans SC"/>
-                <a:sym typeface="Noto Sans SC"/>
+                <a:latin typeface="Hiragino Sans GB"/>
+                <a:ea typeface="Hiragino Sans GB"/>
+                <a:cs typeface="Hiragino Sans GB"/>
+                <a:sym typeface="Hiragino Sans GB"/>
               </a:rPr>
               <a:t>把"会话 → 经验 → Skill"串成主线，越用越聪明</a:t>
             </a:r>
@@ -43327,10 +43315,10 @@
                 <a:solidFill>
                   <a:srgbClr val="0F172A"/>
                 </a:solidFill>
-                <a:latin typeface="Noto Sans SC"/>
-                <a:ea typeface="Noto Sans SC"/>
-                <a:cs typeface="Noto Sans SC"/>
-                <a:sym typeface="Noto Sans SC"/>
+                <a:latin typeface="Hiragino Sans GB"/>
+                <a:ea typeface="Hiragino Sans GB"/>
+                <a:cs typeface="Hiragino Sans GB"/>
+                <a:sym typeface="Hiragino Sans GB"/>
               </a:rPr>
               <a:t>Dream Cycle 三层自进化</a:t>
             </a:r>
@@ -43418,10 +43406,10 @@
                 <a:solidFill>
                   <a:srgbClr val="10B9A9"/>
                 </a:solidFill>
-                <a:latin typeface="Noto Sans SC"/>
-                <a:ea typeface="Noto Sans SC"/>
-                <a:cs typeface="Noto Sans SC"/>
-                <a:sym typeface="Noto Sans SC"/>
+                <a:latin typeface="Hiragino Sans GB"/>
+                <a:ea typeface="Hiragino Sans GB"/>
+                <a:cs typeface="Hiragino Sans GB"/>
+                <a:sym typeface="Hiragino Sans GB"/>
               </a:rPr>
               <a:t>1</a:t>
             </a:r>
@@ -43467,10 +43455,10 @@
                 <a:solidFill>
                   <a:srgbClr val="0F172A"/>
                 </a:solidFill>
-                <a:latin typeface="Noto Sans SC"/>
-                <a:ea typeface="Noto Sans SC"/>
-                <a:cs typeface="Noto Sans SC"/>
-                <a:sym typeface="Noto Sans SC"/>
+                <a:latin typeface="Hiragino Sans GB"/>
+                <a:ea typeface="Hiragino Sans GB"/>
+                <a:cs typeface="Hiragino Sans GB"/>
+                <a:sym typeface="Hiragino Sans GB"/>
               </a:rPr>
               <a:t>经验沉淀</a:t>
             </a:r>
@@ -43516,10 +43504,10 @@
                 <a:solidFill>
                   <a:srgbClr val="64748B"/>
                 </a:solidFill>
-                <a:latin typeface="Noto Sans SC"/>
-                <a:ea typeface="Noto Sans SC"/>
-                <a:cs typeface="Noto Sans SC"/>
-                <a:sym typeface="Noto Sans SC"/>
+                <a:latin typeface="Hiragino Sans GB"/>
+                <a:ea typeface="Hiragino Sans GB"/>
+                <a:cs typeface="Hiragino Sans GB"/>
+                <a:sym typeface="Hiragino Sans GB"/>
               </a:rPr>
               <a:t>friction 触发，记录高价值实践（Agent 越用越聪明）</a:t>
             </a:r>
@@ -43565,10 +43553,10 @@
                 <a:solidFill>
                   <a:srgbClr val="94A3B8"/>
                 </a:solidFill>
-                <a:latin typeface="Noto Sans SC"/>
-                <a:ea typeface="Noto Sans SC"/>
-                <a:cs typeface="Noto Sans SC"/>
-                <a:sym typeface="Noto Sans SC"/>
+                <a:latin typeface="Hiragino Sans GB"/>
+                <a:ea typeface="Hiragino Sans GB"/>
+                <a:cs typeface="Hiragino Sans GB"/>
+                <a:sym typeface="Hiragino Sans GB"/>
               </a:rPr>
               <a:t>⇣</a:t>
             </a:r>
@@ -43656,10 +43644,10 @@
                 <a:solidFill>
                   <a:srgbClr val="10B9A9"/>
                 </a:solidFill>
-                <a:latin typeface="Noto Sans SC"/>
-                <a:ea typeface="Noto Sans SC"/>
-                <a:cs typeface="Noto Sans SC"/>
-                <a:sym typeface="Noto Sans SC"/>
+                <a:latin typeface="Hiragino Sans GB"/>
+                <a:ea typeface="Hiragino Sans GB"/>
+                <a:cs typeface="Hiragino Sans GB"/>
+                <a:sym typeface="Hiragino Sans GB"/>
               </a:rPr>
               <a:t>2</a:t>
             </a:r>
@@ -43705,10 +43693,10 @@
                 <a:solidFill>
                   <a:srgbClr val="0F172A"/>
                 </a:solidFill>
-                <a:latin typeface="Noto Sans SC"/>
-                <a:ea typeface="Noto Sans SC"/>
-                <a:cs typeface="Noto Sans SC"/>
-                <a:sym typeface="Noto Sans SC"/>
+                <a:latin typeface="Hiragino Sans GB"/>
+                <a:ea typeface="Hiragino Sans GB"/>
+                <a:cs typeface="Hiragino Sans GB"/>
+                <a:sym typeface="Hiragino Sans GB"/>
               </a:rPr>
               <a:t>自动发现 → 生成 Skill 草稿 + 自动建 MR</a:t>
             </a:r>
@@ -43754,10 +43742,10 @@
                 <a:solidFill>
                   <a:srgbClr val="64748B"/>
                 </a:solidFill>
-                <a:latin typeface="Noto Sans SC"/>
-                <a:ea typeface="Noto Sans SC"/>
-                <a:cs typeface="Noto Sans SC"/>
-                <a:sym typeface="Noto Sans SC"/>
+                <a:latin typeface="Hiragino Sans GB"/>
+                <a:ea typeface="Hiragino Sans GB"/>
+                <a:cs typeface="Hiragino Sans GB"/>
+                <a:sym typeface="Hiragino Sans GB"/>
               </a:rPr>
               <a:t>周期扫描重复模式，产出可复用 Skill</a:t>
             </a:r>
@@ -43803,10 +43791,10 @@
                 <a:solidFill>
                   <a:srgbClr val="94A3B8"/>
                 </a:solidFill>
-                <a:latin typeface="Noto Sans SC"/>
-                <a:ea typeface="Noto Sans SC"/>
-                <a:cs typeface="Noto Sans SC"/>
-                <a:sym typeface="Noto Sans SC"/>
+                <a:latin typeface="Hiragino Sans GB"/>
+                <a:ea typeface="Hiragino Sans GB"/>
+                <a:cs typeface="Hiragino Sans GB"/>
+                <a:sym typeface="Hiragino Sans GB"/>
               </a:rPr>
               <a:t>⇣</a:t>
             </a:r>
@@ -43894,10 +43882,10 @@
                 <a:solidFill>
                   <a:srgbClr val="10B9A9"/>
                 </a:solidFill>
-                <a:latin typeface="Noto Sans SC"/>
-                <a:ea typeface="Noto Sans SC"/>
-                <a:cs typeface="Noto Sans SC"/>
-                <a:sym typeface="Noto Sans SC"/>
+                <a:latin typeface="Hiragino Sans GB"/>
+                <a:ea typeface="Hiragino Sans GB"/>
+                <a:cs typeface="Hiragino Sans GB"/>
+                <a:sym typeface="Hiragino Sans GB"/>
               </a:rPr>
               <a:t>3</a:t>
             </a:r>
@@ -43943,10 +43931,10 @@
                 <a:solidFill>
                   <a:srgbClr val="0F172A"/>
                 </a:solidFill>
-                <a:latin typeface="Noto Sans SC"/>
-                <a:ea typeface="Noto Sans SC"/>
-                <a:cs typeface="Noto Sans SC"/>
-                <a:sym typeface="Noto Sans SC"/>
+                <a:latin typeface="Hiragino Sans GB"/>
+                <a:ea typeface="Hiragino Sans GB"/>
+                <a:cs typeface="Hiragino Sans GB"/>
+                <a:sym typeface="Hiragino Sans GB"/>
               </a:rPr>
               <a:t>低采纳率自动淘汰</a:t>
             </a:r>
@@ -43992,10 +43980,10 @@
                 <a:solidFill>
                   <a:srgbClr val="64748B"/>
                 </a:solidFill>
-                <a:latin typeface="Noto Sans SC"/>
-                <a:ea typeface="Noto Sans SC"/>
-                <a:cs typeface="Noto Sans SC"/>
-                <a:sym typeface="Noto Sans SC"/>
+                <a:latin typeface="Hiragino Sans GB"/>
+                <a:ea typeface="Hiragino Sans GB"/>
+                <a:cs typeface="Hiragino Sans GB"/>
+                <a:sym typeface="Hiragino Sans GB"/>
               </a:rPr>
               <a:t>未验证的经验自动下线，保持生态质量</a:t>
             </a:r>
@@ -44041,12 +44029,12 @@
                 <a:solidFill>
                   <a:srgbClr val="0F172A"/>
                 </a:solidFill>
-                <a:latin typeface="Noto Sans SC"/>
-                <a:ea typeface="Noto Sans SC"/>
-                <a:cs typeface="Noto Sans SC"/>
-                <a:sym typeface="Noto Sans SC"/>
+                <a:latin typeface="Hiragino Sans GB"/>
+                <a:ea typeface="Hiragino Sans GB"/>
+                <a:cs typeface="Hiragino Sans GB"/>
+                <a:sym typeface="Hiragino Sans GB"/>
               </a:rPr>
-              <a:t>会话级 + 生态清单（P2 其余项）</a:t>
+              <a:t>生态清单（P2 其余项 + 清单外新增）</a:t>
             </a:r>
             <a:endParaRPr lang="en-US" sz="1100"/>
           </a:p>
@@ -44132,10 +44120,10 @@
                 <a:solidFill>
                   <a:srgbClr val="334155"/>
                 </a:solidFill>
-                <a:latin typeface="Noto Sans SC"/>
-                <a:ea typeface="Noto Sans SC"/>
-                <a:cs typeface="Noto Sans SC"/>
-                <a:sym typeface="Noto Sans SC"/>
+                <a:latin typeface="Hiragino Sans GB"/>
+                <a:ea typeface="Hiragino Sans GB"/>
+                <a:cs typeface="Hiragino Sans GB"/>
+                <a:sym typeface="Hiragino Sans GB"/>
               </a:rPr>
               <a:t>A2A Agent 互通网关</a:t>
             </a:r>
@@ -44223,10 +44211,10 @@
                 <a:solidFill>
                   <a:srgbClr val="334155"/>
                 </a:solidFill>
-                <a:latin typeface="Noto Sans SC"/>
-                <a:ea typeface="Noto Sans SC"/>
-                <a:cs typeface="Noto Sans SC"/>
-                <a:sym typeface="Noto Sans SC"/>
+                <a:latin typeface="Hiragino Sans GB"/>
+                <a:ea typeface="Hiragino Sans GB"/>
+                <a:cs typeface="Hiragino Sans GB"/>
+                <a:sym typeface="Hiragino Sans GB"/>
               </a:rPr>
               <a:t>多 IM 入口（飞书/钉钉/企微）</a:t>
             </a:r>
@@ -44242,7 +44230,7 @@
         </p:nvSpPr>
         <p:spPr>
           <a:xfrm rot="0" flipH="false" flipV="false">
-            <a:off x="6223000" y="2794000"/>
+            <a:off x="6223000" y="2743200"/>
             <a:ext cx="2489200" cy="660400"/>
           </a:xfrm>
           <a:prstGeom prst="roundRect">
@@ -44284,7 +44272,7 @@
         </p:nvSpPr>
         <p:spPr>
           <a:xfrm rot="0" flipH="false" flipV="false">
-            <a:off x="6400800" y="2794000"/>
+            <a:off x="6400800" y="2743200"/>
             <a:ext cx="2184400" cy="660400"/>
           </a:xfrm>
           <a:prstGeom prst="rect">
@@ -44314,10 +44302,10 @@
                 <a:solidFill>
                   <a:srgbClr val="334155"/>
                 </a:solidFill>
-                <a:latin typeface="Noto Sans SC"/>
-                <a:ea typeface="Noto Sans SC"/>
-                <a:cs typeface="Noto Sans SC"/>
-                <a:sym typeface="Noto Sans SC"/>
+                <a:latin typeface="Hiragino Sans GB"/>
+                <a:ea typeface="Hiragino Sans GB"/>
+                <a:cs typeface="Hiragino Sans GB"/>
+                <a:sym typeface="Hiragino Sans GB"/>
               </a:rPr>
               <a:t>业务系统语义索引</a:t>
             </a:r>
@@ -44333,7 +44321,7 @@
         </p:nvSpPr>
         <p:spPr>
           <a:xfrm rot="0" flipH="false" flipV="false">
-            <a:off x="8890000" y="2794000"/>
+            <a:off x="8890000" y="2743200"/>
             <a:ext cx="2489200" cy="660400"/>
           </a:xfrm>
           <a:prstGeom prst="roundRect">
@@ -44375,7 +44363,7 @@
         </p:nvSpPr>
         <p:spPr>
           <a:xfrm rot="0" flipH="false" flipV="false">
-            <a:off x="9067800" y="2794000"/>
+            <a:off x="9067800" y="2743200"/>
             <a:ext cx="2184400" cy="660400"/>
           </a:xfrm>
           <a:prstGeom prst="rect">
@@ -44405,10 +44393,10 @@
                 <a:solidFill>
                   <a:srgbClr val="334155"/>
                 </a:solidFill>
-                <a:latin typeface="Noto Sans SC"/>
-                <a:ea typeface="Noto Sans SC"/>
-                <a:cs typeface="Noto Sans SC"/>
-                <a:sym typeface="Noto Sans SC"/>
+                <a:latin typeface="Hiragino Sans GB"/>
+                <a:ea typeface="Hiragino Sans GB"/>
+                <a:cs typeface="Hiragino Sans GB"/>
+                <a:sym typeface="Hiragino Sans GB"/>
               </a:rPr>
               <a:t>知识图谱层</a:t>
             </a:r>
@@ -44424,7 +44412,7 @@
         </p:nvSpPr>
         <p:spPr>
           <a:xfrm rot="0" flipH="false" flipV="false">
-            <a:off x="6223000" y="3581400"/>
+            <a:off x="6223000" y="3479800"/>
             <a:ext cx="2489200" cy="660400"/>
           </a:xfrm>
           <a:prstGeom prst="roundRect">
@@ -44466,7 +44454,7 @@
         </p:nvSpPr>
         <p:spPr>
           <a:xfrm rot="0" flipH="false" flipV="false">
-            <a:off x="6400800" y="3581400"/>
+            <a:off x="6400800" y="3479800"/>
             <a:ext cx="2184400" cy="660400"/>
           </a:xfrm>
           <a:prstGeom prst="rect">
@@ -44496,10 +44484,10 @@
                 <a:solidFill>
                   <a:srgbClr val="334155"/>
                 </a:solidFill>
-                <a:latin typeface="Noto Sans SC"/>
-                <a:ea typeface="Noto Sans SC"/>
-                <a:cs typeface="Noto Sans SC"/>
-                <a:sym typeface="Noto Sans SC"/>
+                <a:latin typeface="Hiragino Sans GB"/>
+                <a:ea typeface="Hiragino Sans GB"/>
+                <a:cs typeface="Hiragino Sans GB"/>
+                <a:sym typeface="Hiragino Sans GB"/>
               </a:rPr>
               <a:t>Skill 市场强化（版本/监控）</a:t>
             </a:r>
@@ -44515,7 +44503,7 @@
         </p:nvSpPr>
         <p:spPr>
           <a:xfrm rot="0" flipH="false" flipV="false">
-            <a:off x="8890000" y="3581400"/>
+            <a:off x="8890000" y="3479800"/>
             <a:ext cx="2489200" cy="660400"/>
           </a:xfrm>
           <a:prstGeom prst="roundRect">
@@ -44557,7 +44545,7 @@
         </p:nvSpPr>
         <p:spPr>
           <a:xfrm rot="0" flipH="false" flipV="false">
-            <a:off x="9067800" y="3581400"/>
+            <a:off x="9067800" y="3479800"/>
             <a:ext cx="2184400" cy="660400"/>
           </a:xfrm>
           <a:prstGeom prst="rect">
@@ -44587,10 +44575,10 @@
                 <a:solidFill>
                   <a:srgbClr val="334155"/>
                 </a:solidFill>
-                <a:latin typeface="Noto Sans SC"/>
-                <a:ea typeface="Noto Sans SC"/>
-                <a:cs typeface="Noto Sans SC"/>
-                <a:sym typeface="Noto Sans SC"/>
+                <a:latin typeface="Hiragino Sans GB"/>
+                <a:ea typeface="Hiragino Sans GB"/>
+                <a:cs typeface="Hiragino Sans GB"/>
+                <a:sym typeface="Hiragino Sans GB"/>
               </a:rPr>
               <a:t>三范围 Memory（个人/组织）</a:t>
             </a:r>
@@ -44606,7 +44594,7 @@
         </p:nvSpPr>
         <p:spPr>
           <a:xfrm rot="0" flipH="false" flipV="false">
-            <a:off x="6223000" y="4368800"/>
+            <a:off x="6223000" y="4216400"/>
             <a:ext cx="2489200" cy="660400"/>
           </a:xfrm>
           <a:prstGeom prst="roundRect">
@@ -44642,62 +44630,13 @@
       </p:sp>
       <p:sp>
         <p:nvSpPr>
-          <p:cNvPr name="AutoShape 35" id="35"/>
-          <p:cNvSpPr/>
-          <p:nvPr/>
-        </p:nvSpPr>
-        <p:spPr>
-          <a:xfrm rot="0" flipH="false" flipV="false">
-            <a:off x="6400800" y="4368800"/>
-            <a:ext cx="2184400" cy="660400"/>
-          </a:xfrm>
-          <a:prstGeom prst="rect">
-            <a:avLst/>
-          </a:prstGeom>
-          <a:noFill/>
-          <a:ln w="12700" cmpd="sng" cap="flat">
-            <a:noFill/>
-            <a:prstDash val="solid"/>
-            <a:round/>
-          </a:ln>
-        </p:spPr>
-        <p:txBody>
-          <a:bodyPr anchor="ctr" rtlCol="false" vert="horz" wrap="none" lIns="0" rIns="0" tIns="0" bIns="0">
-            <a:noAutofit/>
-          </a:bodyPr>
-          <a:lstStyle/>
-          <a:p>
-            <a:pPr algn="l" marL="0" indent="0">
-              <a:lnSpc>
-                <a:spcPct val="125000"/>
-              </a:lnSpc>
-              <a:defRPr/>
-            </a:pPr>
-            <a:r>
-              <a:rPr lang="en-US" b="false" i="false" strike="noStrike" u="none" sz="1100">
-                <a:solidFill>
-                  <a:srgbClr val="334155"/>
-                </a:solidFill>
-                <a:latin typeface="Noto Sans SC"/>
-                <a:ea typeface="Noto Sans SC"/>
-                <a:cs typeface="Noto Sans SC"/>
-                <a:sym typeface="Noto Sans SC"/>
-              </a:rPr>
-              <a:t>能力资产化「发现→注册」</a:t>
-            </a:r>
-            <a:endParaRPr lang="en-US" sz="1100"/>
-          </a:p>
-        </p:txBody>
-      </p:sp>
-      <p:sp>
-        <p:nvSpPr>
-          <p:cNvPr name="AutoShape 36" id="36"/>
-          <p:cNvSpPr/>
-          <p:nvPr/>
-        </p:nvSpPr>
-        <p:spPr>
-          <a:xfrm rot="0" flipH="false" flipV="false">
-            <a:off x="8890000" y="4368800"/>
+          <p:cNvPr name="AutoShape 34" id="34"/>
+          <p:cNvSpPr/>
+          <p:nvPr/>
+        </p:nvSpPr>
+        <p:spPr>
+          <a:xfrm rot="0" flipH="false" flipV="false">
+            <a:off x="6223000" y="4953000"/>
             <a:ext cx="2489200" cy="660400"/>
           </a:xfrm>
           <a:prstGeom prst="roundRect">
@@ -44733,13 +44672,13 @@
       </p:sp>
       <p:sp>
         <p:nvSpPr>
-          <p:cNvPr name="AutoShape 37" id="37"/>
-          <p:cNvSpPr/>
-          <p:nvPr/>
-        </p:nvSpPr>
-        <p:spPr>
-          <a:xfrm rot="0" flipH="false" flipV="false">
-            <a:off x="9067800" y="4368800"/>
+          <p:cNvPr name="AutoShape 35" id="35"/>
+          <p:cNvSpPr/>
+          <p:nvPr/>
+        </p:nvSpPr>
+        <p:spPr>
+          <a:xfrm rot="0" flipH="false" flipV="false">
+            <a:off x="6400800" y="4216400"/>
             <a:ext cx="2184400" cy="660400"/>
           </a:xfrm>
           <a:prstGeom prst="rect">
@@ -44769,10 +44708,150 @@
                 <a:solidFill>
                   <a:srgbClr val="334155"/>
                 </a:solidFill>
-                <a:latin typeface="Noto Sans SC"/>
-                <a:ea typeface="Noto Sans SC"/>
-                <a:cs typeface="Noto Sans SC"/>
-                <a:sym typeface="Noto Sans SC"/>
+                <a:latin typeface="Hiragino Sans GB"/>
+                <a:ea typeface="Hiragino Sans GB"/>
+                <a:cs typeface="Hiragino Sans GB"/>
+                <a:sym typeface="Hiragino Sans GB"/>
+              </a:rPr>
+              <a:t>能力资产化「发现→注册」</a:t>
+            </a:r>
+            <a:endParaRPr lang="en-US" sz="1100"/>
+          </a:p>
+        </p:txBody>
+      </p:sp>
+      <p:sp>
+        <p:nvSpPr>
+          <p:cNvPr name="AutoShape 35" id="35"/>
+          <p:cNvSpPr/>
+          <p:nvPr/>
+        </p:nvSpPr>
+        <p:spPr>
+          <a:xfrm rot="0" flipH="false" flipV="false">
+            <a:off x="6400800" y="4953000"/>
+            <a:ext cx="2184400" cy="660400"/>
+          </a:xfrm>
+          <a:prstGeom prst="rect">
+            <a:avLst/>
+          </a:prstGeom>
+          <a:noFill/>
+          <a:ln w="12700" cmpd="sng" cap="flat">
+            <a:noFill/>
+            <a:prstDash val="solid"/>
+            <a:round/>
+          </a:ln>
+        </p:spPr>
+        <p:txBody>
+          <a:bodyPr anchor="ctr" rtlCol="false" vert="horz" wrap="none" lIns="0" rIns="0" tIns="0" bIns="0">
+            <a:noAutofit/>
+          </a:bodyPr>
+          <a:lstStyle/>
+          <a:p>
+            <a:pPr algn="l" marL="0" indent="0">
+              <a:lnSpc>
+                <a:spcPct val="125000"/>
+              </a:lnSpc>
+              <a:defRPr/>
+            </a:pPr>
+            <a:r>
+              <a:rPr lang="en-US" b="1" i="false" strike="noStrike" u="none" sz="1100">
+                <a:solidFill>
+                  <a:srgbClr val="0D9488"/>
+                </a:solidFill>
+                <a:latin typeface="Hiragino Sans GB"/>
+                <a:ea typeface="Hiragino Sans GB"/>
+                <a:cs typeface="Hiragino Sans GB"/>
+                <a:sym typeface="Hiragino Sans GB"/>
+              </a:rPr>
+              <a:t>020 平台化多租户（清单外新增）</a:t>
+            </a:r>
+            <a:endParaRPr lang="en-US" sz="1100"/>
+          </a:p>
+        </p:txBody>
+      </p:sp>
+      <p:sp>
+        <p:nvSpPr>
+          <p:cNvPr name="AutoShape 36" id="36"/>
+          <p:cNvSpPr/>
+          <p:nvPr/>
+        </p:nvSpPr>
+        <p:spPr>
+          <a:xfrm rot="0" flipH="false" flipV="false">
+            <a:off x="8890000" y="4216400"/>
+            <a:ext cx="2489200" cy="660400"/>
+          </a:xfrm>
+          <a:prstGeom prst="roundRect">
+            <a:avLst>
+              <a:gd name="adj" fmla="val 15384"/>
+            </a:avLst>
+          </a:prstGeom>
+          <a:solidFill>
+            <a:srgbClr val="FFFFFF">
+              <a:alpha val="100000"/>
+            </a:srgbClr>
+          </a:solidFill>
+          <a:ln w="12700" cmpd="sng" cap="flat">
+            <a:solidFill>
+              <a:srgbClr val="E2E8F0">
+                <a:alpha val="100000"/>
+              </a:srgbClr>
+            </a:solidFill>
+            <a:prstDash val="solid"/>
+            <a:round/>
+          </a:ln>
+        </p:spPr>
+        <p:txBody>
+          <a:bodyPr anchor="ctr" rtlCol="false" anchorCtr="false" vert="horz" wrap="square" lIns="0" rIns="0" tIns="0" bIns="0"/>
+          <a:lstStyle/>
+          <a:p>
+            <a:pPr algn="ctr">
+              <a:defRPr/>
+            </a:pPr>
+            <a:endParaRPr/>
+          </a:p>
+        </p:txBody>
+      </p:sp>
+      <p:sp>
+        <p:nvSpPr>
+          <p:cNvPr name="AutoShape 37" id="37"/>
+          <p:cNvSpPr/>
+          <p:nvPr/>
+        </p:nvSpPr>
+        <p:spPr>
+          <a:xfrm rot="0" flipH="false" flipV="false">
+            <a:off x="9067800" y="4216400"/>
+            <a:ext cx="2184400" cy="660400"/>
+          </a:xfrm>
+          <a:prstGeom prst="rect">
+            <a:avLst/>
+          </a:prstGeom>
+          <a:noFill/>
+          <a:ln w="12700" cmpd="sng" cap="flat">
+            <a:noFill/>
+            <a:prstDash val="solid"/>
+            <a:round/>
+          </a:ln>
+        </p:spPr>
+        <p:txBody>
+          <a:bodyPr anchor="ctr" rtlCol="false" vert="horz" wrap="none" lIns="0" rIns="0" tIns="0" bIns="0">
+            <a:noAutofit/>
+          </a:bodyPr>
+          <a:lstStyle/>
+          <a:p>
+            <a:pPr algn="l" marL="0" indent="0">
+              <a:lnSpc>
+                <a:spcPct val="125000"/>
+              </a:lnSpc>
+              <a:defRPr/>
+            </a:pPr>
+            <a:r>
+              <a:rPr lang="en-US" b="false" i="false" strike="noStrike" u="none" sz="1100">
+                <a:solidFill>
+                  <a:srgbClr val="334155"/>
+                </a:solidFill>
+                <a:latin typeface="Hiragino Sans GB"/>
+                <a:ea typeface="Hiragino Sans GB"/>
+                <a:cs typeface="Hiragino Sans GB"/>
+                <a:sym typeface="Hiragino Sans GB"/>
               </a:rPr>
               <a:t>厚 / 薄 Harness 弹性配置</a:t>
             </a:r>
@@ -44856,10 +44935,10 @@
                 <a:solidFill>
                   <a:srgbClr val="0D9488"/>
                 </a:solidFill>
-                <a:latin typeface="Noto Sans SC"/>
-                <a:ea typeface="Noto Sans SC"/>
-                <a:cs typeface="Noto Sans SC"/>
-                <a:sym typeface="Noto Sans SC"/>
+                <a:latin typeface="Hiragino Sans GB"/>
+                <a:ea typeface="Hiragino Sans GB"/>
+                <a:cs typeface="Hiragino Sans GB"/>
+                <a:sym typeface="Hiragino Sans GB"/>
               </a:rPr>
               <a:t>目标形态</a:t>
             </a:r>
@@ -44905,10 +44984,10 @@
                 <a:solidFill>
                   <a:srgbClr val="334155"/>
                 </a:solidFill>
-                <a:latin typeface="Noto Sans SC"/>
-                <a:ea typeface="Noto Sans SC"/>
-                <a:cs typeface="Noto Sans SC"/>
-                <a:sym typeface="Noto Sans SC"/>
+                <a:latin typeface="Hiragino Sans GB"/>
+                <a:ea typeface="Hiragino Sans GB"/>
+                <a:cs typeface="Hiragino Sans GB"/>
+                <a:sym typeface="Hiragino Sans GB"/>
               </a:rPr>
               <a:t>组织级「数字组织」：一个人的会话成为团队与后续自动化的起点——工作量最大，故后置到阶段三。</a:t>
             </a:r>
@@ -44954,12 +45033,12 @@
                 <a:solidFill>
                   <a:srgbClr val="94A3B8"/>
                 </a:solidFill>
-                <a:latin typeface="Noto Sans SC"/>
-                <a:ea typeface="Noto Sans SC"/>
-                <a:cs typeface="Noto Sans SC"/>
-                <a:sym typeface="Noto Sans SC"/>
+                <a:latin typeface="Hiragino Sans GB"/>
+                <a:ea typeface="Hiragino Sans GB"/>
+                <a:cs typeface="Hiragino Sans GB"/>
+                <a:sym typeface="Hiragino Sans GB"/>
               </a:rPr>
-              <a:t>MOGONG · 企业级智能体平台</a:t>
+              <a:t>墨攻 · 企业级智能体平台</a:t>
             </a:r>
             <a:endParaRPr lang="en-US" sz="1100"/>
           </a:p>
@@ -45001,10 +45080,10 @@
                 <a:solidFill>
                   <a:srgbClr val="94A3B8"/>
                 </a:solidFill>
-                <a:latin typeface="Noto Sans SC"/>
-                <a:ea typeface="Noto Sans SC"/>
-                <a:cs typeface="Noto Sans SC"/>
-                <a:sym typeface="Noto Sans SC"/>
+                <a:latin typeface="Hiragino Sans GB"/>
+                <a:ea typeface="Hiragino Sans GB"/>
+                <a:cs typeface="Hiragino Sans GB"/>
+                <a:sym typeface="Hiragino Sans GB"/>
               </a:rPr>
               <a:t>'9 / 16'</a:t>
             </a:r>

--- a/docs/intro-v4.pptx
+++ b/docs/intro-v4.pptx
@@ -20811,7 +20811,7 @@
                 <a:cs typeface="Hiragino Sans GB"/>
                 <a:sym typeface="Hiragino Sans GB"/>
               </a:rPr>
-              <a:t>2026-10 · 至 020</a:t>
+              <a:t>2026-10 · 至 021</a:t>
             </a:r>
             <a:endParaRPr lang="en-US" sz="1100"/>
           </a:p>
@@ -20981,7 +20981,7 @@
                 <a:cs typeface="Hiragino Sans GB"/>
                 <a:sym typeface="Hiragino Sans GB"/>
               </a:rPr>
-              <a:t>15 项 + 020 已按 SDD 落地，库代码 + 单测全绿</a:t>
+              <a:t>15 项 + 020/021 已按 SDD 落地，库代码 + 单测全绿</a:t>
             </a:r>
             <a:endParaRPr lang="en-US" sz="1100"/>
           </a:p>
@@ -22909,7 +22909,7 @@
                 <a:cs typeface="Hiragino Sans GB"/>
                 <a:sym typeface="Hiragino Sans GB"/>
               </a:rPr>
-              <a:t>15 项 + 020 已按 SDD 落地，库代码 + 单测全绿</a:t>
+              <a:t>15 项 + 020/021 已按 SDD 落地，库代码 + 单测全绿</a:t>
             </a:r>
             <a:endParaRPr lang="en-US" sz="1100"/>
           </a:p>
@@ -23081,7 +23081,7 @@
                 <a:cs typeface="Hiragino Sans GB"/>
                 <a:sym typeface="Hiragino Sans GB"/>
               </a:rPr>
-              <a:t>已完成 · 16 项全绿</a:t>
+              <a:t>已完成 · 17 项全绿</a:t>
             </a:r>
             <a:endParaRPr lang="en-US" sz="1100"/>
           </a:p>
@@ -23130,7 +23130,7 @@
                 <a:cs typeface="Hiragino Sans GB"/>
                 <a:sym typeface="Hiragino Sans GB"/>
               </a:rPr>
-              <a:t>P0/P1/P2 共 15 项 + 清单外 020，已按 SDD 落地为库代码 + 单测，全部通过（chat-api 1562 / admin-api 236，2026-09 基线）。</a:t>
+              <a:t>P0/P1/P2 共 15 项 + 清单外 020/021，已按 SDD 落地为库代码 + 单测，全部通过（chat-api 2229 / admin-api 433，2026-10 基线）。</a:t>
             </a:r>
             <a:endParaRPr lang="en-US" sz="1100"/>
           </a:p>
@@ -31391,7 +31391,7 @@
                 <a:cs typeface="Hiragino Sans GB"/>
                 <a:sym typeface="Hiragino Sans GB"/>
               </a:rPr>
-              <a:t>库代码 + 单测全绿，生产接线与 UI 触点全部闭合（15 项 + 020 的 SDD 全流程），从能力走进生产</a:t>
+              <a:t>库代码 + 单测全绿，生产接线与 UI 触点全部闭合（15 项 + 020/021 的 SDD 全流程），从能力走进生产</a:t>
             </a:r>
             <a:endParaRPr lang="en-US" sz="1100"/>
           </a:p>
@@ -31442,7 +31442,7 @@
                 <a:cs typeface="Hiragino Sans GB"/>
                 <a:sym typeface="Hiragino Sans GB"/>
               </a:rPr>
-              <a:t>下一步：以 020 平台化多租户收尾的 SDD 全流程已就绪，可进入 PR 评审与版本发布——库能力、生产接线与治理资产齐备。</a:t>
+              <a:t>下一步：以 020 与 021 收尾的 SDD 全流程已就绪，可进入 PR 评审与版本发布——库能力、生产接线与治理资产齐备。</a:t>
             </a:r>
             <a:endParaRPr lang="en-US" sz="1100"/>
           </a:p>
@@ -37300,7 +37300,7 @@
                 <a:cs typeface="Hiragino Sans GB"/>
                 <a:sym typeface="Hiragino Sans GB"/>
               </a:rPr>
-              <a:t>最新进展：15 项 + 020 已按 SDD 落地，库代码 + 单测全绿，接线与 UI 触点闭合；specs/ 20 个特性（16 份 tasks.md / 332 项）已归档。</a:t>
+              <a:t>最新进展：15 项 + 020/021 已按 SDD 落地，库代码 + 单测全绿，接线与 UI 触点闭合；specs/ 21 个特性（17 份 tasks.md / 354 项）已归档。</a:t>
             </a:r>
             <a:endParaRPr lang="en-US" sz="1100"/>
           </a:p>
@@ -44630,13 +44630,55 @@
       </p:sp>
       <p:sp>
         <p:nvSpPr>
-          <p:cNvPr name="AutoShape 34" id="34"/>
+          <p:cNvPr name="AutoShape 43" id="43"/>
           <p:cNvSpPr/>
           <p:nvPr/>
         </p:nvSpPr>
         <p:spPr>
           <a:xfrm rot="0" flipH="false" flipV="false">
             <a:off x="6223000" y="4953000"/>
+            <a:ext cx="2489200" cy="660400"/>
+          </a:xfrm>
+          <a:prstGeom prst="roundRect">
+            <a:avLst>
+              <a:gd name="adj" fmla="val 15384"/>
+            </a:avLst>
+          </a:prstGeom>
+          <a:solidFill>
+            <a:srgbClr val="FFFFFF">
+              <a:alpha val="100000"/>
+            </a:srgbClr>
+          </a:solidFill>
+          <a:ln w="12700" cmpd="sng" cap="flat">
+            <a:solidFill>
+              <a:srgbClr val="E2E8F0">
+                <a:alpha val="100000"/>
+              </a:srgbClr>
+            </a:solidFill>
+            <a:prstDash val="solid"/>
+            <a:round/>
+          </a:ln>
+        </p:spPr>
+        <p:txBody>
+          <a:bodyPr anchor="ctr" rtlCol="false" anchorCtr="false" vert="horz" wrap="square" lIns="0" rIns="0" tIns="0" bIns="0"/>
+          <a:lstStyle/>
+          <a:p>
+            <a:pPr algn="ctr">
+              <a:defRPr/>
+            </a:pPr>
+            <a:endParaRPr/>
+          </a:p>
+        </p:txBody>
+      </p:sp>
+      <p:sp>
+        <p:nvSpPr>
+          <p:cNvPr name="AutoShape 44" id="44"/>
+          <p:cNvSpPr/>
+          <p:nvPr/>
+        </p:nvSpPr>
+        <p:spPr>
+          <a:xfrm rot="0" flipH="false" flipV="false">
+            <a:off x="8890000" y="4953000"/>
             <a:ext cx="2489200" cy="660400"/>
           </a:xfrm>
           <a:prstGeom prst="roundRect">
@@ -44721,7 +44763,7 @@
       </p:sp>
       <p:sp>
         <p:nvSpPr>
-          <p:cNvPr name="AutoShape 35" id="35"/>
+          <p:cNvPr name="AutoShape 45" id="45"/>
           <p:cNvSpPr/>
           <p:nvPr/>
         </p:nvSpPr>
@@ -44763,6 +44805,55 @@
                 <a:sym typeface="Hiragino Sans GB"/>
               </a:rPr>
               <a:t>020 平台化多租户（清单外新增）</a:t>
+            </a:r>
+            <a:endParaRPr lang="en-US" sz="1100"/>
+          </a:p>
+        </p:txBody>
+      </p:sp>
+      <p:sp>
+        <p:nvSpPr>
+          <p:cNvPr name="AutoShape 46" id="46"/>
+          <p:cNvSpPr/>
+          <p:nvPr/>
+        </p:nvSpPr>
+        <p:spPr>
+          <a:xfrm rot="0" flipH="false" flipV="false">
+            <a:off x="9067800" y="4953000"/>
+            <a:ext cx="2184400" cy="660400"/>
+          </a:xfrm>
+          <a:prstGeom prst="rect">
+            <a:avLst/>
+          </a:prstGeom>
+          <a:noFill/>
+          <a:ln w="12700" cmpd="sng" cap="flat">
+            <a:noFill/>
+            <a:prstDash val="solid"/>
+            <a:round/>
+          </a:ln>
+        </p:spPr>
+        <p:txBody>
+          <a:bodyPr anchor="ctr" rtlCol="false" vert="horz" wrap="none" lIns="0" rIns="0" tIns="0" bIns="0">
+            <a:noAutofit/>
+          </a:bodyPr>
+          <a:lstStyle/>
+          <a:p>
+            <a:pPr algn="l" marL="0" indent="0">
+              <a:lnSpc>
+                <a:spcPct val="125000"/>
+              </a:lnSpc>
+              <a:defRPr/>
+            </a:pPr>
+            <a:r>
+              <a:rPr lang="en-US" b="1" i="false" strike="noStrike" u="none" sz="1100">
+                <a:solidFill>
+                  <a:srgbClr val="0D9488"/>
+                </a:solidFill>
+                <a:latin typeface="Hiragino Sans GB"/>
+                <a:ea typeface="Hiragino Sans GB"/>
+                <a:cs typeface="Hiragino Sans GB"/>
+                <a:sym typeface="Hiragino Sans GB"/>
+              </a:rPr>
+              <a:t>021 统一上下文地址（清单外新增）</a:t>
             </a:r>
             <a:endParaRPr lang="en-US" sz="1100"/>
           </a:p>

--- a/docs/intro-v4.pptx
+++ b/docs/intro-v4.pptx
@@ -21381,7 +21381,7 @@
                 <a:cs typeface="Hiragino Sans GB"/>
                 <a:sym typeface="Hiragino Sans GB"/>
               </a:rPr>
-              <a:t>2026-10 ·</a:t>
+              <a:t>2026-10-13 · v0.2.1 已发布</a:t>
             </a:r>
             <a:endParaRPr lang="en-US" sz="1100" dirty="0"/>
           </a:p>
@@ -23115,7 +23115,7 @@
                 <a:cs typeface="Hiragino Sans GB"/>
                 <a:sym typeface="Hiragino Sans GB"/>
               </a:rPr>
-              <a:t>8 / 18</a:t>
+              <a:t>10 / 18</a:t>
             </a:r>
           </a:p>
         </p:txBody>
@@ -25222,7 +25222,7 @@
                 <a:cs typeface="Hiragino Sans GB"/>
                 <a:sym typeface="Hiragino Sans GB"/>
               </a:rPr>
-              <a:t>9 / 18</a:t>
+              <a:t>11 / 18</a:t>
             </a:r>
           </a:p>
         </p:txBody>
@@ -27258,7 +27258,7 @@
                 <a:cs typeface="Hiragino Sans GB"/>
                 <a:sym typeface="Hiragino Sans GB"/>
               </a:rPr>
-              <a:t>10 / 18</a:t>
+              <a:t>12 / 18</a:t>
             </a:r>
           </a:p>
         </p:txBody>
@@ -27757,7 +27757,7 @@
                 <a:cs typeface="Hiragino Sans GB"/>
                 <a:sym typeface="Hiragino Sans GB"/>
               </a:rPr>
-              <a:t>P0/P1/P2 共 15 项 + 清单外 020/021，已按 SDD 落地为库代码 + 单测，全部通过（chat-api 2229 / admin-api 433，2026-10 基线）。</a:t>
+              <a:t>P0/P1/P2 共 15 项 + 清单外 020/021，已按 SDD 落地为库代码 + 单测，全部通过（3469 项，2026-10-12 基线）。</a:t>
             </a:r>
             <a:endParaRPr lang="en-US" sz="1100"/>
           </a:p>
@@ -28609,7 +28609,7 @@
                 <a:cs typeface="Hiragino Sans GB"/>
                 <a:sym typeface="Hiragino Sans GB"/>
               </a:rPr>
-              <a:t>11 / 18</a:t>
+              <a:t>13 / 18</a:t>
             </a:r>
           </a:p>
         </p:txBody>
@@ -30027,7 +30027,7 @@
                 <a:cs typeface="Hiragino Sans GB"/>
                 <a:sym typeface="Hiragino Sans GB"/>
               </a:rPr>
-              <a:t>17 / 18</a:t>
+              <a:t>14 / 18</a:t>
             </a:r>
           </a:p>
         </p:txBody>
@@ -31478,7 +31478,7 @@
                 <a:cs typeface="Hiragino Sans GB"/>
                 <a:sym typeface="Hiragino Sans GB"/>
               </a:rPr>
-              <a:t>13 / 18</a:t>
+              <a:t>15 / 18</a:t>
             </a:r>
           </a:p>
         </p:txBody>
@@ -34095,7 +34095,7 @@
                 <a:cs typeface="Hiragino Sans GB"/>
                 <a:sym typeface="Hiragino Sans GB"/>
               </a:rPr>
-              <a:t>14 / 18</a:t>
+              <a:t>16 / 18</a:t>
             </a:r>
           </a:p>
         </p:txBody>
@@ -35806,7 +35806,7 @@
                 <a:cs typeface="Hiragino Sans GB"/>
                 <a:sym typeface="Hiragino Sans GB"/>
               </a:rPr>
-              <a:t>15 / 18</a:t>
+              <a:t>17 / 18</a:t>
             </a:r>
           </a:p>
         </p:txBody>
@@ -39551,7 +39551,7 @@
                 <a:latin typeface="Hiragino Sans GB"/>
                 <a:ea typeface="Hiragino Sans GB"/>
               </a:rPr>
-              <a:t>16 / 18</a:t>
+              <a:t>3 / 18</a:t>
             </a:r>
           </a:p>
         </p:txBody>
@@ -40873,7 +40873,7 @@
                 <a:cs typeface="Hiragino Sans GB"/>
                 <a:sym typeface="Hiragino Sans GB"/>
               </a:rPr>
-              <a:t>Docker Compose 一键 12 服务、自托管、模型数据自主</a:t>
+              <a:t>Docker Compose 一键 14 服务、自托管、模型数据自主</a:t>
             </a:r>
             <a:endParaRPr lang="en-US" sz="1100"/>
           </a:p>
@@ -41109,7 +41109,7 @@
                 <a:cs typeface="Hiragino Sans GB"/>
                 <a:sym typeface="Hiragino Sans GB"/>
               </a:rPr>
-              <a:t>3 / 18</a:t>
+              <a:t>4 / 18</a:t>
             </a:r>
           </a:p>
         </p:txBody>
@@ -41451,7 +41451,7 @@
                 <a:cs typeface="Hiragino Sans GB"/>
                 <a:sym typeface="Hiragino Sans GB"/>
               </a:rPr>
-              <a:t>Docker Compose 一键 12 服务 + CLI 启动器 + 备份/恢复，生产运维底座已就绪</a:t>
+              <a:t>Docker Compose 一键 14 服务 + CLI 启动器 + 备份/恢复，生产运维底座已就绪</a:t>
             </a:r>
             <a:endParaRPr lang="en-US" sz="1100"/>
           </a:p>
@@ -42247,7 +42247,7 @@
                 <a:cs typeface="Hiragino Sans GB"/>
                 <a:sym typeface="Hiragino Sans GB"/>
               </a:rPr>
-              <a:t>4 / 18</a:t>
+              <a:t>5 / 18</a:t>
             </a:r>
           </a:p>
         </p:txBody>
@@ -44394,7 +44394,7 @@
                 <a:cs typeface="Hiragino Sans GB"/>
                 <a:sym typeface="Hiragino Sans GB"/>
               </a:rPr>
-              <a:t>/ 21 个特性（17 </a:t>
+              <a:t>/ 26 个特性（26 </a:t>
             </a:r>
             <a:r>
               <a:rPr lang="en-US" sz="1250" b="0" i="0" u="none" strike="noStrike" dirty="0" err="1">
@@ -44442,7 +44442,7 @@
                 <a:cs typeface="Hiragino Sans GB"/>
                 <a:sym typeface="Hiragino Sans GB"/>
               </a:rPr>
-              <a:t> / 354 </a:t>
+              <a:t> / 852 </a:t>
             </a:r>
             <a:r>
               <a:rPr lang="en-US" sz="1250" b="0" i="0" u="none" strike="noStrike" dirty="0" err="1">
@@ -44562,7 +44562,7 @@
                 <a:cs typeface="Hiragino Sans GB"/>
                 <a:sym typeface="Hiragino Sans GB"/>
               </a:rPr>
-              <a:t>5 / 18</a:t>
+              <a:t>6 / 18</a:t>
             </a:r>
           </a:p>
         </p:txBody>
@@ -45123,7 +45123,7 @@
                 <a:latin typeface="Hiragino Sans GB"/>
                 <a:ea typeface="Hiragino Sans GB"/>
               </a:rPr>
-              <a:t>21 个特性规约：spec / plan / checklist / tasks 四层齐备</a:t>
+              <a:t>26 个特性规约：spec / plan / checklist / tasks 四层齐备</a:t>
             </a:r>
             <a:endParaRPr/>
           </a:p>
@@ -45160,7 +45160,7 @@
                 <a:latin typeface="Hiragino Sans GB"/>
                 <a:ea typeface="Hiragino Sans GB"/>
               </a:rPr>
-              <a:t>21 份 spec.md + 21 份 plan.md  ·  全部完成</a:t>
+              <a:t>26 份 spec.md + 26 份 plan.md  ·  全部完成</a:t>
             </a:r>
             <a:endParaRPr/>
           </a:p>
@@ -45197,7 +45197,7 @@
                 <a:latin typeface="Hiragino Sans GB"/>
                 <a:ea typeface="Hiragino Sans GB"/>
               </a:rPr>
-              <a:t>17 份 tasks.md  ·  354 项全部勾选</a:t>
+              <a:t>26 份 tasks.md  ·  852 项全部勾选</a:t>
             </a:r>
             <a:endParaRPr/>
           </a:p>
@@ -45456,8 +45456,8 @@
                 <a:latin typeface="Hiragino Sans GB"/>
                 <a:ea typeface="Hiragino Sans GB"/>
               </a:rPr>
-              <a:t>保留原始状态：spec / plan / checklist，
-不补 tasks.md</a:t>
+              <a:t>spec / plan / checklist 原始保留
+tasks.md 已于 2026-10-11 补齐（141 项）</a:t>
             </a:r>
             <a:endParaRPr/>
           </a:p>
@@ -46421,7 +46421,7 @@
                 <a:latin typeface="Hiragino Sans GB"/>
                 <a:ea typeface="Hiragino Sans GB"/>
               </a:rPr>
-              <a:t>落地审计</a:t>
+              <a:t>落地审计 · 质量加固</a:t>
             </a:r>
             <a:endParaRPr/>
           </a:p>
@@ -46495,7 +46495,7 @@
                 <a:latin typeface="Hiragino Sans GB"/>
                 <a:ea typeface="Hiragino Sans GB"/>
               </a:rPr>
-              <a:t>高危缺口 ≥60 条已于 2026-10-03～10-05 全部修复；017/021 于 10-05 优化轮完整实现</a:t>
+              <a:t>022–026 质量加固 10-11 新增（覆盖 QF 审计 283 项 P0/P1）；017/021 于 10-05 完整实现</a:t>
             </a:r>
             <a:endParaRPr/>
           </a:p>
@@ -46569,7 +46569,7 @@
                 <a:latin typeface="Hiragino Sans GB"/>
                 <a:ea typeface="Hiragino Sans GB"/>
               </a:rPr>
-              <a:t>12 / 18</a:t>
+              <a:t>7 / 18</a:t>
             </a:r>
             <a:endParaRPr/>
           </a:p>
@@ -48400,7 +48400,7 @@
                 <a:cs typeface="Hiragino Sans GB"/>
                 <a:sym typeface="Hiragino Sans GB"/>
               </a:rPr>
-              <a:t>6 / 18</a:t>
+              <a:t>8 / 18</a:t>
             </a:r>
           </a:p>
         </p:txBody>
@@ -50510,7 +50510,7 @@
                 <a:cs typeface="Hiragino Sans GB"/>
                 <a:sym typeface="Hiragino Sans GB"/>
               </a:rPr>
-              <a:t>7 / 18</a:t>
+              <a:t>9 / 18</a:t>
             </a:r>
           </a:p>
         </p:txBody>

--- a/docs/intro-v4.pptx
+++ b/docs/intro-v4.pptx
@@ -21517,7 +21517,7 @@
                 <a:cs typeface="Hiragino Sans GB"/>
                 <a:sym typeface="Hiragino Sans GB"/>
               </a:rPr>
-              <a:t>2026-10-22 · v0.2.4 已发布</a:t>
+              <a:t>2026-10-23 · v0.2.5 已发布</a:t>
             </a:r>
             <a:endParaRPr lang="zh-CN" sz="1300" b="0" i="0" u="none" strike="noStrike">
               <a:solidFill>
@@ -25540,7 +25540,7 @@
                 <a:cs typeface="Hiragino Sans GB"/>
                 <a:sym typeface="Hiragino Sans GB"/>
               </a:rPr>
-              <a:t>31 个特性 已按 SDD 落地，库代码 + 单测全绿</a:t>
+              <a:t>44 个特性 已按 SDD 落地，库代码 + 单测全绿</a:t>
             </a:r>
             <a:endParaRPr lang="zh-CN" sz="2600" b="1" i="0" u="none" strike="noStrike">
               <a:solidFill>
@@ -27477,7 +27477,7 @@
                 <a:cs typeface="Hiragino Sans GB"/>
                 <a:sym typeface="Hiragino Sans GB"/>
               </a:rPr>
-              <a:t>31 个特性 已按 SDD 落地，库代码 + 单测全绿</a:t>
+              <a:t>44 个特性 已按 SDD 落地，库代码 + 单测全绿</a:t>
             </a:r>
             <a:endParaRPr lang="zh-CN" sz="2600" b="1" i="0" u="none" strike="noStrike">
               <a:solidFill>
@@ -27657,7 +27657,7 @@
                 <a:cs typeface="Hiragino Sans GB"/>
                 <a:sym typeface="Hiragino Sans GB"/>
               </a:rPr>
-              <a:t>已完成 · 31 个特性全绿</a:t>
+              <a:t>已完成 · 44 个特性全绿</a:t>
             </a:r>
             <a:endParaRPr lang="zh-CN" sz="1350" b="1" i="0" u="none" strike="noStrike">
               <a:solidFill>
@@ -27714,7 +27714,7 @@
                 <a:cs typeface="Hiragino Sans GB"/>
                 <a:sym typeface="Hiragino Sans GB"/>
               </a:rPr>
-              <a:t>31 个特性（含 022–031 质量加固与数据/体验）已按 SDD 落地为库代码 + 单测，全部通过（2026-10-22 基线）。</a:t>
+              <a:t>44 个特性（含 022–031 质量加固与数据/体验、032–044 AgentOS 整合批次）已按 SDD 落地为库代码 + 单测，全部通过（2026-10-23 基线）。</a:t>
             </a:r>
             <a:endParaRPr lang="zh-CN" sz="1150" b="0" i="0" u="none" strike="noStrike">
               <a:solidFill>
@@ -44284,7 +44284,7 @@
                 <a:cs typeface="Hiragino Sans GB"/>
                 <a:sym typeface="Hiragino Sans GB"/>
               </a:rPr>
-              <a:t>最新进展：31 个特性已按 SDD 落地，库代码 + 单测全绿，接线与 UI 触点闭合；specs/ 31 个特性（31 份 tasks.md · 1000+ 项）已归档。</a:t>
+              <a:t>最新进展：44 个特性已按 SDD 落地，库代码 + 单测全绿，接线与 UI 触点闭合；specs/ 44 个特性（44 份 tasks.md · 1044 项）已归档。</a:t>
             </a:r>
             <a:endParaRPr lang="zh-CN" sz="1250" b="0" i="0" u="none" strike="noStrike">
               <a:solidFill>
@@ -44967,7 +44967,7 @@
                 <a:latin typeface="Hiragino Sans GB"/>
                 <a:ea typeface="Hiragino Sans GB"/>
               </a:rPr>
-              <a:t>31 个特性规约：spec / plan / checklist / tasks 四层齐备</a:t>
+              <a:t>44 个特性规约：spec / plan / checklist / tasks 四层齐备</a:t>
             </a:r>
             <a:endParaRPr lang="zh-CN" sz="2600">
               <a:solidFill>
@@ -45011,7 +45011,7 @@
                 <a:latin typeface="Hiragino Sans GB"/>
                 <a:ea typeface="Hiragino Sans GB"/>
               </a:rPr>
-              <a:t>31 份 spec.md + 31 份 plan.md  ·  全部完成</a:t>
+              <a:t>44 份 spec.md + 44 份 plan.md  ·  全部完成</a:t>
             </a:r>
             <a:endParaRPr lang="zh-CN" sz="1300">
               <a:solidFill>
@@ -45055,7 +45055,7 @@
                 <a:latin typeface="Hiragino Sans GB"/>
                 <a:ea typeface="Hiragino Sans GB"/>
               </a:rPr>
-              <a:t>31 份 tasks.md  ·  1000+ 项全部勾选</a:t>
+              <a:t>44 份 tasks.md  ·  1044 项全部勾选</a:t>
             </a:r>
             <a:endParaRPr lang="zh-CN" sz="1300">
               <a:solidFill>
@@ -46507,9 +46507,15 @@
                 <a:latin typeface="Hiragino Sans GB"/>
                 <a:ea typeface="Hiragino Sans GB"/>
               </a:rPr>
-              <a:t>027–031 数据后端迁移 · 轨迹 Tab · SSO 接收 · 本体数据权限 · 模型供应商发现（2026-10-13 ~ 10-18 新增，回溯补规约）</a:t>
-            </a:r>
-            <a:endParaRPr/>
+              <a:t>027–031 数据后端迁移 · 轨迹 Tab · SSO 接收 · 本体数据权限 · 模型供应商发现（2026-10-13 ~ 10-18 新增，回溯补规约）；032–044 AgentOS 整合批次（2026-10-23 新增，2026-10-24 代码落地）</a:t>
+            </a:r>
+            <a:endParaRPr lang="zh-CN" sz="900">
+              <a:solidFill>
+                <a:srgbClr val="64748B"/>
+              </a:solidFill>
+              <a:latin typeface="Hiragino Sans GB"/>
+              <a:ea typeface="Hiragino Sans GB"/>
+            </a:endParaRPr>
           </a:p>
         </p:txBody>
       </p:sp>

--- a/docs/intro-v4.pptx
+++ b/docs/intro-v4.pptx
@@ -21517,7 +21517,7 @@
                 <a:cs typeface="Hiragino Sans GB"/>
                 <a:sym typeface="Hiragino Sans GB"/>
               </a:rPr>
-              <a:t>2026-10-23 · v0.2.5 已发布</a:t>
+              <a:t>2026-10-28 · v0.2.5</a:t>
             </a:r>
             <a:endParaRPr lang="zh-CN" sz="1300" b="0" i="0" u="none" strike="noStrike">
               <a:solidFill>
@@ -25540,7 +25540,7 @@
                 <a:cs typeface="Hiragino Sans GB"/>
                 <a:sym typeface="Hiragino Sans GB"/>
               </a:rPr>
-              <a:t>44 个特性 已按 SDD 落地，库代码 + 单测全绿</a:t>
+              <a:t>44 个特性 已按 SDD 推进，027 迁移已落地、库代码 + 单测全绿</a:t>
             </a:r>
             <a:endParaRPr lang="zh-CN" sz="2600" b="1" i="0" u="none" strike="noStrike">
               <a:solidFill>
@@ -27477,7 +27477,7 @@
                 <a:cs typeface="Hiragino Sans GB"/>
                 <a:sym typeface="Hiragino Sans GB"/>
               </a:rPr>
-              <a:t>44 个特性 已按 SDD 落地，库代码 + 单测全绿</a:t>
+              <a:t>44 个特性 已按 SDD 推进，027 迁移已落地、库代码 + 单测全绿</a:t>
             </a:r>
             <a:endParaRPr lang="zh-CN" sz="2600" b="1" i="0" u="none" strike="noStrike">
               <a:solidFill>
@@ -27657,7 +27657,7 @@
                 <a:cs typeface="Hiragino Sans GB"/>
                 <a:sym typeface="Hiragino Sans GB"/>
               </a:rPr>
-              <a:t>已完成 · 44 个特性全绿</a:t>
+              <a:t>已完成 · 027 迁移落地 + 44 特性推进</a:t>
             </a:r>
             <a:endParaRPr lang="zh-CN" sz="1350" b="1" i="0" u="none" strike="noStrike">
               <a:solidFill>
@@ -27714,7 +27714,7 @@
                 <a:cs typeface="Hiragino Sans GB"/>
                 <a:sym typeface="Hiragino Sans GB"/>
               </a:rPr>
-              <a:t>44 个特性（含 022–031 质量加固与数据/体验、032–044 AgentOS 整合批次）已按 SDD 落地为库代码 + 单测，全部通过（2026-10-23 基线）。</a:t>
+              <a:t>44 个特性（含 022–031 质量加固与数据/体验、032–044 AgentOS 整合批次）已按 SDD 推进：027 数据后端迁移 R1–R3 已落地真库，030/031 已落部分代码，库代码 + 单测全绿（2026-10-28 基线）。</a:t>
             </a:r>
             <a:endParaRPr lang="zh-CN" sz="1150" b="0" i="0" u="none" strike="noStrike">
               <a:solidFill>
@@ -44284,7 +44284,7 @@
                 <a:cs typeface="Hiragino Sans GB"/>
                 <a:sym typeface="Hiragino Sans GB"/>
               </a:rPr>
-              <a:t>最新进展：44 个特性已按 SDD 落地，库代码 + 单测全绿，接线与 UI 触点闭合；specs/ 44 个特性（44 份 tasks.md · 1044 项）已归档。</a:t>
+              <a:t>最新进展：44 个特性按 SDD 推进，027 数据后端迁移已落地（R1–R3 全在真库跑通）；specs/ 44 个特性（44 份 tasks.md · 1419 项，已勾 1392）。</a:t>
             </a:r>
             <a:endParaRPr lang="zh-CN" sz="1250" b="0" i="0" u="none" strike="noStrike">
               <a:solidFill>
@@ -45055,7 +45055,7 @@
                 <a:latin typeface="Hiragino Sans GB"/>
                 <a:ea typeface="Hiragino Sans GB"/>
               </a:rPr>
-              <a:t>44 份 tasks.md  ·  1044 项全部勾选</a:t>
+              <a:t>44 份 tasks.md  ·  1419 项（已勾 1392 · 余 27）</a:t>
             </a:r>
             <a:endParaRPr lang="zh-CN" sz="1300">
               <a:solidFill>
@@ -46394,9 +46394,15 @@
                 <a:latin typeface="Hiragino Sans GB"/>
                 <a:ea typeface="Hiragino Sans GB"/>
               </a:rPr>
-              <a:t>022–026 质量加固 10-11 新增（覆盖 QF 审计 283 项 P0/P1）；017/021 于 10-05 完整实现</a:t>
-            </a:r>
-            <a:endParaRPr/>
+              <a:t>022–026 质量加固 10-11 新增（覆盖 QF 审计 313 项 P0/P1：安全 96 · 可观测 74 · 部署 42 · API 50 · 性能 51）；017/021 于 10-05 完整实现</a:t>
+            </a:r>
+            <a:endParaRPr lang="zh-CN" sz="1000">
+              <a:solidFill>
+                <a:srgbClr val="64748B"/>
+              </a:solidFill>
+              <a:latin typeface="Hiragino Sans GB"/>
+              <a:ea typeface="Hiragino Sans GB"/>
+            </a:endParaRPr>
           </a:p>
         </p:txBody>
       </p:sp>
@@ -46507,7 +46513,7 @@
                 <a:latin typeface="Hiragino Sans GB"/>
                 <a:ea typeface="Hiragino Sans GB"/>
               </a:rPr>
-              <a:t>027–031 数据后端迁移 · 轨迹 Tab · SSO 接收 · 本体数据权限 · 模型供应商发现（2026-10-13 ~ 10-18 新增，回溯补规约）；032–044 AgentOS 整合批次（2026-10-23 新增，2026-10-24 代码落地）</a:t>
+              <a:t>027–031 数据后端迁移 · 轨迹 Tab · SSO 接收 · 本体数据权限 · 模型供应商发现（2026-10-13 ~ 10-18）；027 迁移已落地真库，030/031 已落部分代码；032–044 AgentOS 批次（10-23 新增，多数代码已落地，余 27 项收尾）</a:t>
             </a:r>
             <a:endParaRPr lang="zh-CN" sz="900">
               <a:solidFill>
